--- a/Materjalid/Day6 SQL/6-paev-andmetarkus-esitlus.pptx
+++ b/Materjalid/Day6 SQL/6-paev-andmetarkus-esitlus.pptx
@@ -5,10 +5,10 @@
     <p:sldMasterId id="2147483648" r:id="rId4"/>
   </p:sldMasterIdLst>
   <p:notesMasterIdLst>
-    <p:notesMasterId r:id="rId22"/>
+    <p:notesMasterId r:id="rId23"/>
   </p:notesMasterIdLst>
   <p:handoutMasterIdLst>
-    <p:handoutMasterId r:id="rId23"/>
+    <p:handoutMasterId r:id="rId24"/>
   </p:handoutMasterIdLst>
   <p:sldIdLst>
     <p:sldId id="417" r:id="rId5"/>
@@ -18,33 +18,34 @@
     <p:sldId id="466" r:id="rId9"/>
     <p:sldId id="468" r:id="rId10"/>
     <p:sldId id="469" r:id="rId11"/>
-    <p:sldId id="488" r:id="rId12"/>
-    <p:sldId id="545" r:id="rId13"/>
-    <p:sldId id="547" r:id="rId14"/>
-    <p:sldId id="548" r:id="rId15"/>
-    <p:sldId id="546" r:id="rId16"/>
-    <p:sldId id="550" r:id="rId17"/>
-    <p:sldId id="549" r:id="rId18"/>
-    <p:sldId id="551" r:id="rId19"/>
-    <p:sldId id="464" r:id="rId20"/>
-    <p:sldId id="553" r:id="rId21"/>
+    <p:sldId id="554" r:id="rId12"/>
+    <p:sldId id="488" r:id="rId13"/>
+    <p:sldId id="545" r:id="rId14"/>
+    <p:sldId id="547" r:id="rId15"/>
+    <p:sldId id="548" r:id="rId16"/>
+    <p:sldId id="546" r:id="rId17"/>
+    <p:sldId id="550" r:id="rId18"/>
+    <p:sldId id="549" r:id="rId19"/>
+    <p:sldId id="551" r:id="rId20"/>
+    <p:sldId id="464" r:id="rId21"/>
+    <p:sldId id="553" r:id="rId22"/>
   </p:sldIdLst>
   <p:sldSz cx="12192000" cy="6858000"/>
   <p:notesSz cx="6858000" cy="9144000"/>
   <p:embeddedFontLst>
     <p:embeddedFont>
       <p:font typeface="Inter" panose="020B0604020202020204" charset="0"/>
-      <p:regular r:id="rId24"/>
-      <p:bold r:id="rId25"/>
+      <p:regular r:id="rId25"/>
+      <p:bold r:id="rId26"/>
     </p:embeddedFont>
     <p:embeddedFont>
       <p:font typeface="Inter Bold" panose="020B0604020202020204" charset="0"/>
-      <p:bold r:id="rId26"/>
+      <p:bold r:id="rId27"/>
     </p:embeddedFont>
     <p:embeddedFont>
       <p:font typeface="Poppins SemiBold" panose="00000700000000000000" pitchFamily="2" charset="0"/>
-      <p:bold r:id="rId27"/>
-      <p:boldItalic r:id="rId28"/>
+      <p:bold r:id="rId28"/>
+      <p:boldItalic r:id="rId29"/>
     </p:embeddedFont>
   </p:embeddedFontLst>
   <p:defaultTextStyle>
@@ -284,7 +285,7 @@
           <a:p>
             <a:fld id="{F9D2AD6E-DEDD-49A0-A4BE-7A081A9112DA}" type="datetimeFigureOut">
               <a:rPr lang="en-US" smtClean="0"/>
-              <a:t>8/18/2026</a:t>
+              <a:t>9/4/2026</a:t>
             </a:fld>
             <a:endParaRPr lang="en-US"/>
           </a:p>
@@ -460,7 +461,7 @@
           </a:lstStyle>
           <a:p>
             <a:fld id="{2AF9C1A6-4321-41FA-B001-4140F0E2457F}" type="datetimeFigureOut">
-              <a:t>8/18/2026</a:t>
+              <a:t>9/4/2026</a:t>
             </a:fld>
             <a:endParaRPr lang="en-US"/>
           </a:p>
@@ -12057,7 +12058,7 @@
           <a:p>
             <a:fld id="{DE840A40-73C8-4048-8140-49F5D65BB431}" type="datetimeFigureOut">
               <a:rPr lang="et-EE" smtClean="0"/>
-              <a:t>18.08.2026</a:t>
+              <a:t>04.09.2026</a:t>
             </a:fld>
             <a:endParaRPr lang="et-EE"/>
           </a:p>
@@ -24078,6 +24079,119 @@
         <p:cNvPr id="1" name="">
           <a:extLst>
             <a:ext uri="{FF2B5EF4-FFF2-40B4-BE49-F238E27FC236}">
+              <a16:creationId xmlns:a16="http://schemas.microsoft.com/office/drawing/2014/main" id="{EA4C8894-EA7E-D031-E39B-D15A9A1ACF35}"/>
+            </a:ext>
+          </a:extLst>
+        </p:cNvPr>
+        <p:cNvGrpSpPr/>
+        <p:nvPr/>
+      </p:nvGrpSpPr>
+      <p:grpSpPr>
+        <a:xfrm>
+          <a:off x="0" y="0"/>
+          <a:ext cx="0" cy="0"/>
+          <a:chOff x="0" y="0"/>
+          <a:chExt cx="0" cy="0"/>
+        </a:xfrm>
+      </p:grpSpPr>
+      <p:sp>
+        <p:nvSpPr>
+          <p:cNvPr id="3" name="Content Placeholder 2">
+            <a:extLst>
+              <a:ext uri="{FF2B5EF4-FFF2-40B4-BE49-F238E27FC236}">
+                <a16:creationId xmlns:a16="http://schemas.microsoft.com/office/drawing/2014/main" id="{4AE7B3F8-1072-F92A-474F-F8B757A392D0}"/>
+              </a:ext>
+            </a:extLst>
+          </p:cNvPr>
+          <p:cNvSpPr>
+            <a:spLocks noGrp="1"/>
+          </p:cNvSpPr>
+          <p:nvPr>
+            <p:ph sz="quarter" idx="10"/>
+          </p:nvPr>
+        </p:nvSpPr>
+        <p:spPr/>
+        <p:txBody>
+          <a:bodyPr/>
+          <a:lstStyle/>
+          <a:p>
+            <a:pPr marL="0" indent="0">
+              <a:lnSpc>
+                <a:spcPct val="150000"/>
+              </a:lnSpc>
+              <a:buNone/>
+            </a:pPr>
+            <a:endParaRPr lang="en-US" sz="2800">
+              <a:ea typeface="Inter"/>
+            </a:endParaRPr>
+          </a:p>
+          <a:p>
+            <a:pPr marL="457200" lvl="1" indent="0">
+              <a:lnSpc>
+                <a:spcPct val="150000"/>
+              </a:lnSpc>
+              <a:buNone/>
+            </a:pPr>
+            <a:endParaRPr lang="en-US" sz="2000">
+              <a:ea typeface="Inter"/>
+            </a:endParaRPr>
+          </a:p>
+        </p:txBody>
+      </p:sp>
+      <p:sp>
+        <p:nvSpPr>
+          <p:cNvPr id="5" name="Title 4">
+            <a:extLst>
+              <a:ext uri="{FF2B5EF4-FFF2-40B4-BE49-F238E27FC236}">
+                <a16:creationId xmlns:a16="http://schemas.microsoft.com/office/drawing/2014/main" id="{5259C4DD-AD06-746E-A9D2-C5E114417B7C}"/>
+              </a:ext>
+            </a:extLst>
+          </p:cNvPr>
+          <p:cNvSpPr>
+            <a:spLocks noGrp="1"/>
+          </p:cNvSpPr>
+          <p:nvPr>
+            <p:ph type="ctrTitle"/>
+          </p:nvPr>
+        </p:nvSpPr>
+        <p:spPr>
+          <a:xfrm>
+            <a:off x="4283493" y="2675333"/>
+            <a:ext cx="3777666" cy="357043"/>
+          </a:xfrm>
+        </p:spPr>
+        <p:txBody>
+          <a:bodyPr/>
+          <a:lstStyle/>
+          <a:p>
+            <a:r>
+              <a:rPr lang="en-US"/>
+              <a:t>Paus 10:30-10:45</a:t>
+            </a:r>
+          </a:p>
+        </p:txBody>
+      </p:sp>
+    </p:spTree>
+    <p:extLst>
+      <p:ext uri="{BB962C8B-B14F-4D97-AF65-F5344CB8AC3E}">
+        <p14:creationId xmlns:p14="http://schemas.microsoft.com/office/powerpoint/2010/main" val="1316149546"/>
+      </p:ext>
+    </p:extLst>
+  </p:cSld>
+  <p:clrMapOvr>
+    <a:masterClrMapping/>
+  </p:clrMapOvr>
+</p:sld>
+</file>
+
+<file path=ppt/slides/slide11.xml><?xml version="1.0" encoding="utf-8"?>
+<p:sld xmlns:a="http://schemas.openxmlformats.org/drawingml/2006/main" xmlns:r="http://schemas.openxmlformats.org/officeDocument/2006/relationships" xmlns:p="http://schemas.openxmlformats.org/presentationml/2006/main">
+  <p:cSld>
+    <p:spTree>
+      <p:nvGrpSpPr>
+        <p:cNvPr id="1" name="">
+          <a:extLst>
+            <a:ext uri="{FF2B5EF4-FFF2-40B4-BE49-F238E27FC236}">
               <a16:creationId xmlns:a16="http://schemas.microsoft.com/office/drawing/2014/main" id="{554F17EF-948F-440F-9776-D47D637800CE}"/>
             </a:ext>
           </a:extLst>
@@ -24388,7 +24502,7 @@
 </p:sld>
 </file>
 
-<file path=ppt/slides/slide11.xml><?xml version="1.0" encoding="utf-8"?>
+<file path=ppt/slides/slide12.xml><?xml version="1.0" encoding="utf-8"?>
 <p:sld xmlns:a="http://schemas.openxmlformats.org/drawingml/2006/main" xmlns:r="http://schemas.openxmlformats.org/officeDocument/2006/relationships" xmlns:p="http://schemas.openxmlformats.org/presentationml/2006/main">
   <p:cSld>
     <p:spTree>
@@ -24526,7 +24640,7 @@
 </p:sld>
 </file>
 
-<file path=ppt/slides/slide12.xml><?xml version="1.0" encoding="utf-8"?>
+<file path=ppt/slides/slide13.xml><?xml version="1.0" encoding="utf-8"?>
 <p:sld xmlns:a="http://schemas.openxmlformats.org/drawingml/2006/main" xmlns:r="http://schemas.openxmlformats.org/officeDocument/2006/relationships" xmlns:p="http://schemas.openxmlformats.org/presentationml/2006/main">
   <p:cSld>
     <p:spTree>
@@ -24643,7 +24757,7 @@
 </p:sld>
 </file>
 
-<file path=ppt/slides/slide13.xml><?xml version="1.0" encoding="utf-8"?>
+<file path=ppt/slides/slide14.xml><?xml version="1.0" encoding="utf-8"?>
 <p:sld xmlns:a="http://schemas.openxmlformats.org/drawingml/2006/main" xmlns:r="http://schemas.openxmlformats.org/officeDocument/2006/relationships" xmlns:p="http://schemas.openxmlformats.org/presentationml/2006/main">
   <p:cSld>
     <p:spTree>
@@ -24858,7 +24972,7 @@
 </p:sld>
 </file>
 
-<file path=ppt/slides/slide14.xml><?xml version="1.0" encoding="utf-8"?>
+<file path=ppt/slides/slide15.xml><?xml version="1.0" encoding="utf-8"?>
 <p:sld xmlns:a="http://schemas.openxmlformats.org/drawingml/2006/main" xmlns:r="http://schemas.openxmlformats.org/officeDocument/2006/relationships" xmlns:p="http://schemas.openxmlformats.org/presentationml/2006/main">
   <p:cSld>
     <p:spTree>
@@ -25005,7 +25119,7 @@
 </p:sld>
 </file>
 
-<file path=ppt/slides/slide15.xml><?xml version="1.0" encoding="utf-8"?>
+<file path=ppt/slides/slide16.xml><?xml version="1.0" encoding="utf-8"?>
 <p:sld xmlns:a="http://schemas.openxmlformats.org/drawingml/2006/main" xmlns:r="http://schemas.openxmlformats.org/officeDocument/2006/relationships" xmlns:p="http://schemas.openxmlformats.org/presentationml/2006/main">
   <p:cSld>
     <p:spTree>
@@ -25118,7 +25232,7 @@
 </p:sld>
 </file>
 
-<file path=ppt/slides/slide16.xml><?xml version="1.0" encoding="utf-8"?>
+<file path=ppt/slides/slide17.xml><?xml version="1.0" encoding="utf-8"?>
 <p:sld xmlns:a="http://schemas.openxmlformats.org/drawingml/2006/main" xmlns:r="http://schemas.openxmlformats.org/officeDocument/2006/relationships" xmlns:p="http://schemas.openxmlformats.org/presentationml/2006/main">
   <p:cSld>
     <p:spTree>
@@ -25220,7 +25334,7 @@
 </p:sld>
 </file>
 
-<file path=ppt/slides/slide17.xml><?xml version="1.0" encoding="utf-8"?>
+<file path=ppt/slides/slide18.xml><?xml version="1.0" encoding="utf-8"?>
 <p:sld xmlns:a="http://schemas.openxmlformats.org/drawingml/2006/main" xmlns:r="http://schemas.openxmlformats.org/officeDocument/2006/relationships" xmlns:p="http://schemas.openxmlformats.org/presentationml/2006/main">
   <p:cSld>
     <p:spTree>
@@ -25466,7 +25580,7 @@
                 <a:ea typeface="+mj-lt"/>
                 <a:cs typeface="+mj-lt"/>
               </a:rPr>
-              <a:t> - V </a:t>
+              <a:t> - VI </a:t>
             </a:r>
             <a:r>
               <a:rPr lang="en-US" sz="3600" b="1" dirty="0" err="1">
@@ -29031,7 +29145,7 @@
               <a:buNone/>
             </a:pPr>
             <a:r>
-              <a:rPr lang="en-US">
+              <a:rPr lang="en-US" dirty="0">
                 <a:ea typeface="Inter"/>
               </a:rPr>
               <a:t>1. FROM/JOIN </a:t>
@@ -29043,49 +29157,49 @@
               <a:buChar char="Ø"/>
             </a:pPr>
             <a:r>
-              <a:rPr lang="en-US" err="1">
+              <a:rPr lang="en-US" dirty="0" err="1">
                 <a:ea typeface="Inter"/>
               </a:rPr>
               <a:t>Defineerib</a:t>
             </a:r>
             <a:r>
-              <a:rPr lang="en-US">
+              <a:rPr lang="en-US" dirty="0">
                 <a:ea typeface="Inter"/>
               </a:rPr>
               <a:t>, </a:t>
             </a:r>
             <a:r>
-              <a:rPr lang="en-US" err="1">
+              <a:rPr lang="en-US" dirty="0" err="1">
                 <a:ea typeface="Inter"/>
               </a:rPr>
               <a:t>milliseid</a:t>
             </a:r>
             <a:r>
-              <a:rPr lang="en-US">
+              <a:rPr lang="en-US" dirty="0">
                 <a:ea typeface="Inter"/>
               </a:rPr>
               <a:t> </a:t>
             </a:r>
             <a:r>
-              <a:rPr lang="en-US" err="1">
+              <a:rPr lang="en-US" dirty="0" err="1">
                 <a:ea typeface="Inter"/>
               </a:rPr>
               <a:t>tabeleid</a:t>
             </a:r>
             <a:r>
-              <a:rPr lang="en-US">
+              <a:rPr lang="en-US" dirty="0">
                 <a:ea typeface="Inter"/>
               </a:rPr>
               <a:t> </a:t>
             </a:r>
             <a:r>
-              <a:rPr lang="en-US" err="1">
+              <a:rPr lang="en-US" dirty="0" err="1">
                 <a:ea typeface="Inter"/>
               </a:rPr>
               <a:t>kasutatakse</a:t>
             </a:r>
             <a:r>
-              <a:rPr lang="en-US">
+              <a:rPr lang="en-US" dirty="0">
                 <a:ea typeface="Inter"/>
               </a:rPr>
               <a:t>.</a:t>
@@ -29096,7 +29210,7 @@
               <a:buNone/>
             </a:pPr>
             <a:r>
-              <a:rPr lang="en-US">
+              <a:rPr lang="en-US" dirty="0">
                 <a:ea typeface="Inter"/>
               </a:rPr>
               <a:t>2. WHERE </a:t>
@@ -29108,85 +29222,85 @@
               <a:buChar char="Ø"/>
             </a:pPr>
             <a:r>
-              <a:rPr lang="en-US" err="1">
+              <a:rPr lang="en-US" dirty="0" err="1">
                 <a:ea typeface="Inter"/>
               </a:rPr>
               <a:t>Filtreerib</a:t>
             </a:r>
             <a:r>
-              <a:rPr lang="en-US">
+              <a:rPr lang="en-US" dirty="0">
                 <a:ea typeface="Inter"/>
               </a:rPr>
               <a:t> </a:t>
             </a:r>
             <a:r>
-              <a:rPr lang="en-US" err="1">
+              <a:rPr lang="en-US" dirty="0" err="1">
                 <a:ea typeface="Inter"/>
               </a:rPr>
               <a:t>välja</a:t>
             </a:r>
             <a:r>
-              <a:rPr lang="en-US">
+              <a:rPr lang="en-US" dirty="0">
                 <a:ea typeface="Inter"/>
               </a:rPr>
               <a:t> </a:t>
             </a:r>
             <a:r>
-              <a:rPr lang="en-US" err="1">
+              <a:rPr lang="en-US" dirty="0" err="1">
                 <a:ea typeface="Inter"/>
               </a:rPr>
               <a:t>andmeread</a:t>
             </a:r>
             <a:r>
-              <a:rPr lang="en-US">
+              <a:rPr lang="en-US" dirty="0">
                 <a:ea typeface="Inter"/>
               </a:rPr>
               <a:t>, mis </a:t>
             </a:r>
             <a:r>
-              <a:rPr lang="en-US" err="1">
+              <a:rPr lang="en-US" dirty="0" err="1">
                 <a:ea typeface="Inter"/>
               </a:rPr>
               <a:t>ei</a:t>
             </a:r>
             <a:r>
-              <a:rPr lang="en-US">
+              <a:rPr lang="en-US" dirty="0">
                 <a:ea typeface="Inter"/>
               </a:rPr>
               <a:t> </a:t>
             </a:r>
             <a:r>
-              <a:rPr lang="en-US" err="1">
+              <a:rPr lang="en-US" dirty="0" err="1">
                 <a:ea typeface="Inter"/>
               </a:rPr>
               <a:t>vasta</a:t>
             </a:r>
             <a:r>
-              <a:rPr lang="en-US">
+              <a:rPr lang="en-US" dirty="0">
                 <a:ea typeface="Inter"/>
               </a:rPr>
               <a:t> </a:t>
             </a:r>
             <a:r>
-              <a:rPr lang="en-US" err="1">
+              <a:rPr lang="en-US" dirty="0" err="1">
                 <a:ea typeface="Inter"/>
               </a:rPr>
               <a:t>tingimustele</a:t>
             </a:r>
             <a:r>
-              <a:rPr lang="en-US">
+              <a:rPr lang="en-US" dirty="0">
                 <a:ea typeface="Inter"/>
               </a:rPr>
               <a:t>.</a:t>
             </a:r>
-            <a:endParaRPr lang="en-US"/>
+            <a:endParaRPr lang="en-US" dirty="0"/>
           </a:p>
           <a:p>
             <a:pPr marL="0" indent="0">
               <a:buNone/>
             </a:pPr>
             <a:r>
-              <a:rPr lang="en-US">
+              <a:rPr lang="en-US" dirty="0">
                 <a:ea typeface="Inter"/>
               </a:rPr>
               <a:t>3. GROUP BY </a:t>
@@ -29198,37 +29312,37 @@
               <a:buChar char="Ø"/>
             </a:pPr>
             <a:r>
-              <a:rPr lang="en-US" err="1">
+              <a:rPr lang="en-US" dirty="0" err="1">
                 <a:ea typeface="Inter"/>
               </a:rPr>
               <a:t>Grupeerib</a:t>
             </a:r>
             <a:r>
-              <a:rPr lang="en-US">
+              <a:rPr lang="en-US" dirty="0">
                 <a:ea typeface="Inter"/>
               </a:rPr>
               <a:t> </a:t>
             </a:r>
             <a:r>
-              <a:rPr lang="en-US" err="1">
+              <a:rPr lang="en-US" dirty="0" err="1">
                 <a:ea typeface="Inter"/>
               </a:rPr>
               <a:t>andmeread</a:t>
             </a:r>
             <a:r>
-              <a:rPr lang="en-US">
+              <a:rPr lang="en-US" dirty="0">
                 <a:ea typeface="Inter"/>
               </a:rPr>
               <a:t>.</a:t>
             </a:r>
-            <a:endParaRPr lang="en-US"/>
+            <a:endParaRPr lang="en-US" dirty="0"/>
           </a:p>
           <a:p>
             <a:pPr marL="0" indent="0">
               <a:buNone/>
             </a:pPr>
             <a:r>
-              <a:rPr lang="en-US">
+              <a:rPr lang="en-US" dirty="0">
                 <a:ea typeface="Inter"/>
               </a:rPr>
               <a:t>4. HAVING </a:t>
@@ -29240,85 +29354,85 @@
               <a:buChar char="Ø"/>
             </a:pPr>
             <a:r>
-              <a:rPr lang="en-US" err="1">
+              <a:rPr lang="en-US" dirty="0" err="1">
                 <a:ea typeface="Inter"/>
               </a:rPr>
               <a:t>Filtreerib</a:t>
             </a:r>
             <a:r>
-              <a:rPr lang="en-US">
+              <a:rPr lang="en-US" dirty="0">
                 <a:ea typeface="Inter"/>
               </a:rPr>
               <a:t> </a:t>
             </a:r>
             <a:r>
-              <a:rPr lang="en-US" err="1">
+              <a:rPr lang="en-US" dirty="0" err="1">
                 <a:ea typeface="Inter"/>
               </a:rPr>
               <a:t>välja</a:t>
             </a:r>
             <a:r>
-              <a:rPr lang="en-US">
+              <a:rPr lang="en-US" dirty="0">
                 <a:ea typeface="Inter"/>
               </a:rPr>
               <a:t> </a:t>
             </a:r>
             <a:r>
-              <a:rPr lang="en-US" err="1">
+              <a:rPr lang="en-US" dirty="0" err="1">
                 <a:ea typeface="Inter"/>
               </a:rPr>
               <a:t>grupeeritud</a:t>
             </a:r>
             <a:r>
-              <a:rPr lang="en-US">
+              <a:rPr lang="en-US" dirty="0">
                 <a:ea typeface="Inter"/>
               </a:rPr>
               <a:t> </a:t>
             </a:r>
             <a:r>
-              <a:rPr lang="en-US" err="1">
+              <a:rPr lang="en-US" dirty="0" err="1">
                 <a:ea typeface="Inter"/>
               </a:rPr>
               <a:t>andmeread</a:t>
             </a:r>
             <a:r>
-              <a:rPr lang="en-US">
+              <a:rPr lang="en-US" dirty="0">
                 <a:ea typeface="Inter"/>
               </a:rPr>
               <a:t>, mis </a:t>
             </a:r>
             <a:r>
-              <a:rPr lang="en-US" err="1">
+              <a:rPr lang="en-US" dirty="0" err="1">
                 <a:ea typeface="Inter"/>
               </a:rPr>
               <a:t>ei</a:t>
             </a:r>
             <a:r>
-              <a:rPr lang="en-US">
+              <a:rPr lang="en-US" dirty="0">
                 <a:ea typeface="Inter"/>
               </a:rPr>
               <a:t> </a:t>
             </a:r>
             <a:r>
-              <a:rPr lang="en-US" err="1">
+              <a:rPr lang="en-US" dirty="0" err="1">
                 <a:ea typeface="Inter"/>
               </a:rPr>
               <a:t>vasta</a:t>
             </a:r>
             <a:r>
-              <a:rPr lang="en-US">
+              <a:rPr lang="en-US" dirty="0">
                 <a:ea typeface="Inter"/>
               </a:rPr>
               <a:t> </a:t>
             </a:r>
             <a:r>
-              <a:rPr lang="en-US" err="1">
+              <a:rPr lang="en-US" dirty="0" err="1">
                 <a:ea typeface="Inter"/>
               </a:rPr>
               <a:t>tingimustele</a:t>
             </a:r>
             <a:r>
-              <a:rPr lang="en-US">
+              <a:rPr lang="en-US" dirty="0">
                 <a:ea typeface="Inter"/>
               </a:rPr>
               <a:t>.</a:t>
@@ -29329,7 +29443,7 @@
               <a:buNone/>
             </a:pPr>
             <a:r>
-              <a:rPr lang="en-US">
+              <a:rPr lang="en-US" dirty="0">
                 <a:ea typeface="Inter"/>
               </a:rPr>
               <a:t>5. SELECT </a:t>
@@ -29341,49 +29455,49 @@
               <a:buChar char="Ø"/>
             </a:pPr>
             <a:r>
-              <a:rPr lang="en-US" err="1">
+              <a:rPr lang="en-US" dirty="0" err="1">
                 <a:ea typeface="Inter"/>
               </a:rPr>
               <a:t>Valib</a:t>
             </a:r>
             <a:r>
-              <a:rPr lang="en-US">
+              <a:rPr lang="en-US" dirty="0">
                 <a:ea typeface="Inter"/>
               </a:rPr>
               <a:t> </a:t>
             </a:r>
             <a:r>
-              <a:rPr lang="en-US" err="1">
+              <a:rPr lang="en-US" dirty="0" err="1">
                 <a:ea typeface="Inter"/>
               </a:rPr>
               <a:t>tulbad</a:t>
             </a:r>
             <a:r>
-              <a:rPr lang="en-US">
+              <a:rPr lang="en-US" dirty="0">
                 <a:ea typeface="Inter"/>
               </a:rPr>
               <a:t>, </a:t>
             </a:r>
             <a:r>
-              <a:rPr lang="en-US" err="1">
+              <a:rPr lang="en-US" dirty="0" err="1">
                 <a:ea typeface="Inter"/>
               </a:rPr>
               <a:t>mida</a:t>
             </a:r>
             <a:r>
-              <a:rPr lang="en-US">
+              <a:rPr lang="en-US" dirty="0">
                 <a:ea typeface="Inter"/>
               </a:rPr>
               <a:t> </a:t>
             </a:r>
             <a:r>
-              <a:rPr lang="en-US" err="1">
+              <a:rPr lang="en-US" dirty="0" err="1">
                 <a:ea typeface="Inter"/>
               </a:rPr>
               <a:t>näidata</a:t>
             </a:r>
             <a:r>
-              <a:rPr lang="en-US">
+              <a:rPr lang="en-US" dirty="0">
                 <a:ea typeface="Inter"/>
               </a:rPr>
               <a:t>.</a:t>
@@ -29394,7 +29508,7 @@
               <a:buNone/>
             </a:pPr>
             <a:r>
-              <a:rPr lang="en-US">
+              <a:rPr lang="en-US" dirty="0">
                 <a:ea typeface="Inter"/>
               </a:rPr>
               <a:t>6. ORDER BY </a:t>
@@ -29409,49 +29523,49 @@
               <a:buChar char="Ø"/>
             </a:pPr>
             <a:r>
-              <a:rPr lang="en-US" err="1">
+              <a:rPr lang="en-US" dirty="0" err="1">
                 <a:ea typeface="Inter"/>
               </a:rPr>
               <a:t>Sorteerib</a:t>
             </a:r>
             <a:r>
-              <a:rPr lang="en-US">
+              <a:rPr lang="en-US" dirty="0">
                 <a:ea typeface="Inter"/>
               </a:rPr>
               <a:t> </a:t>
             </a:r>
             <a:r>
-              <a:rPr lang="en-US" err="1">
+              <a:rPr lang="en-US" dirty="0" err="1">
                 <a:ea typeface="Inter"/>
               </a:rPr>
               <a:t>valitud</a:t>
             </a:r>
             <a:r>
-              <a:rPr lang="en-US">
+              <a:rPr lang="en-US" dirty="0">
                 <a:ea typeface="Inter"/>
               </a:rPr>
               <a:t> </a:t>
             </a:r>
             <a:r>
-              <a:rPr lang="en-US" err="1">
+              <a:rPr lang="en-US" dirty="0" err="1">
                 <a:ea typeface="Inter"/>
               </a:rPr>
               <a:t>andmeread</a:t>
             </a:r>
             <a:r>
-              <a:rPr lang="en-US">
+              <a:rPr lang="en-US" dirty="0">
                 <a:ea typeface="Inter"/>
               </a:rPr>
               <a:t>.</a:t>
             </a:r>
-            <a:endParaRPr lang="en-US"/>
+            <a:endParaRPr lang="en-US" dirty="0"/>
           </a:p>
           <a:p>
             <a:pPr marL="0" indent="0">
               <a:buNone/>
             </a:pPr>
             <a:r>
-              <a:rPr lang="en-US">
+              <a:rPr lang="en-US" dirty="0">
                 <a:ea typeface="Inter"/>
               </a:rPr>
               <a:t>7. LIMIT</a:t>
@@ -29463,85 +29577,85 @@
               <a:buChar char="Ø"/>
             </a:pPr>
             <a:r>
-              <a:rPr lang="en-US" err="1">
+              <a:rPr lang="en-US" dirty="0" err="1">
                 <a:ea typeface="Inter"/>
               </a:rPr>
               <a:t>Jätab</a:t>
             </a:r>
             <a:r>
-              <a:rPr lang="en-US">
+              <a:rPr lang="en-US" dirty="0">
                 <a:ea typeface="Inter"/>
               </a:rPr>
               <a:t> </a:t>
             </a:r>
             <a:r>
-              <a:rPr lang="en-US" err="1">
+              <a:rPr lang="en-US" dirty="0" err="1">
                 <a:ea typeface="Inter"/>
               </a:rPr>
               <a:t>alles</a:t>
             </a:r>
             <a:r>
-              <a:rPr lang="en-US">
+              <a:rPr lang="en-US" dirty="0">
                 <a:ea typeface="Inter"/>
               </a:rPr>
               <a:t> </a:t>
             </a:r>
             <a:r>
-              <a:rPr lang="en-US" err="1">
+              <a:rPr lang="en-US" dirty="0" err="1">
                 <a:ea typeface="Inter"/>
               </a:rPr>
               <a:t>ainult</a:t>
             </a:r>
             <a:r>
-              <a:rPr lang="en-US">
+              <a:rPr lang="en-US" dirty="0">
                 <a:ea typeface="Inter"/>
               </a:rPr>
               <a:t> </a:t>
             </a:r>
             <a:r>
-              <a:rPr lang="en-US" err="1">
+              <a:rPr lang="en-US" dirty="0" err="1">
                 <a:ea typeface="Inter"/>
               </a:rPr>
               <a:t>täpsustatud</a:t>
             </a:r>
             <a:r>
-              <a:rPr lang="en-US">
+              <a:rPr lang="en-US" dirty="0">
                 <a:ea typeface="Inter"/>
               </a:rPr>
               <a:t> </a:t>
             </a:r>
             <a:r>
-              <a:rPr lang="en-US" err="1">
+              <a:rPr lang="en-US" dirty="0" err="1">
                 <a:ea typeface="Inter"/>
               </a:rPr>
               <a:t>arvu</a:t>
             </a:r>
             <a:r>
-              <a:rPr lang="en-US">
+              <a:rPr lang="en-US" dirty="0">
                 <a:ea typeface="Inter"/>
               </a:rPr>
               <a:t> </a:t>
             </a:r>
             <a:r>
-              <a:rPr lang="en-US" err="1">
+              <a:rPr lang="en-US" dirty="0" err="1">
                 <a:ea typeface="Inter"/>
               </a:rPr>
               <a:t>ridu</a:t>
             </a:r>
             <a:r>
-              <a:rPr lang="en-US">
+              <a:rPr lang="en-US" dirty="0">
                 <a:ea typeface="Inter"/>
               </a:rPr>
               <a:t>.</a:t>
             </a:r>
-            <a:endParaRPr lang="en-US"/>
+            <a:endParaRPr lang="en-US" dirty="0"/>
           </a:p>
           <a:p>
             <a:pPr marL="800100" lvl="1">
               <a:buFont typeface="Wingdings" panose="020B0502030000000004" pitchFamily="34" charset="0"/>
               <a:buChar char="Ø"/>
             </a:pPr>
-            <a:endParaRPr lang="en-US"/>
+            <a:endParaRPr lang="en-US" dirty="0"/>
           </a:p>
           <a:p>
             <a:pPr marL="285750" indent="-285750">
@@ -29550,225 +29664,225 @@
               </a:buClr>
             </a:pPr>
             <a:r>
-              <a:rPr lang="en-US" err="1">
+              <a:rPr lang="en-US" dirty="0" err="1">
                 <a:ea typeface="Inter"/>
               </a:rPr>
               <a:t>Teostamise</a:t>
             </a:r>
             <a:r>
-              <a:rPr lang="en-US">
+              <a:rPr lang="en-US" dirty="0">
                 <a:ea typeface="Inter"/>
               </a:rPr>
               <a:t> </a:t>
             </a:r>
             <a:r>
-              <a:rPr lang="en-US" err="1">
+              <a:rPr lang="en-US" dirty="0" err="1">
                 <a:ea typeface="Inter"/>
               </a:rPr>
               <a:t>järjekord</a:t>
             </a:r>
             <a:r>
-              <a:rPr lang="en-US">
+              <a:rPr lang="en-US" dirty="0">
                 <a:ea typeface="Inter"/>
               </a:rPr>
               <a:t> </a:t>
             </a:r>
             <a:r>
-              <a:rPr lang="en-US" err="1">
+              <a:rPr lang="en-US" dirty="0" err="1">
                 <a:ea typeface="Inter"/>
               </a:rPr>
               <a:t>muutub</a:t>
             </a:r>
             <a:r>
-              <a:rPr lang="en-US">
+              <a:rPr lang="en-US" dirty="0">
                 <a:ea typeface="Inter"/>
               </a:rPr>
               <a:t> </a:t>
             </a:r>
             <a:r>
-              <a:rPr lang="en-US" err="1">
+              <a:rPr lang="en-US" dirty="0" err="1">
                 <a:ea typeface="Inter"/>
               </a:rPr>
               <a:t>oluliseks</a:t>
             </a:r>
             <a:r>
-              <a:rPr lang="en-US">
+              <a:rPr lang="en-US" dirty="0">
                 <a:ea typeface="Inter"/>
               </a:rPr>
               <a:t> </a:t>
             </a:r>
             <a:r>
-              <a:rPr lang="en-US" err="1">
+              <a:rPr lang="en-US" dirty="0" err="1">
                 <a:ea typeface="Inter"/>
               </a:rPr>
               <a:t>suuremate</a:t>
             </a:r>
             <a:r>
-              <a:rPr lang="en-US">
+              <a:rPr lang="en-US" dirty="0">
                 <a:ea typeface="Inter"/>
               </a:rPr>
               <a:t> </a:t>
             </a:r>
             <a:r>
-              <a:rPr lang="en-US" err="1">
+              <a:rPr lang="en-US" dirty="0" err="1">
                 <a:ea typeface="Inter"/>
               </a:rPr>
               <a:t>päringute</a:t>
             </a:r>
             <a:r>
-              <a:rPr lang="en-US">
+              <a:rPr lang="en-US" dirty="0">
                 <a:ea typeface="Inter"/>
               </a:rPr>
               <a:t> </a:t>
             </a:r>
             <a:r>
-              <a:rPr lang="en-US" err="1">
+              <a:rPr lang="en-US" dirty="0" err="1">
                 <a:ea typeface="Inter"/>
               </a:rPr>
               <a:t>puhul</a:t>
             </a:r>
             <a:r>
-              <a:rPr lang="en-US">
+              <a:rPr lang="en-US" dirty="0">
                 <a:ea typeface="Inter"/>
               </a:rPr>
               <a:t>. Mida </a:t>
             </a:r>
             <a:r>
-              <a:rPr lang="en-US" err="1">
+              <a:rPr lang="en-US" dirty="0" err="1">
                 <a:ea typeface="Inter"/>
               </a:rPr>
               <a:t>varasemas</a:t>
             </a:r>
             <a:r>
-              <a:rPr lang="en-US">
+              <a:rPr lang="en-US" dirty="0">
                 <a:ea typeface="Inter"/>
               </a:rPr>
               <a:t> </a:t>
             </a:r>
             <a:r>
-              <a:rPr lang="en-US" err="1">
+              <a:rPr lang="en-US" dirty="0" err="1">
                 <a:ea typeface="Inter"/>
               </a:rPr>
               <a:t>sammus</a:t>
             </a:r>
             <a:r>
-              <a:rPr lang="en-US">
+              <a:rPr lang="en-US" dirty="0">
                 <a:ea typeface="Inter"/>
               </a:rPr>
               <a:t> </a:t>
             </a:r>
             <a:r>
-              <a:rPr lang="en-US" err="1">
+              <a:rPr lang="en-US" dirty="0" err="1">
                 <a:ea typeface="Inter"/>
               </a:rPr>
               <a:t>saad</a:t>
             </a:r>
             <a:r>
-              <a:rPr lang="en-US">
+              <a:rPr lang="en-US" dirty="0">
                 <a:ea typeface="Inter"/>
               </a:rPr>
               <a:t> </a:t>
             </a:r>
             <a:r>
-              <a:rPr lang="en-US" err="1">
+              <a:rPr lang="en-US" dirty="0" err="1">
                 <a:ea typeface="Inter"/>
               </a:rPr>
               <a:t>päringu</a:t>
             </a:r>
             <a:r>
-              <a:rPr lang="en-US">
+              <a:rPr lang="en-US" dirty="0">
                 <a:ea typeface="Inter"/>
               </a:rPr>
               <a:t> </a:t>
             </a:r>
             <a:r>
-              <a:rPr lang="en-US" err="1">
+              <a:rPr lang="en-US" dirty="0" err="1">
                 <a:ea typeface="Inter"/>
               </a:rPr>
               <a:t>tulemusi</a:t>
             </a:r>
             <a:r>
-              <a:rPr lang="en-US">
+              <a:rPr lang="en-US" dirty="0">
                 <a:ea typeface="Inter"/>
               </a:rPr>
               <a:t> </a:t>
             </a:r>
             <a:r>
-              <a:rPr lang="en-US" err="1">
+              <a:rPr lang="en-US" dirty="0" err="1">
                 <a:ea typeface="Inter"/>
               </a:rPr>
               <a:t>piirata</a:t>
             </a:r>
             <a:r>
-              <a:rPr lang="en-US">
+              <a:rPr lang="en-US" dirty="0">
                 <a:ea typeface="Inter"/>
               </a:rPr>
               <a:t>, </a:t>
             </a:r>
             <a:r>
-              <a:rPr lang="en-US" err="1">
+              <a:rPr lang="en-US" dirty="0" err="1">
                 <a:ea typeface="Inter"/>
               </a:rPr>
               <a:t>seda</a:t>
             </a:r>
             <a:r>
-              <a:rPr lang="en-US">
+              <a:rPr lang="en-US" dirty="0">
                 <a:ea typeface="Inter"/>
               </a:rPr>
               <a:t> </a:t>
             </a:r>
             <a:r>
-              <a:rPr lang="en-US" err="1">
+              <a:rPr lang="en-US" dirty="0" err="1">
                 <a:ea typeface="Inter"/>
               </a:rPr>
               <a:t>optimaalsem</a:t>
             </a:r>
             <a:r>
-              <a:rPr lang="en-US">
+              <a:rPr lang="en-US" dirty="0">
                 <a:ea typeface="Inter"/>
               </a:rPr>
               <a:t> (</a:t>
             </a:r>
             <a:r>
-              <a:rPr lang="en-US" err="1">
+              <a:rPr lang="en-US" dirty="0" err="1">
                 <a:ea typeface="Inter"/>
               </a:rPr>
               <a:t>kiirem</a:t>
             </a:r>
             <a:r>
-              <a:rPr lang="en-US">
+              <a:rPr lang="en-US" dirty="0">
                 <a:ea typeface="Inter"/>
               </a:rPr>
               <a:t>) on </a:t>
             </a:r>
             <a:r>
-              <a:rPr lang="en-US" err="1">
+              <a:rPr lang="en-US" dirty="0" err="1">
                 <a:ea typeface="Inter"/>
               </a:rPr>
               <a:t>päringu</a:t>
             </a:r>
             <a:r>
-              <a:rPr lang="en-US">
+              <a:rPr lang="en-US" dirty="0">
                 <a:ea typeface="Inter"/>
               </a:rPr>
               <a:t> </a:t>
             </a:r>
             <a:r>
-              <a:rPr lang="en-US" err="1">
+              <a:rPr lang="en-US" dirty="0" err="1">
                 <a:ea typeface="Inter"/>
               </a:rPr>
               <a:t>teostus</a:t>
             </a:r>
             <a:r>
-              <a:rPr lang="en-US">
+              <a:rPr lang="en-US" dirty="0">
                 <a:ea typeface="Inter"/>
               </a:rPr>
               <a:t>.</a:t>
             </a:r>
-            <a:endParaRPr lang="en-US"/>
+            <a:endParaRPr lang="en-US" dirty="0"/>
           </a:p>
           <a:p>
-            <a:endParaRPr lang="en-US">
+            <a:endParaRPr lang="en-US" dirty="0">
               <a:cs typeface="+mn-lt"/>
             </a:endParaRPr>
           </a:p>
@@ -29788,6 +29902,232 @@
 </file>
 
 <file path=ppt/slides/slide8.xml><?xml version="1.0" encoding="utf-8"?>
+<p:sld xmlns:a="http://schemas.openxmlformats.org/drawingml/2006/main" xmlns:r="http://schemas.openxmlformats.org/officeDocument/2006/relationships" xmlns:p="http://schemas.openxmlformats.org/presentationml/2006/main">
+  <p:cSld>
+    <p:spTree>
+      <p:nvGrpSpPr>
+        <p:cNvPr id="1" name=""/>
+        <p:cNvGrpSpPr/>
+        <p:nvPr/>
+      </p:nvGrpSpPr>
+      <p:grpSpPr>
+        <a:xfrm>
+          <a:off x="0" y="0"/>
+          <a:ext cx="0" cy="0"/>
+          <a:chOff x="0" y="0"/>
+          <a:chExt cx="0" cy="0"/>
+        </a:xfrm>
+      </p:grpSpPr>
+      <p:sp>
+        <p:nvSpPr>
+          <p:cNvPr id="2" name="Title 1">
+            <a:extLst>
+              <a:ext uri="{FF2B5EF4-FFF2-40B4-BE49-F238E27FC236}">
+                <a16:creationId xmlns:a16="http://schemas.microsoft.com/office/drawing/2014/main" id="{9991FB04-20D6-D9EC-1CE7-A20E2D37FC42}"/>
+              </a:ext>
+            </a:extLst>
+          </p:cNvPr>
+          <p:cNvSpPr>
+            <a:spLocks noGrp="1"/>
+          </p:cNvSpPr>
+          <p:nvPr>
+            <p:ph type="ctrTitle"/>
+          </p:nvPr>
+        </p:nvSpPr>
+        <p:spPr/>
+        <p:txBody>
+          <a:bodyPr/>
+          <a:lstStyle/>
+          <a:p>
+            <a:r>
+              <a:rPr lang="en-GB" dirty="0" err="1"/>
+              <a:t>Võimalused</a:t>
+            </a:r>
+            <a:r>
+              <a:rPr lang="en-GB" dirty="0"/>
+              <a:t> SQL-I </a:t>
+            </a:r>
+            <a:r>
+              <a:rPr lang="en-GB" dirty="0" err="1"/>
+              <a:t>harjutada</a:t>
+            </a:r>
+            <a:r>
+              <a:rPr lang="en-GB" dirty="0"/>
+              <a:t> </a:t>
+            </a:r>
+            <a:r>
+              <a:rPr lang="en-GB" dirty="0" err="1"/>
+              <a:t>ja</a:t>
+            </a:r>
+            <a:r>
+              <a:rPr lang="en-GB" dirty="0"/>
+              <a:t> </a:t>
+            </a:r>
+            <a:r>
+              <a:rPr lang="en-GB" dirty="0" err="1"/>
+              <a:t>praktiseerida</a:t>
+            </a:r>
+            <a:endParaRPr lang="en-GB" dirty="0"/>
+          </a:p>
+        </p:txBody>
+      </p:sp>
+      <p:sp>
+        <p:nvSpPr>
+          <p:cNvPr id="3" name="Content Placeholder 2">
+            <a:extLst>
+              <a:ext uri="{FF2B5EF4-FFF2-40B4-BE49-F238E27FC236}">
+                <a16:creationId xmlns:a16="http://schemas.microsoft.com/office/drawing/2014/main" id="{558863ED-DF6A-0F8A-E78F-A0793F9857E8}"/>
+              </a:ext>
+            </a:extLst>
+          </p:cNvPr>
+          <p:cNvSpPr>
+            <a:spLocks noGrp="1"/>
+          </p:cNvSpPr>
+          <p:nvPr>
+            <p:ph sz="quarter" idx="10"/>
+          </p:nvPr>
+        </p:nvSpPr>
+        <p:spPr/>
+        <p:txBody>
+          <a:bodyPr/>
+          <a:lstStyle/>
+          <a:p>
+            <a:r>
+              <a:rPr lang="en-GB" sz="2400" dirty="0">
+                <a:hlinkClick r:id="rId2"/>
+              </a:rPr>
+              <a:t>https://sqliteviz.com/app</a:t>
+            </a:r>
+            <a:br>
+              <a:rPr lang="en-GB" sz="2400" dirty="0"/>
+            </a:br>
+            <a:r>
+              <a:rPr lang="en-GB" sz="2400" dirty="0"/>
+              <a:t>Kui </a:t>
+            </a:r>
+            <a:r>
+              <a:rPr lang="en-GB" sz="2400" dirty="0" err="1"/>
+              <a:t>tahad</a:t>
+            </a:r>
+            <a:r>
+              <a:rPr lang="en-GB" sz="2400" dirty="0"/>
+              <a:t> </a:t>
+            </a:r>
+            <a:r>
+              <a:rPr lang="en-GB" sz="2400" dirty="0" err="1"/>
+              <a:t>harjutada</a:t>
+            </a:r>
+            <a:r>
+              <a:rPr lang="en-GB" sz="2400" dirty="0"/>
+              <a:t>, </a:t>
+            </a:r>
+            <a:r>
+              <a:rPr lang="en-GB" sz="2400" dirty="0" err="1"/>
+              <a:t>kuid</a:t>
+            </a:r>
+            <a:r>
+              <a:rPr lang="en-GB" sz="2400" dirty="0"/>
+              <a:t> pole </a:t>
+            </a:r>
+            <a:r>
+              <a:rPr lang="en-GB" sz="2400" dirty="0" err="1"/>
+              <a:t>arvutis</a:t>
+            </a:r>
+            <a:r>
+              <a:rPr lang="en-GB" sz="2400" dirty="0"/>
+              <a:t> </a:t>
+            </a:r>
+            <a:r>
+              <a:rPr lang="en-GB" sz="2400" dirty="0" err="1"/>
+              <a:t>andmebaasi</a:t>
+            </a:r>
+            <a:r>
+              <a:rPr lang="en-GB" sz="2400" dirty="0"/>
+              <a:t> </a:t>
+            </a:r>
+            <a:r>
+              <a:rPr lang="en-GB" sz="2400" dirty="0" err="1"/>
+              <a:t>ja</a:t>
+            </a:r>
+            <a:r>
+              <a:rPr lang="en-GB" sz="2400" dirty="0"/>
+              <a:t> </a:t>
+            </a:r>
+            <a:r>
+              <a:rPr lang="en-GB" sz="2400" dirty="0" err="1"/>
+              <a:t>pilvebaasidele</a:t>
+            </a:r>
+            <a:r>
+              <a:rPr lang="en-GB" sz="2400" dirty="0"/>
+              <a:t> pole </a:t>
+            </a:r>
+            <a:r>
+              <a:rPr lang="en-GB" sz="2400" dirty="0" err="1"/>
+              <a:t>ligipääsu</a:t>
+            </a:r>
+            <a:endParaRPr lang="en-GB" sz="2400" dirty="0"/>
+          </a:p>
+          <a:p>
+            <a:r>
+              <a:rPr lang="en-GB" sz="2400" b="1" dirty="0"/>
+              <a:t>PostgreSQL </a:t>
+            </a:r>
+            <a:r>
+              <a:rPr lang="en-GB" sz="2400" b="1" dirty="0" err="1"/>
+              <a:t>pgAdmin</a:t>
+            </a:r>
+            <a:endParaRPr lang="en-GB" sz="2400" b="1" dirty="0"/>
+          </a:p>
+          <a:p>
+            <a:r>
+              <a:rPr lang="en-GB" sz="2400" b="1" dirty="0" err="1"/>
+              <a:t>Dbeaver</a:t>
+            </a:r>
+            <a:endParaRPr lang="en-GB" sz="2400" b="1" dirty="0"/>
+          </a:p>
+          <a:p>
+            <a:r>
+              <a:rPr lang="en-GB" sz="2400" dirty="0"/>
+              <a:t>MS SQL Server Management Studio</a:t>
+            </a:r>
+          </a:p>
+          <a:p>
+            <a:r>
+              <a:rPr lang="en-GB" sz="2400" dirty="0" err="1"/>
+              <a:t>Pilveandmebaasid</a:t>
+            </a:r>
+            <a:endParaRPr lang="en-GB" sz="2400" dirty="0"/>
+          </a:p>
+          <a:p>
+            <a:pPr lvl="1"/>
+            <a:r>
+              <a:rPr lang="en-GB" sz="2400" dirty="0"/>
+              <a:t>Snowflake</a:t>
+            </a:r>
+          </a:p>
+          <a:p>
+            <a:pPr lvl="1"/>
+            <a:r>
+              <a:rPr lang="en-GB" sz="2400" dirty="0"/>
+              <a:t>Microsoft Fabric Lakehouse, Warehouse, Fabric IQ …..</a:t>
+            </a:r>
+          </a:p>
+        </p:txBody>
+      </p:sp>
+    </p:spTree>
+    <p:extLst>
+      <p:ext uri="{BB962C8B-B14F-4D97-AF65-F5344CB8AC3E}">
+        <p14:creationId xmlns:p14="http://schemas.microsoft.com/office/powerpoint/2010/main" val="2779306214"/>
+      </p:ext>
+    </p:extLst>
+  </p:cSld>
+  <p:clrMapOvr>
+    <a:masterClrMapping/>
+  </p:clrMapOvr>
+</p:sld>
+</file>
+
+<file path=ppt/slides/slide9.xml><?xml version="1.0" encoding="utf-8"?>
 <p:sld xmlns:a="http://schemas.openxmlformats.org/drawingml/2006/main" xmlns:r="http://schemas.openxmlformats.org/officeDocument/2006/relationships" xmlns:p="http://schemas.openxmlformats.org/presentationml/2006/main">
   <p:cSld>
     <p:spTree>
@@ -29894,7 +30234,7 @@
         </p:nvSpPr>
         <p:spPr>
           <a:xfrm>
-            <a:off x="677170" y="1222424"/>
+            <a:off x="901308" y="1268413"/>
             <a:ext cx="10386210" cy="4524315"/>
           </a:xfrm>
           <a:prstGeom prst="rect">
@@ -30190,119 +30530,6 @@
     <p:extLst>
       <p:ext uri="{BB962C8B-B14F-4D97-AF65-F5344CB8AC3E}">
         <p14:creationId xmlns:p14="http://schemas.microsoft.com/office/powerpoint/2010/main" val="1818633253"/>
-      </p:ext>
-    </p:extLst>
-  </p:cSld>
-  <p:clrMapOvr>
-    <a:masterClrMapping/>
-  </p:clrMapOvr>
-</p:sld>
-</file>
-
-<file path=ppt/slides/slide9.xml><?xml version="1.0" encoding="utf-8"?>
-<p:sld xmlns:a="http://schemas.openxmlformats.org/drawingml/2006/main" xmlns:r="http://schemas.openxmlformats.org/officeDocument/2006/relationships" xmlns:p="http://schemas.openxmlformats.org/presentationml/2006/main">
-  <p:cSld>
-    <p:spTree>
-      <p:nvGrpSpPr>
-        <p:cNvPr id="1" name="">
-          <a:extLst>
-            <a:ext uri="{FF2B5EF4-FFF2-40B4-BE49-F238E27FC236}">
-              <a16:creationId xmlns:a16="http://schemas.microsoft.com/office/drawing/2014/main" id="{EA4C8894-EA7E-D031-E39B-D15A9A1ACF35}"/>
-            </a:ext>
-          </a:extLst>
-        </p:cNvPr>
-        <p:cNvGrpSpPr/>
-        <p:nvPr/>
-      </p:nvGrpSpPr>
-      <p:grpSpPr>
-        <a:xfrm>
-          <a:off x="0" y="0"/>
-          <a:ext cx="0" cy="0"/>
-          <a:chOff x="0" y="0"/>
-          <a:chExt cx="0" cy="0"/>
-        </a:xfrm>
-      </p:grpSpPr>
-      <p:sp>
-        <p:nvSpPr>
-          <p:cNvPr id="3" name="Content Placeholder 2">
-            <a:extLst>
-              <a:ext uri="{FF2B5EF4-FFF2-40B4-BE49-F238E27FC236}">
-                <a16:creationId xmlns:a16="http://schemas.microsoft.com/office/drawing/2014/main" id="{4AE7B3F8-1072-F92A-474F-F8B757A392D0}"/>
-              </a:ext>
-            </a:extLst>
-          </p:cNvPr>
-          <p:cNvSpPr>
-            <a:spLocks noGrp="1"/>
-          </p:cNvSpPr>
-          <p:nvPr>
-            <p:ph sz="quarter" idx="10"/>
-          </p:nvPr>
-        </p:nvSpPr>
-        <p:spPr/>
-        <p:txBody>
-          <a:bodyPr/>
-          <a:lstStyle/>
-          <a:p>
-            <a:pPr marL="0" indent="0">
-              <a:lnSpc>
-                <a:spcPct val="150000"/>
-              </a:lnSpc>
-              <a:buNone/>
-            </a:pPr>
-            <a:endParaRPr lang="en-US" sz="2800">
-              <a:ea typeface="Inter"/>
-            </a:endParaRPr>
-          </a:p>
-          <a:p>
-            <a:pPr marL="457200" lvl="1" indent="0">
-              <a:lnSpc>
-                <a:spcPct val="150000"/>
-              </a:lnSpc>
-              <a:buNone/>
-            </a:pPr>
-            <a:endParaRPr lang="en-US" sz="2000">
-              <a:ea typeface="Inter"/>
-            </a:endParaRPr>
-          </a:p>
-        </p:txBody>
-      </p:sp>
-      <p:sp>
-        <p:nvSpPr>
-          <p:cNvPr id="5" name="Title 4">
-            <a:extLst>
-              <a:ext uri="{FF2B5EF4-FFF2-40B4-BE49-F238E27FC236}">
-                <a16:creationId xmlns:a16="http://schemas.microsoft.com/office/drawing/2014/main" id="{5259C4DD-AD06-746E-A9D2-C5E114417B7C}"/>
-              </a:ext>
-            </a:extLst>
-          </p:cNvPr>
-          <p:cNvSpPr>
-            <a:spLocks noGrp="1"/>
-          </p:cNvSpPr>
-          <p:nvPr>
-            <p:ph type="ctrTitle"/>
-          </p:nvPr>
-        </p:nvSpPr>
-        <p:spPr>
-          <a:xfrm>
-            <a:off x="4283493" y="2675333"/>
-            <a:ext cx="3777666" cy="357043"/>
-          </a:xfrm>
-        </p:spPr>
-        <p:txBody>
-          <a:bodyPr/>
-          <a:lstStyle/>
-          <a:p>
-            <a:r>
-              <a:rPr lang="en-US"/>
-              <a:t>Paus 10:30-10:45</a:t>
-            </a:r>
-          </a:p>
-        </p:txBody>
-      </p:sp>
-    </p:spTree>
-    <p:extLst>
-      <p:ext uri="{BB962C8B-B14F-4D97-AF65-F5344CB8AC3E}">
-        <p14:creationId xmlns:p14="http://schemas.microsoft.com/office/powerpoint/2010/main" val="1316149546"/>
       </p:ext>
     </p:extLst>
   </p:cSld>
@@ -31113,12 +31340,6 @@
 </file>
 
 <file path=customXml/item2.xml><?xml version="1.0" encoding="utf-8"?>
-<p:properties xmlns:p="http://schemas.microsoft.com/office/2006/metadata/properties" xmlns:xsi="http://www.w3.org/2001/XMLSchema-instance" xmlns:pc="http://schemas.microsoft.com/office/infopath/2007/PartnerControls">
-  <documentManagement/>
-</p:properties>
-</file>
-
-<file path=customXml/item3.xml><?xml version="1.0" encoding="utf-8"?>
 <ct:contentTypeSchema xmlns:ct="http://schemas.microsoft.com/office/2006/metadata/contentType" xmlns:ma="http://schemas.microsoft.com/office/2006/metadata/properties/metaAttributes" ct:_="" ma:_="" ma:contentTypeName="Document" ma:contentTypeID="0x010100C4D27B8FA8976546BCD79313C588588D" ma:contentTypeVersion="8" ma:contentTypeDescription="Create a new document." ma:contentTypeScope="" ma:versionID="a112c56f6fe148a79025c76584832af0">
   <xsd:schema xmlns:xsd="http://www.w3.org/2001/XMLSchema" xmlns:xs="http://www.w3.org/2001/XMLSchema" xmlns:p="http://schemas.microsoft.com/office/2006/metadata/properties" xmlns:ns2="a1a2d923-8fea-42f1-bd41-9cdfff65694e" targetNamespace="http://schemas.microsoft.com/office/2006/metadata/properties" ma:root="true" ma:fieldsID="97c8655d467eaa9470a714421e7268c0" ns2:_="">
     <xsd:import namespace="a1a2d923-8fea-42f1-bd41-9cdfff65694e"/>
@@ -31286,6 +31507,12 @@
 </ct:contentTypeSchema>
 </file>
 
+<file path=customXml/item3.xml><?xml version="1.0" encoding="utf-8"?>
+<p:properties xmlns:p="http://schemas.microsoft.com/office/2006/metadata/properties" xmlns:xsi="http://www.w3.org/2001/XMLSchema-instance" xmlns:pc="http://schemas.microsoft.com/office/infopath/2007/PartnerControls">
+  <documentManagement/>
+</p:properties>
+</file>
+
 <file path=customXml/itemProps1.xml><?xml version="1.0" encoding="utf-8"?>
 <ds:datastoreItem xmlns:ds="http://schemas.openxmlformats.org/officeDocument/2006/customXml" ds:itemID="{9DC439CA-6F1C-4005-ACA6-A52E04DEE0A7}">
   <ds:schemaRefs>
@@ -31295,15 +31522,6 @@
 </file>
 
 <file path=customXml/itemProps2.xml><?xml version="1.0" encoding="utf-8"?>
-<ds:datastoreItem xmlns:ds="http://schemas.openxmlformats.org/officeDocument/2006/customXml" ds:itemID="{5BDF4908-A52A-47DD-A794-6E02D71942FC}">
-  <ds:schemaRefs>
-    <ds:schemaRef ds:uri="http://schemas.microsoft.com/office/2006/metadata/properties"/>
-    <ds:schemaRef ds:uri="http://schemas.microsoft.com/office/infopath/2007/PartnerControls"/>
-  </ds:schemaRefs>
-</ds:datastoreItem>
-</file>
-
-<file path=customXml/itemProps3.xml><?xml version="1.0" encoding="utf-8"?>
 <ds:datastoreItem xmlns:ds="http://schemas.openxmlformats.org/officeDocument/2006/customXml" ds:itemID="{9CF4F972-2392-44D0-AA45-41AC4FDC4A59}">
   <ds:schemaRefs>
     <ds:schemaRef ds:uri="a1a2d923-8fea-42f1-bd41-9cdfff65694e"/>
@@ -31321,6 +31539,15 @@
 </ds:datastoreItem>
 </file>
 
+<file path=customXml/itemProps3.xml><?xml version="1.0" encoding="utf-8"?>
+<ds:datastoreItem xmlns:ds="http://schemas.openxmlformats.org/officeDocument/2006/customXml" ds:itemID="{5BDF4908-A52A-47DD-A794-6E02D71942FC}">
+  <ds:schemaRefs>
+    <ds:schemaRef ds:uri="http://schemas.microsoft.com/office/2006/metadata/properties"/>
+    <ds:schemaRef ds:uri="http://schemas.microsoft.com/office/infopath/2007/PartnerControls"/>
+  </ds:schemaRefs>
+</ds:datastoreItem>
+</file>
+
 <file path=docMetadata/LabelInfo.xml><?xml version="1.0" encoding="utf-8"?>
 <clbl:labelList xmlns:clbl="http://schemas.microsoft.com/office/2020/mipLabelMetadata">
   <clbl:label id="{4fc69ca6-ce6b-4059-8ad9-2049c3c135b3}" enabled="0" method="" siteId="{4fc69ca6-ce6b-4059-8ad9-2049c3c135b3}" removed="1"/>

--- a/Materjalid/Day6 SQL/6-paev-andmetarkus-esitlus.pptx
+++ b/Materjalid/Day6 SQL/6-paev-andmetarkus-esitlus.pptx
@@ -1338,7 +1338,19 @@
         <a:p>
           <a:r>
             <a:rPr lang="en-GB" b="0" i="0" dirty="0"/>
-            <a:t>K SQL JOINID</a:t>
+            <a:t>K SQL </a:t>
+          </a:r>
+          <a:r>
+            <a:rPr lang="en-GB" b="0" i="0" dirty="0" err="1"/>
+            <a:t>tabelite</a:t>
+          </a:r>
+          <a:r>
+            <a:rPr lang="en-GB" b="0" i="0" dirty="0"/>
+            <a:t> </a:t>
+          </a:r>
+          <a:r>
+            <a:rPr lang="en-GB" b="0" i="0" dirty="0" err="1"/>
+            <a:t>ühendamine</a:t>
           </a:r>
           <a:endParaRPr lang="en-US" dirty="0"/>
         </a:p>
@@ -1857,7 +1869,19 @@
           </a:pPr>
           <a:r>
             <a:rPr lang="en-GB" sz="3100" b="0" i="0" kern="1200" dirty="0"/>
-            <a:t>K SQL JOINID</a:t>
+            <a:t>K SQL </a:t>
+          </a:r>
+          <a:r>
+            <a:rPr lang="en-GB" sz="3100" b="0" i="0" kern="1200" dirty="0" err="1"/>
+            <a:t>tabelite</a:t>
+          </a:r>
+          <a:r>
+            <a:rPr lang="en-GB" sz="3100" b="0" i="0" kern="1200" dirty="0"/>
+            <a:t> </a:t>
+          </a:r>
+          <a:r>
+            <a:rPr lang="en-GB" sz="3100" b="0" i="0" kern="1200" dirty="0" err="1"/>
+            <a:t>ühendamine</a:t>
           </a:r>
           <a:endParaRPr lang="en-US" sz="3100" kern="1200" dirty="0"/>
         </a:p>
@@ -38290,13 +38314,31 @@
               </a:spcAft>
             </a:pPr>
             <a:r>
-              <a:rPr sz="1800" b="0">
+              <a:rPr sz="1800" b="0" dirty="0">
                 <a:solidFill>
                   <a:srgbClr val="E2E8F0"/>
                 </a:solidFill>
                 <a:latin typeface="Consolas"/>
               </a:rPr>
-              <a:t>SELECT nimi, linn</a:t>
+              <a:t>SELECT </a:t>
+            </a:r>
+            <a:r>
+              <a:rPr sz="1800" b="0" dirty="0" err="1">
+                <a:solidFill>
+                  <a:srgbClr val="E2E8F0"/>
+                </a:solidFill>
+                <a:latin typeface="Consolas"/>
+              </a:rPr>
+              <a:t>nimi</a:t>
+            </a:r>
+            <a:r>
+              <a:rPr sz="1800" b="0" dirty="0">
+                <a:solidFill>
+                  <a:srgbClr val="E2E8F0"/>
+                </a:solidFill>
+                <a:latin typeface="Consolas"/>
+              </a:rPr>
+              <a:t>, linn</a:t>
             </a:r>
           </a:p>
           <a:p>
@@ -38309,13 +38351,31 @@
               </a:spcAft>
             </a:pPr>
             <a:r>
-              <a:rPr sz="1800" b="0">
+              <a:rPr sz="1800" b="0" dirty="0">
                 <a:solidFill>
                   <a:srgbClr val="E2E8F0"/>
                 </a:solidFill>
                 <a:latin typeface="Consolas"/>
               </a:rPr>
-              <a:t>FROM kliendid;</a:t>
+              <a:t>FROM </a:t>
+            </a:r>
+            <a:r>
+              <a:rPr sz="1800" b="0" dirty="0" err="1">
+                <a:solidFill>
+                  <a:srgbClr val="E2E8F0"/>
+                </a:solidFill>
+                <a:latin typeface="Consolas"/>
+              </a:rPr>
+              <a:t>kliendid</a:t>
+            </a:r>
+            <a:r>
+              <a:rPr sz="1800" b="0" dirty="0">
+                <a:solidFill>
+                  <a:srgbClr val="E2E8F0"/>
+                </a:solidFill>
+                <a:latin typeface="Consolas"/>
+              </a:rPr>
+              <a:t>;</a:t>
             </a:r>
           </a:p>
         </p:txBody>
@@ -39466,7 +39526,7 @@
               </a:spcAft>
             </a:pPr>
             <a:r>
-              <a:rPr sz="1800" b="0">
+              <a:rPr sz="1800" b="0" dirty="0">
                 <a:solidFill>
                   <a:srgbClr val="E2E8F0"/>
                 </a:solidFill>
@@ -39485,14 +39545,29 @@
               </a:spcAft>
             </a:pPr>
             <a:r>
-              <a:rPr sz="1800" b="0">
+              <a:rPr sz="1800" b="0" dirty="0">
                 <a:solidFill>
                   <a:srgbClr val="E2E8F0"/>
                 </a:solidFill>
                 <a:latin typeface="Consolas"/>
               </a:rPr>
-              <a:t>FROM kliendid</a:t>
-            </a:r>
+              <a:t>FROM </a:t>
+            </a:r>
+            <a:r>
+              <a:rPr sz="1800" b="0" dirty="0" err="1">
+                <a:solidFill>
+                  <a:srgbClr val="E2E8F0"/>
+                </a:solidFill>
+                <a:latin typeface="Consolas"/>
+              </a:rPr>
+              <a:t>kliendid</a:t>
+            </a:r>
+            <a:endParaRPr sz="1800" b="0" dirty="0">
+              <a:solidFill>
+                <a:srgbClr val="E2E8F0"/>
+              </a:solidFill>
+              <a:latin typeface="Consolas"/>
+            </a:endParaRPr>
           </a:p>
           <a:p>
             <a:pPr>
@@ -39504,7 +39579,7 @@
               </a:spcAft>
             </a:pPr>
             <a:r>
-              <a:rPr sz="1800" b="0">
+              <a:rPr sz="1800" b="0" dirty="0">
                 <a:solidFill>
                   <a:srgbClr val="E2E8F0"/>
                 </a:solidFill>
@@ -39617,7 +39692,7 @@
           <a:p>
             <a:pPr algn="l"/>
             <a:r>
-              <a:rPr sz="1600" b="0">
+              <a:rPr sz="1600" b="0" dirty="0" err="1">
                 <a:solidFill>
                   <a:srgbClr val="334155"/>
                 </a:solidFill>
@@ -39625,6 +39700,12 @@
               </a:rPr>
               <a:t>võrdub</a:t>
             </a:r>
+            <a:endParaRPr sz="1600" b="0" dirty="0">
+              <a:solidFill>
+                <a:srgbClr val="334155"/>
+              </a:solidFill>
+              <a:latin typeface="Calibri"/>
+            </a:endParaRPr>
           </a:p>
         </p:txBody>
       </p:sp>
@@ -39923,7 +40004,7 @@
           <a:p>
             <a:pPr algn="l"/>
             <a:r>
-              <a:rPr sz="2000" b="1">
+              <a:rPr sz="2000" b="1" dirty="0">
                 <a:solidFill>
                   <a:srgbClr val="0F203E"/>
                 </a:solidFill>
@@ -40149,7 +40230,7 @@
           <a:p>
             <a:pPr algn="l"/>
             <a:r>
-              <a:rPr sz="2000" b="1">
+              <a:rPr sz="2000" b="1" dirty="0">
                 <a:solidFill>
                   <a:srgbClr val="0F203E"/>
                 </a:solidFill>
@@ -40182,14 +40263,29 @@
           <a:p>
             <a:pPr algn="l"/>
             <a:r>
-              <a:rPr sz="1600" b="0">
+              <a:rPr sz="1600" b="0" dirty="0">
                 <a:solidFill>
                   <a:srgbClr val="334155"/>
                 </a:solidFill>
                 <a:latin typeface="Calibri"/>
               </a:rPr>
-              <a:t>muster tekstis</a:t>
-            </a:r>
+              <a:t>muster </a:t>
+            </a:r>
+            <a:r>
+              <a:rPr sz="1600" b="0" dirty="0" err="1">
+                <a:solidFill>
+                  <a:srgbClr val="334155"/>
+                </a:solidFill>
+                <a:latin typeface="Calibri"/>
+              </a:rPr>
+              <a:t>tekstis</a:t>
+            </a:r>
+            <a:endParaRPr sz="1600" b="0" dirty="0">
+              <a:solidFill>
+                <a:srgbClr val="334155"/>
+              </a:solidFill>
+              <a:latin typeface="Calibri"/>
+            </a:endParaRPr>
           </a:p>
         </p:txBody>
       </p:sp>
@@ -40208,7 +40304,7 @@
         <p:spPr>
           <a:xfrm>
             <a:off x="457200" y="6123801"/>
-            <a:ext cx="6096000" cy="276999"/>
+            <a:ext cx="6096000" cy="584775"/>
           </a:xfrm>
           <a:prstGeom prst="rect">
             <a:avLst/>
@@ -40222,18 +40318,18 @@
           <a:lstStyle/>
           <a:p>
             <a:r>
-              <a:rPr lang="fi-FI" sz="1200" dirty="0"/>
+              <a:rPr lang="fi-FI" sz="1600" dirty="0"/>
               <a:t>Tekst ja kuupäev jutumärkides. </a:t>
             </a:r>
             <a:r>
-              <a:rPr lang="en-GB" sz="1200" dirty="0"/>
+              <a:rPr lang="en-GB" sz="1600" dirty="0"/>
               <a:t>WHERE linn = “Tallinn”. </a:t>
             </a:r>
             <a:r>
-              <a:rPr lang="fi-FI" sz="1200" dirty="0"/>
+              <a:rPr lang="fi-FI" sz="1600" dirty="0"/>
               <a:t>Number ilma. </a:t>
             </a:r>
-            <a:endParaRPr lang="en-GB" dirty="0"/>
+            <a:endParaRPr lang="en-GB" sz="2400" dirty="0"/>
           </a:p>
         </p:txBody>
       </p:sp>
@@ -42748,7 +42844,7 @@
           <a:p>
             <a:pPr algn="l"/>
             <a:r>
-              <a:rPr sz="2200" b="1">
+              <a:rPr sz="2200" b="1" dirty="0">
                 <a:solidFill>
                   <a:srgbClr val="0F203E"/>
                 </a:solidFill>
@@ -42894,7 +42990,7 @@
           <a:p>
             <a:pPr algn="l"/>
             <a:r>
-              <a:rPr sz="2200" b="1">
+              <a:rPr sz="2200" b="1" dirty="0">
                 <a:solidFill>
                   <a:srgbClr val="0F203E"/>
                 </a:solidFill>
@@ -43040,13 +43136,31 @@
           <a:p>
             <a:pPr algn="l"/>
             <a:r>
-              <a:rPr sz="2200" b="1">
+              <a:rPr sz="2200" b="1" dirty="0">
                 <a:solidFill>
                   <a:srgbClr val="0F203E"/>
                 </a:solidFill>
                 <a:latin typeface="Calibri"/>
               </a:rPr>
-              <a:t>'%Sülearvuti%'</a:t>
+              <a:t>'%</a:t>
+            </a:r>
+            <a:r>
+              <a:rPr sz="2200" b="1" dirty="0" err="1">
+                <a:solidFill>
+                  <a:srgbClr val="0F203E"/>
+                </a:solidFill>
+                <a:latin typeface="Calibri"/>
+              </a:rPr>
+              <a:t>Sülearvuti</a:t>
+            </a:r>
+            <a:r>
+              <a:rPr sz="2200" b="1" dirty="0">
+                <a:solidFill>
+                  <a:srgbClr val="0F203E"/>
+                </a:solidFill>
+                <a:latin typeface="Calibri"/>
+              </a:rPr>
+              <a:t>%'</a:t>
             </a:r>
           </a:p>
         </p:txBody>
@@ -43139,14 +43253,302 @@
           <a:p>
             <a:pPr algn="l"/>
             <a:r>
-              <a:rPr sz="1500" b="0">
+              <a:rPr b="0" dirty="0">
                 <a:solidFill>
                   <a:srgbClr val="64748B"/>
                 </a:solidFill>
                 <a:latin typeface="Calibri"/>
               </a:rPr>
-              <a:t>% asendab suvalise arvu märke.  _ asendab täpselt ühe märgi.
-LIKE ei ole mõnes andmebaasis tõstutundlik, teises on — proovi oma keskkonnas.</a:t>
+              <a:t>% </a:t>
+            </a:r>
+            <a:r>
+              <a:rPr b="0" dirty="0" err="1">
+                <a:solidFill>
+                  <a:srgbClr val="64748B"/>
+                </a:solidFill>
+                <a:latin typeface="Calibri"/>
+              </a:rPr>
+              <a:t>asendab</a:t>
+            </a:r>
+            <a:r>
+              <a:rPr b="0" dirty="0">
+                <a:solidFill>
+                  <a:srgbClr val="64748B"/>
+                </a:solidFill>
+                <a:latin typeface="Calibri"/>
+              </a:rPr>
+              <a:t> </a:t>
+            </a:r>
+            <a:r>
+              <a:rPr b="0" dirty="0" err="1">
+                <a:solidFill>
+                  <a:srgbClr val="64748B"/>
+                </a:solidFill>
+                <a:latin typeface="Calibri"/>
+              </a:rPr>
+              <a:t>suvalise</a:t>
+            </a:r>
+            <a:r>
+              <a:rPr b="0" dirty="0">
+                <a:solidFill>
+                  <a:srgbClr val="64748B"/>
+                </a:solidFill>
+                <a:latin typeface="Calibri"/>
+              </a:rPr>
+              <a:t> </a:t>
+            </a:r>
+            <a:r>
+              <a:rPr b="0" dirty="0" err="1">
+                <a:solidFill>
+                  <a:srgbClr val="64748B"/>
+                </a:solidFill>
+                <a:latin typeface="Calibri"/>
+              </a:rPr>
+              <a:t>arvu</a:t>
+            </a:r>
+            <a:r>
+              <a:rPr b="0" dirty="0">
+                <a:solidFill>
+                  <a:srgbClr val="64748B"/>
+                </a:solidFill>
+                <a:latin typeface="Calibri"/>
+              </a:rPr>
+              <a:t> </a:t>
+            </a:r>
+            <a:r>
+              <a:rPr b="0" dirty="0" err="1">
+                <a:solidFill>
+                  <a:srgbClr val="64748B"/>
+                </a:solidFill>
+                <a:latin typeface="Calibri"/>
+              </a:rPr>
+              <a:t>märke</a:t>
+            </a:r>
+            <a:r>
+              <a:rPr b="0" dirty="0">
+                <a:solidFill>
+                  <a:srgbClr val="64748B"/>
+                </a:solidFill>
+                <a:latin typeface="Calibri"/>
+              </a:rPr>
+              <a:t>.  _ </a:t>
+            </a:r>
+            <a:r>
+              <a:rPr b="0" dirty="0" err="1">
+                <a:solidFill>
+                  <a:srgbClr val="64748B"/>
+                </a:solidFill>
+                <a:latin typeface="Calibri"/>
+              </a:rPr>
+              <a:t>asendab</a:t>
+            </a:r>
+            <a:r>
+              <a:rPr b="0" dirty="0">
+                <a:solidFill>
+                  <a:srgbClr val="64748B"/>
+                </a:solidFill>
+                <a:latin typeface="Calibri"/>
+              </a:rPr>
+              <a:t> </a:t>
+            </a:r>
+            <a:r>
+              <a:rPr b="0" dirty="0" err="1">
+                <a:solidFill>
+                  <a:srgbClr val="64748B"/>
+                </a:solidFill>
+                <a:latin typeface="Calibri"/>
+              </a:rPr>
+              <a:t>täpselt</a:t>
+            </a:r>
+            <a:r>
+              <a:rPr b="0" dirty="0">
+                <a:solidFill>
+                  <a:srgbClr val="64748B"/>
+                </a:solidFill>
+                <a:latin typeface="Calibri"/>
+              </a:rPr>
+              <a:t> </a:t>
+            </a:r>
+            <a:r>
+              <a:rPr b="0" dirty="0" err="1">
+                <a:solidFill>
+                  <a:srgbClr val="64748B"/>
+                </a:solidFill>
+                <a:latin typeface="Calibri"/>
+              </a:rPr>
+              <a:t>ühe</a:t>
+            </a:r>
+            <a:r>
+              <a:rPr b="0" dirty="0">
+                <a:solidFill>
+                  <a:srgbClr val="64748B"/>
+                </a:solidFill>
+                <a:latin typeface="Calibri"/>
+              </a:rPr>
+              <a:t> </a:t>
+            </a:r>
+            <a:r>
+              <a:rPr b="0" dirty="0" err="1">
+                <a:solidFill>
+                  <a:srgbClr val="64748B"/>
+                </a:solidFill>
+                <a:latin typeface="Calibri"/>
+              </a:rPr>
+              <a:t>märgi</a:t>
+            </a:r>
+            <a:r>
+              <a:rPr b="0" dirty="0">
+                <a:solidFill>
+                  <a:srgbClr val="64748B"/>
+                </a:solidFill>
+                <a:latin typeface="Calibri"/>
+              </a:rPr>
+              <a:t>.
+LIKE </a:t>
+            </a:r>
+            <a:r>
+              <a:rPr b="0" dirty="0" err="1">
+                <a:solidFill>
+                  <a:srgbClr val="64748B"/>
+                </a:solidFill>
+                <a:latin typeface="Calibri"/>
+              </a:rPr>
+              <a:t>ei</a:t>
+            </a:r>
+            <a:r>
+              <a:rPr b="0" dirty="0">
+                <a:solidFill>
+                  <a:srgbClr val="64748B"/>
+                </a:solidFill>
+                <a:latin typeface="Calibri"/>
+              </a:rPr>
+              <a:t> ole </a:t>
+            </a:r>
+            <a:r>
+              <a:rPr b="0" dirty="0" err="1">
+                <a:solidFill>
+                  <a:srgbClr val="64748B"/>
+                </a:solidFill>
+                <a:latin typeface="Calibri"/>
+              </a:rPr>
+              <a:t>mõnes</a:t>
+            </a:r>
+            <a:r>
+              <a:rPr b="0" dirty="0">
+                <a:solidFill>
+                  <a:srgbClr val="64748B"/>
+                </a:solidFill>
+                <a:latin typeface="Calibri"/>
+              </a:rPr>
+              <a:t> </a:t>
+            </a:r>
+            <a:r>
+              <a:rPr b="0" dirty="0" err="1">
+                <a:solidFill>
+                  <a:srgbClr val="64748B"/>
+                </a:solidFill>
+                <a:latin typeface="Calibri"/>
+              </a:rPr>
+              <a:t>andmebaasis</a:t>
+            </a:r>
+            <a:r>
+              <a:rPr b="0" dirty="0">
+                <a:solidFill>
+                  <a:srgbClr val="64748B"/>
+                </a:solidFill>
+                <a:latin typeface="Calibri"/>
+              </a:rPr>
+              <a:t> </a:t>
+            </a:r>
+            <a:r>
+              <a:rPr b="0" dirty="0" err="1">
+                <a:solidFill>
+                  <a:srgbClr val="64748B"/>
+                </a:solidFill>
+                <a:latin typeface="Calibri"/>
+              </a:rPr>
+              <a:t>tõstutundlik</a:t>
+            </a:r>
+            <a:r>
+              <a:rPr b="0" dirty="0">
+                <a:solidFill>
+                  <a:srgbClr val="64748B"/>
+                </a:solidFill>
+                <a:latin typeface="Calibri"/>
+              </a:rPr>
+              <a:t>, </a:t>
+            </a:r>
+            <a:r>
+              <a:rPr b="0" dirty="0" err="1">
+                <a:solidFill>
+                  <a:srgbClr val="64748B"/>
+                </a:solidFill>
+                <a:latin typeface="Calibri"/>
+              </a:rPr>
+              <a:t>teises</a:t>
+            </a:r>
+            <a:r>
+              <a:rPr b="0" dirty="0">
+                <a:solidFill>
+                  <a:srgbClr val="64748B"/>
+                </a:solidFill>
+                <a:latin typeface="Calibri"/>
+              </a:rPr>
+              <a:t> on — </a:t>
+            </a:r>
+            <a:r>
+              <a:rPr b="0" dirty="0" err="1">
+                <a:solidFill>
+                  <a:srgbClr val="64748B"/>
+                </a:solidFill>
+                <a:latin typeface="Calibri"/>
+              </a:rPr>
+              <a:t>proovi</a:t>
+            </a:r>
+            <a:r>
+              <a:rPr b="0" dirty="0">
+                <a:solidFill>
+                  <a:srgbClr val="64748B"/>
+                </a:solidFill>
+                <a:latin typeface="Calibri"/>
+              </a:rPr>
+              <a:t> </a:t>
+            </a:r>
+            <a:r>
+              <a:rPr b="0" dirty="0" err="1">
+                <a:solidFill>
+                  <a:srgbClr val="64748B"/>
+                </a:solidFill>
+                <a:latin typeface="Calibri"/>
+              </a:rPr>
+              <a:t>oma</a:t>
+            </a:r>
+            <a:r>
+              <a:rPr b="0" dirty="0">
+                <a:solidFill>
+                  <a:srgbClr val="64748B"/>
+                </a:solidFill>
+                <a:latin typeface="Calibri"/>
+              </a:rPr>
+              <a:t> </a:t>
+            </a:r>
+            <a:r>
+              <a:rPr b="0" dirty="0" err="1">
+                <a:solidFill>
+                  <a:srgbClr val="64748B"/>
+                </a:solidFill>
+                <a:latin typeface="Calibri"/>
+              </a:rPr>
+              <a:t>keskkonnas</a:t>
+            </a:r>
+            <a:r>
+              <a:rPr b="0" dirty="0">
+                <a:solidFill>
+                  <a:srgbClr val="64748B"/>
+                </a:solidFill>
+                <a:latin typeface="Calibri"/>
+              </a:rPr>
+              <a:t>.</a:t>
             </a:r>
           </a:p>
         </p:txBody>
@@ -43246,7 +43648,7 @@
             <p:ph sz="quarter" idx="11"/>
             <p:extLst>
               <p:ext uri="{D42A27DB-BD31-4B8C-83A1-F6EECF244321}">
-                <p14:modId xmlns:p14="http://schemas.microsoft.com/office/powerpoint/2010/main" val="1463564251"/>
+                <p14:modId xmlns:p14="http://schemas.microsoft.com/office/powerpoint/2010/main" val="1003582819"/>
               </p:ext>
             </p:extLst>
           </p:nvPr>
@@ -43411,16 +43813,16 @@
               <a:t>ORDER BY — </a:t>
             </a:r>
             <a:r>
-              <a:rPr sz="2600" b="1" dirty="0" err="1">
+              <a:rPr lang="en-GB" sz="2600" b="1" dirty="0" err="1">
                 <a:solidFill>
                   <a:srgbClr val="FFFFFF"/>
                 </a:solidFill>
                 <a:latin typeface="Calibri"/>
               </a:rPr>
-              <a:t>kontrolli</a:t>
-            </a:r>
-            <a:r>
-              <a:rPr sz="2600" b="1" dirty="0">
+              <a:t>sorteerib</a:t>
+            </a:r>
+            <a:r>
+              <a:rPr lang="en-GB" sz="2600" b="1" dirty="0">
                 <a:solidFill>
                   <a:srgbClr val="FFFFFF"/>
                 </a:solidFill>
@@ -43429,25 +43831,7 @@
               <a:t> </a:t>
             </a:r>
             <a:r>
-              <a:rPr sz="2600" b="1" dirty="0" err="1">
-                <a:solidFill>
-                  <a:srgbClr val="FFFFFF"/>
-                </a:solidFill>
-                <a:latin typeface="Calibri"/>
-              </a:rPr>
-              <a:t>ridade</a:t>
-            </a:r>
-            <a:r>
-              <a:rPr sz="2600" b="1" dirty="0">
-                <a:solidFill>
-                  <a:srgbClr val="FFFFFF"/>
-                </a:solidFill>
-                <a:latin typeface="Calibri"/>
-              </a:rPr>
-              <a:t> </a:t>
-            </a:r>
-            <a:r>
-              <a:rPr sz="2600" b="1" dirty="0" err="1">
+              <a:rPr lang="en-GB" sz="2600" b="1" dirty="0" err="1">
                 <a:solidFill>
                   <a:srgbClr val="FFFFFF"/>
                 </a:solidFill>
@@ -43788,7 +44172,7 @@
         <p:spPr>
           <a:xfrm>
             <a:off x="623888" y="1453020"/>
-            <a:ext cx="5279474" cy="1723549"/>
+            <a:ext cx="5279474" cy="2985433"/>
           </a:xfrm>
           <a:prstGeom prst="rect">
             <a:avLst/>
@@ -43822,6 +44206,32 @@
                 <a:spcPts val="400"/>
               </a:spcAft>
             </a:pPr>
+            <a:endParaRPr lang="en-GB" sz="2400" dirty="0">
+              <a:solidFill>
+                <a:srgbClr val="334155"/>
+              </a:solidFill>
+              <a:latin typeface="Calibri"/>
+            </a:endParaRPr>
+          </a:p>
+          <a:p>
+            <a:pPr>
+              <a:spcAft>
+                <a:spcPts val="400"/>
+              </a:spcAft>
+            </a:pPr>
+            <a:endParaRPr lang="en-GB" sz="2400" dirty="0">
+              <a:solidFill>
+                <a:srgbClr val="334155"/>
+              </a:solidFill>
+              <a:latin typeface="Calibri"/>
+            </a:endParaRPr>
+          </a:p>
+          <a:p>
+            <a:pPr>
+              <a:spcAft>
+                <a:spcPts val="400"/>
+              </a:spcAft>
+            </a:pPr>
             <a:r>
               <a:rPr lang="en-GB" sz="2400" b="0" dirty="0" err="1">
                 <a:solidFill>
@@ -43865,6 +44275,19 @@
               </a:rPr>
               <a:t> SQL</a:t>
             </a:r>
+          </a:p>
+          <a:p>
+            <a:pPr>
+              <a:spcAft>
+                <a:spcPts val="400"/>
+              </a:spcAft>
+            </a:pPr>
+            <a:endParaRPr lang="en-GB" sz="2400" dirty="0">
+              <a:solidFill>
+                <a:srgbClr val="334155"/>
+              </a:solidFill>
+              <a:latin typeface="Calibri"/>
+            </a:endParaRPr>
           </a:p>
           <a:p>
             <a:pPr>
@@ -44038,6 +44461,206 @@
                 <a:srgbClr val="FF0000"/>
               </a:solidFill>
             </a:endParaRPr>
+          </a:p>
+        </p:txBody>
+      </p:sp>
+      <p:sp>
+        <p:nvSpPr>
+          <p:cNvPr id="2" name="Freeform: Shape 1">
+            <a:extLst>
+              <a:ext uri="{FF2B5EF4-FFF2-40B4-BE49-F238E27FC236}">
+                <a16:creationId xmlns:a16="http://schemas.microsoft.com/office/drawing/2014/main" id="{AF81BA9A-910B-9D8C-604C-04FA54C35757}"/>
+              </a:ext>
+            </a:extLst>
+          </p:cNvPr>
+          <p:cNvSpPr/>
+          <p:nvPr/>
+        </p:nvSpPr>
+        <p:spPr>
+          <a:xfrm>
+            <a:off x="5505450" y="3952394"/>
+            <a:ext cx="723900" cy="476731"/>
+          </a:xfrm>
+          <a:custGeom>
+            <a:avLst/>
+            <a:gdLst>
+              <a:gd name="csX0" fmla="*/ 704850 w 723900"/>
+              <a:gd name="csY0" fmla="*/ 210031 h 476731"/>
+              <a:gd name="csX1" fmla="*/ 247650 w 723900"/>
+              <a:gd name="csY1" fmla="*/ 19531 h 476731"/>
+              <a:gd name="csX2" fmla="*/ 114300 w 723900"/>
+              <a:gd name="csY2" fmla="*/ 481 h 476731"/>
+              <a:gd name="csX3" fmla="*/ 19050 w 723900"/>
+              <a:gd name="csY3" fmla="*/ 10006 h 476731"/>
+              <a:gd name="csX4" fmla="*/ 9525 w 723900"/>
+              <a:gd name="csY4" fmla="*/ 67156 h 476731"/>
+              <a:gd name="csX5" fmla="*/ 0 w 723900"/>
+              <a:gd name="csY5" fmla="*/ 105256 h 476731"/>
+              <a:gd name="csX6" fmla="*/ 47625 w 723900"/>
+              <a:gd name="csY6" fmla="*/ 229081 h 476731"/>
+              <a:gd name="csX7" fmla="*/ 361950 w 723900"/>
+              <a:gd name="csY7" fmla="*/ 429106 h 476731"/>
+              <a:gd name="csX8" fmla="*/ 466725 w 723900"/>
+              <a:gd name="csY8" fmla="*/ 476731 h 476731"/>
+              <a:gd name="csX9" fmla="*/ 714375 w 723900"/>
+              <a:gd name="csY9" fmla="*/ 400531 h 476731"/>
+              <a:gd name="csX10" fmla="*/ 723900 w 723900"/>
+              <a:gd name="csY10" fmla="*/ 362431 h 476731"/>
+              <a:gd name="csX11" fmla="*/ 714375 w 723900"/>
+              <a:gd name="csY11" fmla="*/ 248131 h 476731"/>
+              <a:gd name="csX12" fmla="*/ 695325 w 723900"/>
+              <a:gd name="csY12" fmla="*/ 200506 h 476731"/>
+              <a:gd name="csX13" fmla="*/ 676275 w 723900"/>
+              <a:gd name="csY13" fmla="*/ 162406 h 476731"/>
+            </a:gdLst>
+            <a:ahLst/>
+            <a:cxnLst>
+              <a:cxn ang="0">
+                <a:pos x="csX0" y="csY0"/>
+              </a:cxn>
+              <a:cxn ang="0">
+                <a:pos x="csX1" y="csY1"/>
+              </a:cxn>
+              <a:cxn ang="0">
+                <a:pos x="csX2" y="csY2"/>
+              </a:cxn>
+              <a:cxn ang="0">
+                <a:pos x="csX3" y="csY3"/>
+              </a:cxn>
+              <a:cxn ang="0">
+                <a:pos x="csX4" y="csY4"/>
+              </a:cxn>
+              <a:cxn ang="0">
+                <a:pos x="csX5" y="csY5"/>
+              </a:cxn>
+              <a:cxn ang="0">
+                <a:pos x="csX6" y="csY6"/>
+              </a:cxn>
+              <a:cxn ang="0">
+                <a:pos x="csX7" y="csY7"/>
+              </a:cxn>
+              <a:cxn ang="0">
+                <a:pos x="csX8" y="csY8"/>
+              </a:cxn>
+              <a:cxn ang="0">
+                <a:pos x="csX9" y="csY9"/>
+              </a:cxn>
+              <a:cxn ang="0">
+                <a:pos x="csX10" y="csY10"/>
+              </a:cxn>
+              <a:cxn ang="0">
+                <a:pos x="csX11" y="csY11"/>
+              </a:cxn>
+              <a:cxn ang="0">
+                <a:pos x="csX12" y="csY12"/>
+              </a:cxn>
+              <a:cxn ang="0">
+                <a:pos x="csX13" y="csY13"/>
+              </a:cxn>
+            </a:cxnLst>
+            <a:rect l="l" t="t" r="r" b="b"/>
+            <a:pathLst>
+              <a:path w="723900" h="476731">
+                <a:moveTo>
+                  <a:pt x="704850" y="210031"/>
+                </a:moveTo>
+                <a:cubicBezTo>
+                  <a:pt x="553339" y="139687"/>
+                  <a:pt x="409711" y="62430"/>
+                  <a:pt x="247650" y="19531"/>
+                </a:cubicBezTo>
+                <a:cubicBezTo>
+                  <a:pt x="204244" y="8041"/>
+                  <a:pt x="158750" y="6831"/>
+                  <a:pt x="114300" y="481"/>
+                </a:cubicBezTo>
+                <a:cubicBezTo>
+                  <a:pt x="82550" y="3656"/>
+                  <a:pt x="45970" y="-7125"/>
+                  <a:pt x="19050" y="10006"/>
+                </a:cubicBezTo>
+                <a:cubicBezTo>
+                  <a:pt x="2757" y="20375"/>
+                  <a:pt x="13313" y="48218"/>
+                  <a:pt x="9525" y="67156"/>
+                </a:cubicBezTo>
+                <a:cubicBezTo>
+                  <a:pt x="6958" y="79993"/>
+                  <a:pt x="3175" y="92556"/>
+                  <a:pt x="0" y="105256"/>
+                </a:cubicBezTo>
+                <a:cubicBezTo>
+                  <a:pt x="15875" y="146531"/>
+                  <a:pt x="25684" y="190685"/>
+                  <a:pt x="47625" y="229081"/>
+                </a:cubicBezTo>
+                <a:cubicBezTo>
+                  <a:pt x="112927" y="343360"/>
+                  <a:pt x="252706" y="377085"/>
+                  <a:pt x="361950" y="429106"/>
+                </a:cubicBezTo>
+                <a:cubicBezTo>
+                  <a:pt x="472850" y="481916"/>
+                  <a:pt x="386987" y="456797"/>
+                  <a:pt x="466725" y="476731"/>
+                </a:cubicBezTo>
+                <a:cubicBezTo>
+                  <a:pt x="637293" y="461225"/>
+                  <a:pt x="657538" y="514206"/>
+                  <a:pt x="714375" y="400531"/>
+                </a:cubicBezTo>
+                <a:cubicBezTo>
+                  <a:pt x="720229" y="388822"/>
+                  <a:pt x="720725" y="375131"/>
+                  <a:pt x="723900" y="362431"/>
+                </a:cubicBezTo>
+                <a:cubicBezTo>
+                  <a:pt x="720725" y="324331"/>
+                  <a:pt x="721019" y="285781"/>
+                  <a:pt x="714375" y="248131"/>
+                </a:cubicBezTo>
+                <a:cubicBezTo>
+                  <a:pt x="711404" y="231293"/>
+                  <a:pt x="702269" y="216130"/>
+                  <a:pt x="695325" y="200506"/>
+                </a:cubicBezTo>
+                <a:cubicBezTo>
+                  <a:pt x="689558" y="187531"/>
+                  <a:pt x="676275" y="162406"/>
+                  <a:pt x="676275" y="162406"/>
+                </a:cubicBezTo>
+              </a:path>
+            </a:pathLst>
+          </a:custGeom>
+          <a:noFill/>
+          <a:ln w="28575">
+            <a:solidFill>
+              <a:srgbClr val="FF0000"/>
+            </a:solidFill>
+          </a:ln>
+        </p:spPr>
+        <p:style>
+          <a:lnRef idx="2">
+            <a:schemeClr val="accent1">
+              <a:shade val="15000"/>
+            </a:schemeClr>
+          </a:lnRef>
+          <a:fillRef idx="1">
+            <a:schemeClr val="accent1"/>
+          </a:fillRef>
+          <a:effectRef idx="0">
+            <a:schemeClr val="accent1"/>
+          </a:effectRef>
+          <a:fontRef idx="minor">
+            <a:schemeClr val="lt1"/>
+          </a:fontRef>
+        </p:style>
+        <p:txBody>
+          <a:bodyPr rtlCol="0" anchor="ctr"/>
+          <a:lstStyle/>
+          <a:p>
+            <a:pPr algn="ctr"/>
+            <a:endParaRPr lang="en-GB"/>
           </a:p>
         </p:txBody>
       </p:sp>
@@ -47632,7 +48255,7 @@
         </p:nvSpPr>
         <p:spPr>
           <a:xfrm>
-            <a:off x="238126" y="1268413"/>
+            <a:off x="504318" y="1555750"/>
             <a:ext cx="6477000" cy="4465637"/>
           </a:xfrm>
         </p:spPr>
@@ -47646,269 +48269,260 @@
               </a:lnSpc>
             </a:pPr>
             <a:r>
-              <a:rPr lang="en-GB" sz="1800" b="1" dirty="0" err="1"/>
+              <a:rPr lang="en-GB" sz="2000" b="1" dirty="0" err="1"/>
               <a:t>Andmebaas</a:t>
             </a:r>
             <a:r>
-              <a:rPr lang="en-GB" sz="1800" dirty="0"/>
+              <a:rPr lang="en-GB" sz="2000" dirty="0"/>
               <a:t> on </a:t>
             </a:r>
             <a:r>
-              <a:rPr lang="en-GB" sz="1800" dirty="0" err="1"/>
+              <a:rPr lang="en-GB" sz="2000" dirty="0" err="1"/>
               <a:t>masinloetav</a:t>
             </a:r>
             <a:r>
-              <a:rPr lang="en-GB" sz="1800" dirty="0"/>
+              <a:rPr lang="en-GB" sz="2000" dirty="0"/>
               <a:t> </a:t>
             </a:r>
             <a:r>
-              <a:rPr lang="en-GB" sz="1800" dirty="0" err="1"/>
+              <a:rPr lang="en-GB" sz="2000" dirty="0" err="1"/>
               <a:t>organiseeritud</a:t>
             </a:r>
             <a:r>
-              <a:rPr lang="en-GB" sz="1800" dirty="0"/>
+              <a:rPr lang="en-GB" sz="2000" dirty="0"/>
               <a:t> </a:t>
             </a:r>
             <a:r>
-              <a:rPr lang="en-GB" sz="1800" dirty="0" err="1"/>
+              <a:rPr lang="en-GB" sz="2000" dirty="0" err="1"/>
               <a:t>kogum</a:t>
             </a:r>
             <a:r>
-              <a:rPr lang="en-GB" sz="1800" dirty="0"/>
+              <a:rPr lang="en-GB" sz="2000" dirty="0"/>
               <a:t> </a:t>
             </a:r>
             <a:r>
-              <a:rPr lang="en-GB" sz="1800" dirty="0" err="1"/>
+              <a:rPr lang="en-GB" sz="2000" dirty="0" err="1"/>
               <a:t>andmeid</a:t>
             </a:r>
             <a:r>
-              <a:rPr lang="en-GB" sz="1800" dirty="0"/>
+              <a:rPr lang="en-GB" sz="2000" dirty="0"/>
               <a:t>, mis on </a:t>
             </a:r>
             <a:r>
-              <a:rPr lang="en-GB" sz="1800" dirty="0" err="1"/>
+              <a:rPr lang="en-GB" sz="2000" dirty="0" err="1"/>
               <a:t>struktureeritud</a:t>
             </a:r>
             <a:r>
-              <a:rPr lang="en-GB" sz="1800" dirty="0"/>
+              <a:rPr lang="en-GB" sz="2000" dirty="0"/>
               <a:t> </a:t>
             </a:r>
             <a:r>
-              <a:rPr lang="en-GB" sz="1800" dirty="0" err="1"/>
+              <a:rPr lang="en-GB" sz="2000" dirty="0" err="1"/>
               <a:t>viisil</a:t>
             </a:r>
             <a:r>
-              <a:rPr lang="en-GB" sz="1800" dirty="0"/>
+              <a:rPr lang="en-GB" sz="2000" dirty="0"/>
               <a:t>, mis </a:t>
             </a:r>
             <a:r>
-              <a:rPr lang="en-GB" sz="1800" dirty="0" err="1"/>
+              <a:rPr lang="en-GB" sz="2000" dirty="0" err="1"/>
               <a:t>võimaldab</a:t>
             </a:r>
             <a:r>
-              <a:rPr lang="en-GB" sz="1800" dirty="0"/>
+              <a:rPr lang="en-GB" sz="2000" dirty="0"/>
               <a:t> </a:t>
             </a:r>
             <a:r>
-              <a:rPr lang="en-GB" sz="1800" b="1" dirty="0" err="1"/>
+              <a:rPr lang="en-GB" sz="2000" b="1" dirty="0" err="1"/>
               <a:t>lihtsat</a:t>
             </a:r>
             <a:r>
-              <a:rPr lang="en-GB" sz="1800" b="1" dirty="0"/>
+              <a:rPr lang="en-GB" sz="2000" b="1" dirty="0"/>
               <a:t> </a:t>
             </a:r>
             <a:r>
-              <a:rPr lang="en-GB" sz="1800" b="1" dirty="0" err="1"/>
+              <a:rPr lang="en-GB" sz="2000" b="1" dirty="0" err="1"/>
               <a:t>ja</a:t>
             </a:r>
             <a:r>
-              <a:rPr lang="en-GB" sz="1800" b="1" dirty="0"/>
+              <a:rPr lang="en-GB" sz="2000" b="1" dirty="0"/>
               <a:t> </a:t>
             </a:r>
             <a:r>
-              <a:rPr lang="en-GB" sz="1800" b="1" dirty="0" err="1"/>
+              <a:rPr lang="en-GB" sz="2000" b="1" dirty="0" err="1"/>
               <a:t>tõhusat</a:t>
             </a:r>
             <a:r>
-              <a:rPr lang="en-GB" sz="1800" b="1" dirty="0"/>
+              <a:rPr lang="en-GB" sz="2000" b="1" dirty="0"/>
               <a:t> </a:t>
             </a:r>
             <a:r>
-              <a:rPr lang="en-GB" sz="1800" dirty="0"/>
+              <a:rPr lang="en-GB" sz="2000" dirty="0"/>
               <a:t>: </a:t>
             </a:r>
             <a:r>
-              <a:rPr lang="en-GB" sz="1800" b="1" dirty="0" err="1"/>
+              <a:rPr lang="en-GB" sz="2000" b="1" dirty="0" err="1"/>
               <a:t>andmete</a:t>
             </a:r>
             <a:r>
-              <a:rPr lang="en-GB" sz="1800" b="1" dirty="0"/>
+              <a:rPr lang="en-GB" sz="2000" b="1" dirty="0"/>
               <a:t> </a:t>
             </a:r>
             <a:r>
-              <a:rPr lang="en-GB" sz="1800" b="1" dirty="0" err="1"/>
+              <a:rPr lang="en-GB" sz="2000" b="1" dirty="0" err="1"/>
               <a:t>salvestamist</a:t>
             </a:r>
             <a:r>
-              <a:rPr lang="en-GB" sz="1800" dirty="0"/>
+              <a:rPr lang="en-GB" sz="2000" dirty="0"/>
               <a:t>, </a:t>
             </a:r>
             <a:r>
-              <a:rPr lang="en-GB" sz="1800" dirty="0" err="1"/>
+              <a:rPr lang="en-GB" sz="2000" dirty="0" err="1"/>
               <a:t>haldamist</a:t>
             </a:r>
             <a:r>
-              <a:rPr lang="en-GB" sz="1800" dirty="0"/>
+              <a:rPr lang="en-GB" sz="2000" dirty="0"/>
               <a:t>, </a:t>
             </a:r>
             <a:r>
-              <a:rPr lang="en-GB" sz="1800" dirty="0" err="1"/>
+              <a:rPr lang="en-GB" sz="2000" dirty="0" err="1"/>
               <a:t>uuendamist</a:t>
             </a:r>
             <a:r>
-              <a:rPr lang="en-GB" sz="1800" dirty="0"/>
+              <a:rPr lang="en-GB" sz="2000" dirty="0"/>
               <a:t> </a:t>
             </a:r>
             <a:r>
-              <a:rPr lang="en-GB" sz="1800" dirty="0" err="1"/>
+              <a:rPr lang="en-GB" sz="2000" dirty="0" err="1"/>
               <a:t>ja</a:t>
             </a:r>
             <a:r>
-              <a:rPr lang="en-GB" sz="1800" dirty="0"/>
+              <a:rPr lang="en-GB" sz="2000" dirty="0"/>
               <a:t> </a:t>
             </a:r>
             <a:r>
-              <a:rPr lang="en-GB" sz="1800" b="1" dirty="0" err="1"/>
+              <a:rPr lang="en-GB" sz="2000" b="1" dirty="0" err="1"/>
               <a:t>otsimist</a:t>
             </a:r>
-            <a:endParaRPr lang="en-GB" sz="1800" dirty="0"/>
-          </a:p>
-          <a:p>
-            <a:pPr lvl="1">
+            <a:endParaRPr lang="en-GB" sz="2000" dirty="0"/>
+          </a:p>
+          <a:p>
+            <a:pPr>
               <a:lnSpc>
                 <a:spcPct val="150000"/>
               </a:lnSpc>
             </a:pPr>
             <a:r>
-              <a:rPr lang="en-GB" sz="1800" dirty="0" err="1"/>
+              <a:rPr lang="en-GB" sz="2000" dirty="0" err="1"/>
               <a:t>Andmebaasid</a:t>
             </a:r>
             <a:r>
-              <a:rPr lang="en-GB" sz="1800" dirty="0"/>
+              <a:rPr lang="en-GB" sz="2000" dirty="0"/>
               <a:t> </a:t>
             </a:r>
             <a:r>
-              <a:rPr lang="en-GB" sz="1800" dirty="0" err="1"/>
+              <a:rPr lang="en-GB" sz="2000" dirty="0" err="1"/>
               <a:t>võivad</a:t>
             </a:r>
             <a:r>
-              <a:rPr lang="en-GB" sz="1800" dirty="0"/>
+              <a:rPr lang="en-GB" sz="2000" dirty="0"/>
               <a:t> </a:t>
             </a:r>
             <a:r>
-              <a:rPr lang="en-GB" sz="1800" dirty="0" err="1"/>
+              <a:rPr lang="en-GB" sz="2000" dirty="0" err="1"/>
               <a:t>sisaldada</a:t>
             </a:r>
             <a:r>
-              <a:rPr lang="en-GB" sz="1800" dirty="0"/>
+              <a:rPr lang="en-GB" sz="2000" dirty="0"/>
               <a:t> </a:t>
             </a:r>
             <a:r>
-              <a:rPr lang="en-GB" sz="1800" dirty="0" err="1"/>
+              <a:rPr lang="en-GB" sz="2000" dirty="0" err="1"/>
               <a:t>erinevat</a:t>
             </a:r>
             <a:r>
-              <a:rPr lang="en-GB" sz="1800" dirty="0"/>
+              <a:rPr lang="en-GB" sz="2000" dirty="0"/>
               <a:t> </a:t>
             </a:r>
             <a:r>
-              <a:rPr lang="en-GB" sz="1800" dirty="0" err="1"/>
+              <a:rPr lang="en-GB" sz="2000" dirty="0" err="1"/>
               <a:t>tüüpi</a:t>
             </a:r>
             <a:r>
-              <a:rPr lang="en-GB" sz="1800" dirty="0"/>
+              <a:rPr lang="en-GB" sz="2000" dirty="0"/>
               <a:t> </a:t>
             </a:r>
             <a:r>
-              <a:rPr lang="en-GB" sz="1800" dirty="0" err="1"/>
+              <a:rPr lang="en-GB" sz="2000" dirty="0" err="1"/>
               <a:t>andmeid</a:t>
             </a:r>
             <a:r>
-              <a:rPr lang="en-GB" sz="1800" dirty="0"/>
+              <a:rPr lang="en-GB" sz="2000" dirty="0"/>
               <a:t>, </a:t>
             </a:r>
             <a:r>
-              <a:rPr lang="en-GB" sz="1800" dirty="0" err="1"/>
+              <a:rPr lang="en-GB" sz="2000" dirty="0" err="1"/>
               <a:t>näiteks</a:t>
             </a:r>
             <a:r>
-              <a:rPr lang="en-GB" sz="1800" dirty="0"/>
+              <a:rPr lang="en-GB" sz="2000" dirty="0"/>
+              <a:t>: </a:t>
+            </a:r>
+            <a:r>
+              <a:rPr lang="en-GB" sz="2000" dirty="0" err="1"/>
+              <a:t>tekstilisi</a:t>
+            </a:r>
+            <a:r>
+              <a:rPr lang="en-GB" sz="2000" dirty="0"/>
+              <a:t>, </a:t>
+            </a:r>
+            <a:r>
+              <a:rPr lang="en-GB" sz="2000" dirty="0" err="1"/>
+              <a:t>numbrilisi</a:t>
+            </a:r>
+            <a:r>
+              <a:rPr lang="en-GB" sz="2000" dirty="0"/>
               <a:t> </a:t>
             </a:r>
             <a:r>
-              <a:rPr lang="en-GB" sz="1800" dirty="0" err="1"/>
-              <a:t>tekstilisi</a:t>
-            </a:r>
-            <a:r>
-              <a:rPr lang="en-GB" sz="1800" dirty="0"/>
+              <a:rPr lang="en-GB" sz="2000" dirty="0" err="1"/>
+              <a:t>andmeid</a:t>
+            </a:r>
+            <a:r>
+              <a:rPr lang="en-GB" sz="2000" dirty="0"/>
               <a:t> </a:t>
             </a:r>
             <a:r>
-              <a:rPr lang="en-GB" sz="1800" dirty="0" err="1"/>
-              <a:t>ja</a:t>
-            </a:r>
-            <a:r>
-              <a:rPr lang="en-GB" sz="1800" dirty="0"/>
+              <a:rPr lang="en-GB" sz="2000" dirty="0" err="1"/>
+              <a:t>ning</a:t>
+            </a:r>
+            <a:r>
+              <a:rPr lang="en-GB" sz="2000" dirty="0"/>
               <a:t> </a:t>
             </a:r>
             <a:r>
-              <a:rPr lang="en-GB" sz="1800" dirty="0" err="1"/>
-              <a:t>numbrilisi</a:t>
-            </a:r>
-            <a:r>
-              <a:rPr lang="en-GB" sz="1800" dirty="0"/>
-              <a:t> </a:t>
-            </a:r>
-            <a:r>
-              <a:rPr lang="en-GB" sz="1800" dirty="0" err="1"/>
-              <a:t>andmeid</a:t>
-            </a:r>
-            <a:r>
-              <a:rPr lang="en-GB" sz="1800" dirty="0"/>
-              <a:t> </a:t>
-            </a:r>
-            <a:r>
-              <a:rPr lang="en-GB" sz="1800" dirty="0" err="1"/>
-              <a:t>ning</a:t>
-            </a:r>
-            <a:r>
-              <a:rPr lang="en-GB" sz="1800" dirty="0"/>
-              <a:t> </a:t>
-            </a:r>
-            <a:r>
-              <a:rPr lang="en-GB" sz="1800" dirty="0" err="1"/>
+              <a:rPr lang="en-GB" sz="2000" dirty="0" err="1"/>
               <a:t>pilte</a:t>
             </a:r>
             <a:r>
-              <a:rPr lang="en-GB" sz="1800" dirty="0"/>
+              <a:rPr lang="en-GB" sz="2000" dirty="0"/>
               <a:t>.</a:t>
             </a:r>
           </a:p>
           <a:p>
-            <a:pPr marL="0" indent="0">
+            <a:pPr>
               <a:lnSpc>
                 <a:spcPct val="150000"/>
               </a:lnSpc>
-              <a:buNone/>
             </a:pPr>
             <a:r>
-              <a:rPr lang="en-US" sz="1800" dirty="0" err="1">
+              <a:rPr lang="en-US" sz="2000" dirty="0" err="1">
                 <a:ea typeface="Inter"/>
               </a:rPr>
               <a:t>Asukoht</a:t>
             </a:r>
             <a:r>
-              <a:rPr lang="en-US" sz="1800" dirty="0">
+              <a:rPr lang="en-US" sz="2000" dirty="0">
                 <a:ea typeface="Inter"/>
               </a:rPr>
               <a:t>: </a:t>
@@ -47917,37 +48531,37 @@
           <a:p>
             <a:pPr lvl="1"/>
             <a:r>
-              <a:rPr lang="en-US" sz="1800" u="sng" dirty="0" err="1">
+              <a:rPr lang="en-US" sz="2000" u="sng" dirty="0" err="1">
                 <a:ea typeface="Inter"/>
               </a:rPr>
               <a:t>lokaalne</a:t>
             </a:r>
             <a:r>
-              <a:rPr lang="en-US" sz="1800" u="sng" dirty="0">
+              <a:rPr lang="en-US" sz="2000" u="sng" dirty="0">
                 <a:ea typeface="Inter"/>
               </a:rPr>
               <a:t> </a:t>
             </a:r>
             <a:r>
-              <a:rPr lang="en-US" sz="1800" u="sng" dirty="0" err="1">
+              <a:rPr lang="en-US" sz="2000" u="sng" dirty="0" err="1">
                 <a:ea typeface="Inter"/>
               </a:rPr>
               <a:t>andmebaas</a:t>
             </a:r>
-            <a:endParaRPr lang="en-US" sz="1800" dirty="0">
+            <a:endParaRPr lang="en-US" sz="2000" dirty="0">
               <a:ea typeface="Inter"/>
             </a:endParaRPr>
           </a:p>
           <a:p>
             <a:pPr lvl="1"/>
             <a:r>
-              <a:rPr lang="en-US" sz="1800" dirty="0" err="1">
+              <a:rPr lang="en-US" sz="2000" dirty="0" err="1">
                 <a:ea typeface="Inter"/>
               </a:rPr>
               <a:t>kohalik</a:t>
             </a:r>
             <a:r>
-              <a:rPr lang="en-US" sz="1800" dirty="0">
+              <a:rPr lang="en-US" sz="2000" dirty="0">
                 <a:ea typeface="Inter"/>
               </a:rPr>
               <a:t> (on-prem) server</a:t>
@@ -47956,12 +48570,12 @@
           <a:p>
             <a:pPr lvl="1"/>
             <a:r>
-              <a:rPr lang="en-US" sz="1800" dirty="0" err="1">
+              <a:rPr lang="en-US" sz="2000" dirty="0" err="1">
                 <a:ea typeface="Inter"/>
               </a:rPr>
               <a:t>pilveserver</a:t>
             </a:r>
-            <a:endParaRPr lang="en-US" sz="1800" dirty="0">
+            <a:endParaRPr lang="en-US" sz="2000" dirty="0">
               <a:ea typeface="Inter"/>
             </a:endParaRPr>
           </a:p>
@@ -47973,7 +48587,7 @@
               <a:buFont typeface="Courier New" panose="020B0502030000000004" pitchFamily="34" charset="0"/>
               <a:buChar char="o"/>
             </a:pPr>
-            <a:endParaRPr lang="en-US" sz="2000" dirty="0">
+            <a:endParaRPr lang="en-US" sz="2400" dirty="0">
               <a:ea typeface="Inter"/>
             </a:endParaRPr>
           </a:p>
@@ -48070,15 +48684,33 @@
                                   </p:childTnLst>
                                 </p:cTn>
                               </p:par>
+                            </p:childTnLst>
+                          </p:cTn>
+                        </p:par>
+                      </p:childTnLst>
+                    </p:cTn>
+                  </p:par>
+                  <p:par>
+                    <p:cTn id="7" fill="hold">
+                      <p:stCondLst>
+                        <p:cond delay="indefinite"/>
+                      </p:stCondLst>
+                      <p:childTnLst>
+                        <p:par>
+                          <p:cTn id="8" fill="hold">
+                            <p:stCondLst>
+                              <p:cond delay="0"/>
+                            </p:stCondLst>
+                            <p:childTnLst>
                               <p:par>
-                                <p:cTn id="7" presetID="1" presetClass="entr" presetSubtype="0" fill="hold" grpId="0" nodeType="withEffect">
+                                <p:cTn id="9" presetID="1" presetClass="entr" presetSubtype="0" fill="hold" grpId="0" nodeType="clickEffect">
                                   <p:stCondLst>
                                     <p:cond delay="0"/>
                                   </p:stCondLst>
                                   <p:childTnLst>
                                     <p:set>
                                       <p:cBhvr>
-                                        <p:cTn id="8" dur="1" fill="hold">
+                                        <p:cTn id="10" dur="1" fill="hold">
                                           <p:stCondLst>
                                             <p:cond delay="0"/>
                                           </p:stCondLst>
@@ -48108,50 +48740,19 @@
                     </p:cTn>
                   </p:par>
                   <p:par>
-                    <p:cTn id="9" fill="hold">
+                    <p:cTn id="11" fill="hold">
                       <p:stCondLst>
                         <p:cond delay="indefinite"/>
                       </p:stCondLst>
                       <p:childTnLst>
                         <p:par>
-                          <p:cTn id="10" fill="hold">
+                          <p:cTn id="12" fill="hold">
                             <p:stCondLst>
                               <p:cond delay="0"/>
                             </p:stCondLst>
                             <p:childTnLst>
                               <p:par>
-                                <p:cTn id="11" presetID="1" presetClass="entr" presetSubtype="0" fill="hold" grpId="0" nodeType="clickEffect">
-                                  <p:stCondLst>
-                                    <p:cond delay="0"/>
-                                  </p:stCondLst>
-                                  <p:childTnLst>
-                                    <p:set>
-                                      <p:cBhvr>
-                                        <p:cTn id="12" dur="1" fill="hold">
-                                          <p:stCondLst>
-                                            <p:cond delay="0"/>
-                                          </p:stCondLst>
-                                        </p:cTn>
-                                        <p:tgtEl>
-                                          <p:spTgt spid="3">
-                                            <p:txEl>
-                                              <p:pRg st="2" end="2"/>
-                                            </p:txEl>
-                                          </p:spTgt>
-                                        </p:tgtEl>
-                                        <p:attrNameLst>
-                                          <p:attrName>style.visibility</p:attrName>
-                                        </p:attrNameLst>
-                                      </p:cBhvr>
-                                      <p:to>
-                                        <p:strVal val="visible"/>
-                                      </p:to>
-                                    </p:set>
-                                  </p:childTnLst>
-                                </p:cTn>
-                              </p:par>
-                              <p:par>
-                                <p:cTn id="13" presetID="1" presetClass="entr" presetSubtype="0" fill="hold" grpId="0" nodeType="withEffect">
+                                <p:cTn id="13" presetID="1" presetClass="entr" presetSubtype="0" fill="hold" grpId="0" nodeType="clickEffect">
                                   <p:stCondLst>
                                     <p:cond delay="0"/>
                                   </p:stCondLst>
@@ -48166,7 +48767,7 @@
                                         <p:tgtEl>
                                           <p:spTgt spid="3">
                                             <p:txEl>
-                                              <p:pRg st="3" end="3"/>
+                                              <p:pRg st="2" end="2"/>
                                             </p:txEl>
                                           </p:spTgt>
                                         </p:tgtEl>
@@ -48197,7 +48798,7 @@
                                         <p:tgtEl>
                                           <p:spTgt spid="3">
                                             <p:txEl>
-                                              <p:pRg st="4" end="4"/>
+                                              <p:pRg st="3" end="3"/>
                                             </p:txEl>
                                           </p:spTgt>
                                         </p:tgtEl>
@@ -48221,6 +48822,37 @@
                                     <p:set>
                                       <p:cBhvr>
                                         <p:cTn id="18" dur="1" fill="hold">
+                                          <p:stCondLst>
+                                            <p:cond delay="0"/>
+                                          </p:stCondLst>
+                                        </p:cTn>
+                                        <p:tgtEl>
+                                          <p:spTgt spid="3">
+                                            <p:txEl>
+                                              <p:pRg st="4" end="4"/>
+                                            </p:txEl>
+                                          </p:spTgt>
+                                        </p:tgtEl>
+                                        <p:attrNameLst>
+                                          <p:attrName>style.visibility</p:attrName>
+                                        </p:attrNameLst>
+                                      </p:cBhvr>
+                                      <p:to>
+                                        <p:strVal val="visible"/>
+                                      </p:to>
+                                    </p:set>
+                                  </p:childTnLst>
+                                </p:cTn>
+                              </p:par>
+                              <p:par>
+                                <p:cTn id="19" presetID="1" presetClass="entr" presetSubtype="0" fill="hold" grpId="0" nodeType="withEffect">
+                                  <p:stCondLst>
+                                    <p:cond delay="0"/>
+                                  </p:stCondLst>
+                                  <p:childTnLst>
+                                    <p:set>
+                                      <p:cBhvr>
+                                        <p:cTn id="20" dur="1" fill="hold">
                                           <p:stCondLst>
                                             <p:cond delay="0"/>
                                           </p:stCondLst>
@@ -48365,7 +48997,7 @@
         </p:nvSpPr>
         <p:spPr>
           <a:xfrm>
-            <a:off x="623888" y="1268413"/>
+            <a:off x="623888" y="1630363"/>
             <a:ext cx="5242994" cy="4465637"/>
           </a:xfrm>
         </p:spPr>
@@ -48606,9 +49238,97 @@
               <a:rPr lang="en-GB" sz="2000" dirty="0"/>
               <a:t>.</a:t>
             </a:r>
-            <a:endParaRPr lang="en-US" sz="2000" dirty="0">
-              <a:ea typeface="Inter"/>
-            </a:endParaRPr>
+          </a:p>
+          <a:p>
+            <a:pPr lvl="1"/>
+            <a:r>
+              <a:rPr lang="en-GB" sz="2000" dirty="0" err="1"/>
+              <a:t>Tabelil</a:t>
+            </a:r>
+            <a:r>
+              <a:rPr lang="en-GB" sz="2000" dirty="0"/>
+              <a:t> on </a:t>
+            </a:r>
+            <a:r>
+              <a:rPr lang="en-GB" sz="2000" b="1" dirty="0" err="1"/>
+              <a:t>primaarvõti</a:t>
+            </a:r>
+            <a:r>
+              <a:rPr lang="en-GB" sz="2000" dirty="0"/>
+              <a:t> (primary key) </a:t>
+            </a:r>
+            <a:r>
+              <a:rPr lang="en-GB" sz="2000" dirty="0" err="1"/>
+              <a:t>ehk</a:t>
+            </a:r>
+            <a:r>
+              <a:rPr lang="en-GB" sz="2000" dirty="0"/>
+              <a:t> </a:t>
+            </a:r>
+            <a:r>
+              <a:rPr lang="en-GB" sz="2000" dirty="0" err="1"/>
+              <a:t>andmeüksuse</a:t>
+            </a:r>
+            <a:r>
+              <a:rPr lang="en-GB" sz="2000" dirty="0"/>
+              <a:t> </a:t>
+            </a:r>
+            <a:r>
+              <a:rPr lang="en-GB" sz="2000" dirty="0" err="1"/>
+              <a:t>unikaalne</a:t>
+            </a:r>
+            <a:r>
+              <a:rPr lang="en-GB" sz="2000" dirty="0"/>
+              <a:t> </a:t>
+            </a:r>
+            <a:r>
+              <a:rPr lang="en-GB" sz="2000" dirty="0" err="1"/>
+              <a:t>tunnus</a:t>
+            </a:r>
+            <a:endParaRPr lang="en-GB" sz="2000" dirty="0"/>
+          </a:p>
+          <a:p>
+            <a:pPr lvl="1"/>
+            <a:r>
+              <a:rPr lang="en-GB" sz="2000" dirty="0" err="1"/>
+              <a:t>Tabelile</a:t>
+            </a:r>
+            <a:r>
+              <a:rPr lang="en-GB" sz="2000" dirty="0"/>
+              <a:t> </a:t>
+            </a:r>
+            <a:r>
+              <a:rPr lang="en-GB" sz="2000" dirty="0" err="1"/>
+              <a:t>viitav</a:t>
+            </a:r>
+            <a:r>
+              <a:rPr lang="en-GB" sz="2000" dirty="0"/>
+              <a:t> </a:t>
+            </a:r>
+            <a:r>
+              <a:rPr lang="en-GB" sz="2000" dirty="0" err="1"/>
+              <a:t>tunnus</a:t>
+            </a:r>
+            <a:r>
+              <a:rPr lang="en-GB" sz="2000" dirty="0"/>
+              <a:t> </a:t>
+            </a:r>
+            <a:r>
+              <a:rPr lang="en-GB" sz="2000" dirty="0" err="1"/>
+              <a:t>teisestabelis</a:t>
+            </a:r>
+            <a:r>
+              <a:rPr lang="en-GB" sz="2000" dirty="0"/>
+              <a:t> on </a:t>
+            </a:r>
+            <a:r>
+              <a:rPr lang="en-GB" sz="2000" b="1" dirty="0" err="1"/>
+              <a:t>võõrvõti</a:t>
+            </a:r>
+            <a:r>
+              <a:rPr lang="en-GB" sz="2000" dirty="0"/>
+              <a:t> (foreign key)</a:t>
+            </a:r>
           </a:p>
           <a:p>
             <a:endParaRPr lang="en-GB" dirty="0"/>
@@ -48637,7 +49357,7 @@
         </p:blipFill>
         <p:spPr>
           <a:xfrm>
-            <a:off x="6634978" y="994122"/>
+            <a:off x="5866882" y="1022067"/>
             <a:ext cx="5103696" cy="4456464"/>
           </a:xfrm>
           <a:prstGeom prst="rect">
@@ -48661,7 +49381,7 @@
         </p:nvSpPr>
         <p:spPr>
           <a:xfrm>
-            <a:off x="6096000" y="5734051"/>
+            <a:off x="6096000" y="5478531"/>
             <a:ext cx="6096000" cy="227838"/>
           </a:xfrm>
           <a:prstGeom prst="rect">
@@ -48973,7 +49693,7 @@
         </p:nvSpPr>
         <p:spPr>
           <a:xfrm>
-            <a:off x="623888" y="1268413"/>
+            <a:off x="623888" y="1491131"/>
             <a:ext cx="4188744" cy="4465637"/>
           </a:xfrm>
         </p:spPr>
@@ -49113,7 +49833,7 @@
               <a:t> </a:t>
             </a:r>
             <a:r>
-              <a:rPr lang="en-US" sz="2000" dirty="0" err="1">
+              <a:rPr lang="en-US" sz="2000" b="1" dirty="0" err="1">
                 <a:ea typeface="Inter"/>
               </a:rPr>
               <a:t>struktureeritud</a:t>
@@ -49167,12 +49887,12 @@
               <a:t> </a:t>
             </a:r>
             <a:r>
-              <a:rPr lang="en-US" sz="2000" dirty="0" err="1">
+              <a:rPr lang="en-US" sz="2000" b="1" dirty="0" err="1">
                 <a:ea typeface="Inter"/>
               </a:rPr>
               <a:t>analüütikas</a:t>
             </a:r>
-            <a:endParaRPr lang="en-US" sz="2000" dirty="0">
+            <a:endParaRPr lang="en-US" sz="2000" b="1" dirty="0">
               <a:ea typeface="Inter"/>
             </a:endParaRPr>
           </a:p>
@@ -49340,9 +50060,12 @@
               </a:rPr>
               <a:t>andmebaas</a:t>
             </a:r>
-            <a:endParaRPr lang="en-US" sz="2400" dirty="0">
-              <a:ea typeface="Inter"/>
-            </a:endParaRPr>
+            <a:r>
+              <a:rPr lang="en-US" sz="2400" dirty="0">
+                <a:ea typeface="Inter"/>
+              </a:rPr>
+              <a:t> (No SQL)</a:t>
+            </a:r>
           </a:p>
           <a:p>
             <a:pPr lvl="1" indent="-342900">
@@ -49578,7 +50301,67 @@
               <a:rPr lang="en-US" sz="2000" dirty="0" err="1">
                 <a:ea typeface="Inter"/>
               </a:rPr>
-              <a:t>lisadalisada</a:t>
+              <a:t>lisada</a:t>
+            </a:r>
+            <a:r>
+              <a:rPr lang="en-US" sz="2000" dirty="0">
+                <a:ea typeface="Inter"/>
+              </a:rPr>
+              <a:t>; </a:t>
+            </a:r>
+            <a:r>
+              <a:rPr lang="en-US" sz="2000" dirty="0" err="1">
+                <a:ea typeface="Inter"/>
+              </a:rPr>
+              <a:t>iga</a:t>
+            </a:r>
+            <a:r>
+              <a:rPr lang="en-US" sz="2000" dirty="0">
+                <a:ea typeface="Inter"/>
+              </a:rPr>
+              <a:t> rea kotha </a:t>
+            </a:r>
+            <a:r>
+              <a:rPr lang="en-US" sz="2000" dirty="0" err="1">
+                <a:ea typeface="Inter"/>
+              </a:rPr>
+              <a:t>vaid</a:t>
+            </a:r>
+            <a:r>
+              <a:rPr lang="en-US" sz="2000" dirty="0">
+                <a:ea typeface="Inter"/>
+              </a:rPr>
+              <a:t> need </a:t>
+            </a:r>
+            <a:r>
+              <a:rPr lang="en-US" sz="2000" dirty="0" err="1">
+                <a:ea typeface="Inter"/>
+              </a:rPr>
+              <a:t>veergude</a:t>
+            </a:r>
+            <a:r>
+              <a:rPr lang="en-US" sz="2000" dirty="0">
+                <a:ea typeface="Inter"/>
+              </a:rPr>
+              <a:t> </a:t>
+            </a:r>
+            <a:r>
+              <a:rPr lang="en-US" sz="2000" dirty="0" err="1">
+                <a:ea typeface="Inter"/>
+              </a:rPr>
+              <a:t>andmed</a:t>
+            </a:r>
+            <a:r>
+              <a:rPr lang="en-US" sz="2000" dirty="0">
+                <a:ea typeface="Inter"/>
+              </a:rPr>
+              <a:t>, mis </a:t>
+            </a:r>
+            <a:r>
+              <a:rPr lang="en-US" sz="2000" dirty="0" err="1">
+                <a:ea typeface="Inter"/>
+              </a:rPr>
+              <a:t>olemas</a:t>
             </a:r>
             <a:endParaRPr lang="en-US" sz="2000" dirty="0">
               <a:ea typeface="Inter"/>
@@ -49647,7 +50430,7 @@
         </p:blipFill>
         <p:spPr>
           <a:xfrm>
-            <a:off x="6191586" y="1403373"/>
+            <a:off x="6448761" y="1293019"/>
             <a:ext cx="6000414" cy="3838452"/>
           </a:xfrm>
           <a:prstGeom prst="rect">

--- a/Materjalid/Day6 SQL/6-paev-andmetarkus-esitlus.pptx
+++ b/Materjalid/Day6 SQL/6-paev-andmetarkus-esitlus.pptx
@@ -42,8 +42,8 @@
     <p:sldId id="270" r:id="rId33"/>
     <p:sldId id="271" r:id="rId34"/>
     <p:sldId id="565" r:id="rId35"/>
-    <p:sldId id="272" r:id="rId36"/>
-    <p:sldId id="566" r:id="rId37"/>
+    <p:sldId id="566" r:id="rId36"/>
+    <p:sldId id="272" r:id="rId37"/>
     <p:sldId id="554" r:id="rId38"/>
     <p:sldId id="546" r:id="rId39"/>
     <p:sldId id="473" r:id="rId40"/>
@@ -3398,7 +3398,7 @@
           <a:p>
             <a:fld id="{F9D2AD6E-DEDD-49A0-A4BE-7A081A9112DA}" type="datetimeFigureOut">
               <a:rPr lang="en-US" smtClean="0"/>
-              <a:t>9/6/2026</a:t>
+              <a:t>9/7/2026</a:t>
             </a:fld>
             <a:endParaRPr lang="en-US"/>
           </a:p>
@@ -3574,7 +3574,7 @@
           </a:lstStyle>
           <a:p>
             <a:fld id="{2AF9C1A6-4321-41FA-B001-4140F0E2457F}" type="datetimeFigureOut">
-              <a:t>9/6/2026</a:t>
+              <a:t>9/7/2026</a:t>
             </a:fld>
             <a:endParaRPr lang="en-US"/>
           </a:p>
@@ -15592,7 +15592,7 @@
           <a:p>
             <a:fld id="{DE840A40-73C8-4048-8140-49F5D65BB431}" type="datetimeFigureOut">
               <a:rPr lang="et-EE" smtClean="0"/>
-              <a:t>06.09.2026</a:t>
+              <a:t>07.09.2026</a:t>
             </a:fld>
             <a:endParaRPr lang="et-EE"/>
           </a:p>
@@ -44696,1218 +44696,6 @@
       </p:grpSpPr>
       <p:sp>
         <p:nvSpPr>
-          <p:cNvPr id="2" name="Rectangle 1"/>
-          <p:cNvSpPr/>
-          <p:nvPr/>
-        </p:nvSpPr>
-        <p:spPr>
-          <a:xfrm>
-            <a:off x="0" y="0"/>
-            <a:ext cx="12191695" cy="6858000"/>
-          </a:xfrm>
-          <a:prstGeom prst="rect">
-            <a:avLst/>
-          </a:prstGeom>
-          <a:solidFill>
-            <a:srgbClr val="F7F9FC"/>
-          </a:solidFill>
-          <a:ln>
-            <a:noFill/>
-          </a:ln>
-          <a:effectLst/>
-        </p:spPr>
-        <p:style>
-          <a:lnRef idx="1">
-            <a:schemeClr val="accent1"/>
-          </a:lnRef>
-          <a:fillRef idx="3">
-            <a:schemeClr val="accent1"/>
-          </a:fillRef>
-          <a:effectRef idx="2">
-            <a:schemeClr val="accent1"/>
-          </a:effectRef>
-          <a:fontRef idx="minor">
-            <a:schemeClr val="lt1"/>
-          </a:fontRef>
-        </p:style>
-        <p:txBody>
-          <a:bodyPr rtlCol="0" anchor="ctr"/>
-          <a:lstStyle/>
-          <a:p>
-            <a:pPr algn="ctr"/>
-            <a:endParaRPr/>
-          </a:p>
-        </p:txBody>
-      </p:sp>
-      <p:sp>
-        <p:nvSpPr>
-          <p:cNvPr id="3" name="Rectangle 2"/>
-          <p:cNvSpPr/>
-          <p:nvPr/>
-        </p:nvSpPr>
-        <p:spPr>
-          <a:xfrm>
-            <a:off x="0" y="0"/>
-            <a:ext cx="12191695" cy="841248"/>
-          </a:xfrm>
-          <a:prstGeom prst="rect">
-            <a:avLst/>
-          </a:prstGeom>
-          <a:solidFill>
-            <a:srgbClr val="0F203E"/>
-          </a:solidFill>
-          <a:ln>
-            <a:noFill/>
-          </a:ln>
-          <a:effectLst/>
-        </p:spPr>
-        <p:style>
-          <a:lnRef idx="1">
-            <a:schemeClr val="accent1"/>
-          </a:lnRef>
-          <a:fillRef idx="3">
-            <a:schemeClr val="accent1"/>
-          </a:fillRef>
-          <a:effectRef idx="2">
-            <a:schemeClr val="accent1"/>
-          </a:effectRef>
-          <a:fontRef idx="minor">
-            <a:schemeClr val="lt1"/>
-          </a:fontRef>
-        </p:style>
-        <p:txBody>
-          <a:bodyPr rtlCol="0" anchor="ctr"/>
-          <a:lstStyle/>
-          <a:p>
-            <a:pPr algn="ctr"/>
-            <a:endParaRPr/>
-          </a:p>
-        </p:txBody>
-      </p:sp>
-      <p:sp>
-        <p:nvSpPr>
-          <p:cNvPr id="4" name="Rectangle 3"/>
-          <p:cNvSpPr/>
-          <p:nvPr/>
-        </p:nvSpPr>
-        <p:spPr>
-          <a:xfrm>
-            <a:off x="0" y="841248"/>
-            <a:ext cx="12191695" cy="73152"/>
-          </a:xfrm>
-          <a:prstGeom prst="rect">
-            <a:avLst/>
-          </a:prstGeom>
-          <a:solidFill>
-            <a:srgbClr val="007073"/>
-          </a:solidFill>
-          <a:ln>
-            <a:noFill/>
-          </a:ln>
-          <a:effectLst/>
-        </p:spPr>
-        <p:style>
-          <a:lnRef idx="1">
-            <a:schemeClr val="accent1"/>
-          </a:lnRef>
-          <a:fillRef idx="3">
-            <a:schemeClr val="accent1"/>
-          </a:fillRef>
-          <a:effectRef idx="2">
-            <a:schemeClr val="accent1"/>
-          </a:effectRef>
-          <a:fontRef idx="minor">
-            <a:schemeClr val="lt1"/>
-          </a:fontRef>
-        </p:style>
-        <p:txBody>
-          <a:bodyPr rtlCol="0" anchor="ctr"/>
-          <a:lstStyle/>
-          <a:p>
-            <a:pPr algn="ctr"/>
-            <a:endParaRPr/>
-          </a:p>
-        </p:txBody>
-      </p:sp>
-      <p:sp>
-        <p:nvSpPr>
-          <p:cNvPr id="5" name="TextBox 4"/>
-          <p:cNvSpPr txBox="1"/>
-          <p:nvPr/>
-        </p:nvSpPr>
-        <p:spPr>
-          <a:xfrm>
-            <a:off x="365760" y="164592"/>
-            <a:ext cx="11430000" cy="548640"/>
-          </a:xfrm>
-          <a:prstGeom prst="rect">
-            <a:avLst/>
-          </a:prstGeom>
-          <a:noFill/>
-        </p:spPr>
-        <p:txBody>
-          <a:bodyPr wrap="square" anchor="ctr"/>
-          <a:lstStyle/>
-          <a:p>
-            <a:pPr algn="l"/>
-            <a:r>
-              <a:rPr sz="2600" b="1" dirty="0">
-                <a:solidFill>
-                  <a:srgbClr val="FFFFFF"/>
-                </a:solidFill>
-                <a:latin typeface="Calibri"/>
-              </a:rPr>
-              <a:t>1. </a:t>
-            </a:r>
-            <a:r>
-              <a:rPr sz="2600" b="1" dirty="0" err="1">
-                <a:solidFill>
-                  <a:srgbClr val="FFFFFF"/>
-                </a:solidFill>
-                <a:latin typeface="Calibri"/>
-              </a:rPr>
-              <a:t>päev</a:t>
-            </a:r>
-            <a:r>
-              <a:rPr sz="2600" b="1" dirty="0">
-                <a:solidFill>
-                  <a:srgbClr val="FFFFFF"/>
-                </a:solidFill>
-                <a:latin typeface="Calibri"/>
-              </a:rPr>
-              <a:t>  ·  </a:t>
-            </a:r>
-            <a:r>
-              <a:rPr sz="2600" b="1" dirty="0" err="1">
-                <a:solidFill>
-                  <a:srgbClr val="FFFFFF"/>
-                </a:solidFill>
-                <a:latin typeface="Calibri"/>
-              </a:rPr>
-              <a:t>harjutused</a:t>
-            </a:r>
-            <a:r>
-              <a:rPr lang="en-GB" sz="2600" b="1" dirty="0">
-                <a:solidFill>
-                  <a:srgbClr val="FFFFFF"/>
-                </a:solidFill>
-                <a:latin typeface="Calibri"/>
-              </a:rPr>
-              <a:t> </a:t>
-            </a:r>
-            <a:r>
-              <a:rPr lang="en-GB" sz="4000" b="1" dirty="0">
-                <a:solidFill>
-                  <a:srgbClr val="FF0000"/>
-                </a:solidFill>
-                <a:latin typeface="Calibri"/>
-              </a:rPr>
-              <a:t>ISE</a:t>
-            </a:r>
-            <a:endParaRPr sz="2600" b="1" dirty="0">
-              <a:solidFill>
-                <a:srgbClr val="FF0000"/>
-              </a:solidFill>
-              <a:latin typeface="Calibri"/>
-            </a:endParaRPr>
-          </a:p>
-        </p:txBody>
-      </p:sp>
-      <p:sp>
-        <p:nvSpPr>
-          <p:cNvPr id="6" name="Rectangle 5"/>
-          <p:cNvSpPr/>
-          <p:nvPr/>
-        </p:nvSpPr>
-        <p:spPr>
-          <a:xfrm>
-            <a:off x="0" y="6601968"/>
-            <a:ext cx="12191695" cy="256032"/>
-          </a:xfrm>
-          <a:prstGeom prst="rect">
-            <a:avLst/>
-          </a:prstGeom>
-          <a:solidFill>
-            <a:srgbClr val="0F203E"/>
-          </a:solidFill>
-          <a:ln>
-            <a:noFill/>
-          </a:ln>
-          <a:effectLst/>
-        </p:spPr>
-        <p:style>
-          <a:lnRef idx="1">
-            <a:schemeClr val="accent1"/>
-          </a:lnRef>
-          <a:fillRef idx="3">
-            <a:schemeClr val="accent1"/>
-          </a:fillRef>
-          <a:effectRef idx="2">
-            <a:schemeClr val="accent1"/>
-          </a:effectRef>
-          <a:fontRef idx="minor">
-            <a:schemeClr val="lt1"/>
-          </a:fontRef>
-        </p:style>
-        <p:txBody>
-          <a:bodyPr rtlCol="0" anchor="ctr"/>
-          <a:lstStyle/>
-          <a:p>
-            <a:pPr algn="ctr"/>
-            <a:endParaRPr/>
-          </a:p>
-        </p:txBody>
-      </p:sp>
-      <p:sp>
-        <p:nvSpPr>
-          <p:cNvPr id="7" name="TextBox 6"/>
-          <p:cNvSpPr txBox="1"/>
-          <p:nvPr/>
-        </p:nvSpPr>
-        <p:spPr>
-          <a:xfrm>
-            <a:off x="365760" y="6601968"/>
-            <a:ext cx="8229600" cy="256032"/>
-          </a:xfrm>
-          <a:prstGeom prst="rect">
-            <a:avLst/>
-          </a:prstGeom>
-          <a:noFill/>
-        </p:spPr>
-        <p:txBody>
-          <a:bodyPr wrap="square" anchor="ctr"/>
-          <a:lstStyle/>
-          <a:p>
-            <a:pPr algn="l"/>
-            <a:r>
-              <a:rPr sz="1100" b="0">
-                <a:solidFill>
-                  <a:srgbClr val="94A3B8"/>
-                </a:solidFill>
-                <a:latin typeface="Calibri"/>
-              </a:rPr>
-              <a:t>SQL koolitus  ·  1. päev</a:t>
-            </a:r>
-          </a:p>
-        </p:txBody>
-      </p:sp>
-      <p:sp>
-        <p:nvSpPr>
-          <p:cNvPr id="8" name="TextBox 7"/>
-          <p:cNvSpPr txBox="1"/>
-          <p:nvPr/>
-        </p:nvSpPr>
-        <p:spPr>
-          <a:xfrm>
-            <a:off x="9601200" y="6601968"/>
-            <a:ext cx="2194560" cy="256032"/>
-          </a:xfrm>
-          <a:prstGeom prst="rect">
-            <a:avLst/>
-          </a:prstGeom>
-          <a:noFill/>
-        </p:spPr>
-        <p:txBody>
-          <a:bodyPr wrap="square" anchor="ctr"/>
-          <a:lstStyle/>
-          <a:p>
-            <a:pPr algn="r"/>
-            <a:r>
-              <a:rPr sz="1100" b="0">
-                <a:solidFill>
-                  <a:srgbClr val="94A3B8"/>
-                </a:solidFill>
-                <a:latin typeface="Calibri"/>
-              </a:rPr>
-              <a:t>17</a:t>
-            </a:r>
-          </a:p>
-        </p:txBody>
-      </p:sp>
-      <p:sp>
-        <p:nvSpPr>
-          <p:cNvPr id="9" name="TextBox 8"/>
-          <p:cNvSpPr txBox="1"/>
-          <p:nvPr/>
-        </p:nvSpPr>
-        <p:spPr>
-          <a:xfrm>
-            <a:off x="457200" y="1188720"/>
-            <a:ext cx="10972800" cy="365760"/>
-          </a:xfrm>
-          <a:prstGeom prst="rect">
-            <a:avLst/>
-          </a:prstGeom>
-          <a:noFill/>
-        </p:spPr>
-        <p:txBody>
-          <a:bodyPr wrap="square" anchor="t"/>
-          <a:lstStyle/>
-          <a:p>
-            <a:pPr algn="l"/>
-            <a:r>
-              <a:rPr sz="1600" b="0">
-                <a:solidFill>
-                  <a:srgbClr val="64748B"/>
-                </a:solidFill>
-                <a:latin typeface="Calibri"/>
-              </a:rPr>
-              <a:t>Sessioon B  ·  umbes 90 min  ·  tase 1 kõigile, tase 2 neile kes jõuavad</a:t>
-            </a:r>
-          </a:p>
-        </p:txBody>
-      </p:sp>
-      <p:sp>
-        <p:nvSpPr>
-          <p:cNvPr id="10" name="Rounded Rectangle 9"/>
-          <p:cNvSpPr/>
-          <p:nvPr/>
-        </p:nvSpPr>
-        <p:spPr>
-          <a:xfrm>
-            <a:off x="365760" y="1691640"/>
-            <a:ext cx="5669280" cy="4343400"/>
-          </a:xfrm>
-          <a:prstGeom prst="roundRect">
-            <a:avLst>
-              <a:gd name="adj" fmla="val 8000"/>
-            </a:avLst>
-          </a:prstGeom>
-          <a:solidFill>
-            <a:srgbClr val="FFFFFF"/>
-          </a:solidFill>
-          <a:ln>
-            <a:noFill/>
-          </a:ln>
-          <a:effectLst/>
-        </p:spPr>
-        <p:style>
-          <a:lnRef idx="1">
-            <a:schemeClr val="accent1"/>
-          </a:lnRef>
-          <a:fillRef idx="3">
-            <a:schemeClr val="accent1"/>
-          </a:fillRef>
-          <a:effectRef idx="2">
-            <a:schemeClr val="accent1"/>
-          </a:effectRef>
-          <a:fontRef idx="minor">
-            <a:schemeClr val="lt1"/>
-          </a:fontRef>
-        </p:style>
-        <p:txBody>
-          <a:bodyPr rtlCol="0" anchor="ctr"/>
-          <a:lstStyle/>
-          <a:p>
-            <a:pPr algn="ctr"/>
-            <a:endParaRPr sz="1400"/>
-          </a:p>
-        </p:txBody>
-      </p:sp>
-      <p:sp>
-        <p:nvSpPr>
-          <p:cNvPr id="11" name="Rectangle 10"/>
-          <p:cNvSpPr/>
-          <p:nvPr/>
-        </p:nvSpPr>
-        <p:spPr>
-          <a:xfrm>
-            <a:off x="365760" y="1691640"/>
-            <a:ext cx="91440" cy="4343400"/>
-          </a:xfrm>
-          <a:prstGeom prst="rect">
-            <a:avLst/>
-          </a:prstGeom>
-          <a:solidFill>
-            <a:srgbClr val="047857"/>
-          </a:solidFill>
-          <a:ln>
-            <a:noFill/>
-          </a:ln>
-          <a:effectLst/>
-        </p:spPr>
-        <p:style>
-          <a:lnRef idx="1">
-            <a:schemeClr val="accent1"/>
-          </a:lnRef>
-          <a:fillRef idx="3">
-            <a:schemeClr val="accent1"/>
-          </a:fillRef>
-          <a:effectRef idx="2">
-            <a:schemeClr val="accent1"/>
-          </a:effectRef>
-          <a:fontRef idx="minor">
-            <a:schemeClr val="lt1"/>
-          </a:fontRef>
-        </p:style>
-        <p:txBody>
-          <a:bodyPr rtlCol="0" anchor="ctr"/>
-          <a:lstStyle/>
-          <a:p>
-            <a:pPr algn="ctr"/>
-            <a:endParaRPr/>
-          </a:p>
-        </p:txBody>
-      </p:sp>
-      <p:sp>
-        <p:nvSpPr>
-          <p:cNvPr id="12" name="TextBox 11"/>
-          <p:cNvSpPr txBox="1"/>
-          <p:nvPr/>
-        </p:nvSpPr>
-        <p:spPr>
-          <a:xfrm>
-            <a:off x="621792" y="1801368"/>
-            <a:ext cx="5303520" cy="365760"/>
-          </a:xfrm>
-          <a:prstGeom prst="rect">
-            <a:avLst/>
-          </a:prstGeom>
-          <a:noFill/>
-        </p:spPr>
-        <p:txBody>
-          <a:bodyPr wrap="square" anchor="t"/>
-          <a:lstStyle/>
-          <a:p>
-            <a:pPr algn="l"/>
-            <a:r>
-              <a:rPr b="1" dirty="0">
-                <a:solidFill>
-                  <a:srgbClr val="0F203E"/>
-                </a:solidFill>
-                <a:latin typeface="Calibri"/>
-              </a:rPr>
-              <a:t>Tase 1</a:t>
-            </a:r>
-          </a:p>
-        </p:txBody>
-      </p:sp>
-      <p:sp>
-        <p:nvSpPr>
-          <p:cNvPr id="13" name="TextBox 12"/>
-          <p:cNvSpPr txBox="1"/>
-          <p:nvPr/>
-        </p:nvSpPr>
-        <p:spPr>
-          <a:xfrm>
-            <a:off x="621792" y="2167128"/>
-            <a:ext cx="5257800" cy="2154436"/>
-          </a:xfrm>
-          <a:prstGeom prst="rect">
-            <a:avLst/>
-          </a:prstGeom>
-          <a:noFill/>
-        </p:spPr>
-        <p:txBody>
-          <a:bodyPr wrap="square">
-            <a:spAutoFit/>
-          </a:bodyPr>
-          <a:lstStyle/>
-          <a:p>
-            <a:pPr>
-              <a:spcAft>
-                <a:spcPts val="400"/>
-              </a:spcAft>
-            </a:pPr>
-            <a:r>
-              <a:rPr sz="1600" b="0" dirty="0">
-                <a:solidFill>
-                  <a:srgbClr val="334155"/>
-                </a:solidFill>
-                <a:latin typeface="Calibri"/>
-              </a:rPr>
-              <a:t>1. Kuva </a:t>
-            </a:r>
-            <a:r>
-              <a:rPr sz="1600" b="0" dirty="0" err="1">
-                <a:solidFill>
-                  <a:srgbClr val="334155"/>
-                </a:solidFill>
-                <a:latin typeface="Calibri"/>
-              </a:rPr>
-              <a:t>kõikide</a:t>
-            </a:r>
-            <a:r>
-              <a:rPr sz="1600" b="0" dirty="0">
-                <a:solidFill>
-                  <a:srgbClr val="334155"/>
-                </a:solidFill>
-                <a:latin typeface="Calibri"/>
-              </a:rPr>
-              <a:t> </a:t>
-            </a:r>
-            <a:r>
-              <a:rPr sz="1600" b="0" dirty="0" err="1">
-                <a:solidFill>
-                  <a:srgbClr val="334155"/>
-                </a:solidFill>
-                <a:latin typeface="Calibri"/>
-              </a:rPr>
-              <a:t>klientide</a:t>
-            </a:r>
-            <a:r>
-              <a:rPr sz="1600" b="0" dirty="0">
-                <a:solidFill>
-                  <a:srgbClr val="334155"/>
-                </a:solidFill>
-                <a:latin typeface="Calibri"/>
-              </a:rPr>
-              <a:t> </a:t>
-            </a:r>
-            <a:r>
-              <a:rPr sz="1600" b="0" dirty="0" err="1">
-                <a:solidFill>
-                  <a:srgbClr val="334155"/>
-                </a:solidFill>
-                <a:latin typeface="Calibri"/>
-              </a:rPr>
-              <a:t>nimed</a:t>
-            </a:r>
-            <a:r>
-              <a:rPr sz="1600" b="0" dirty="0">
-                <a:solidFill>
-                  <a:srgbClr val="334155"/>
-                </a:solidFill>
-                <a:latin typeface="Calibri"/>
-              </a:rPr>
-              <a:t> ja </a:t>
-            </a:r>
-            <a:r>
-              <a:rPr sz="1600" b="0" dirty="0" err="1">
-                <a:solidFill>
-                  <a:srgbClr val="334155"/>
-                </a:solidFill>
-                <a:latin typeface="Calibri"/>
-              </a:rPr>
-              <a:t>linnad</a:t>
-            </a:r>
-            <a:r>
-              <a:rPr sz="1600" b="0" dirty="0">
-                <a:solidFill>
-                  <a:srgbClr val="334155"/>
-                </a:solidFill>
-                <a:latin typeface="Calibri"/>
-              </a:rPr>
-              <a:t>.</a:t>
-            </a:r>
-            <a:r>
-              <a:rPr lang="en-GB" sz="1600" b="0" dirty="0">
-                <a:solidFill>
-                  <a:srgbClr val="334155"/>
-                </a:solidFill>
-                <a:latin typeface="Calibri"/>
-              </a:rPr>
-              <a:t> </a:t>
-            </a:r>
-            <a:r>
-              <a:rPr lang="en-GB" sz="1600" b="0" dirty="0" err="1">
-                <a:solidFill>
-                  <a:srgbClr val="334155"/>
-                </a:solidFill>
-                <a:latin typeface="Calibri"/>
-              </a:rPr>
-              <a:t>Sorteeri</a:t>
-            </a:r>
-            <a:r>
-              <a:rPr lang="en-GB" sz="1600" b="0" dirty="0">
-                <a:solidFill>
-                  <a:srgbClr val="334155"/>
-                </a:solidFill>
-                <a:latin typeface="Calibri"/>
-              </a:rPr>
-              <a:t> </a:t>
-            </a:r>
-            <a:r>
-              <a:rPr lang="en-GB" sz="1600" b="0" dirty="0" err="1">
-                <a:solidFill>
-                  <a:srgbClr val="334155"/>
-                </a:solidFill>
-                <a:latin typeface="Calibri"/>
-              </a:rPr>
-              <a:t>linna</a:t>
-            </a:r>
-            <a:r>
-              <a:rPr lang="en-GB" sz="1600" b="0" dirty="0">
-                <a:solidFill>
-                  <a:srgbClr val="334155"/>
-                </a:solidFill>
-                <a:latin typeface="Calibri"/>
-              </a:rPr>
-              <a:t> </a:t>
-            </a:r>
-            <a:r>
-              <a:rPr lang="en-GB" sz="1600" b="0" dirty="0" err="1">
-                <a:solidFill>
-                  <a:srgbClr val="334155"/>
-                </a:solidFill>
-                <a:latin typeface="Calibri"/>
-              </a:rPr>
-              <a:t>järgi</a:t>
-            </a:r>
-            <a:r>
-              <a:rPr lang="en-GB" sz="1600" dirty="0">
-                <a:solidFill>
-                  <a:srgbClr val="334155"/>
-                </a:solidFill>
-                <a:latin typeface="Calibri"/>
-              </a:rPr>
-              <a:t>.</a:t>
-            </a:r>
-            <a:endParaRPr sz="1600" b="0" dirty="0">
-              <a:solidFill>
-                <a:srgbClr val="334155"/>
-              </a:solidFill>
-              <a:latin typeface="Calibri"/>
-            </a:endParaRPr>
-          </a:p>
-          <a:p>
-            <a:pPr>
-              <a:spcAft>
-                <a:spcPts val="400"/>
-              </a:spcAft>
-            </a:pPr>
-            <a:r>
-              <a:rPr sz="1600" b="0" dirty="0">
-                <a:solidFill>
-                  <a:srgbClr val="334155"/>
-                </a:solidFill>
-                <a:latin typeface="Calibri"/>
-              </a:rPr>
-              <a:t>2. Leia </a:t>
-            </a:r>
-            <a:r>
-              <a:rPr sz="1600" b="0" dirty="0" err="1">
-                <a:solidFill>
-                  <a:srgbClr val="334155"/>
-                </a:solidFill>
-                <a:latin typeface="Calibri"/>
-              </a:rPr>
-              <a:t>kliendid</a:t>
-            </a:r>
-            <a:r>
-              <a:rPr sz="1600" b="0" dirty="0">
-                <a:solidFill>
-                  <a:srgbClr val="334155"/>
-                </a:solidFill>
-                <a:latin typeface="Calibri"/>
-              </a:rPr>
-              <a:t>, </a:t>
-            </a:r>
-            <a:r>
-              <a:rPr sz="1600" b="0" dirty="0" err="1">
-                <a:solidFill>
-                  <a:srgbClr val="334155"/>
-                </a:solidFill>
-                <a:latin typeface="Calibri"/>
-              </a:rPr>
-              <a:t>kelle</a:t>
-            </a:r>
-            <a:r>
-              <a:rPr sz="1600" b="0" dirty="0">
-                <a:solidFill>
-                  <a:srgbClr val="334155"/>
-                </a:solidFill>
-                <a:latin typeface="Calibri"/>
-              </a:rPr>
-              <a:t> linn on Tallinn.</a:t>
-            </a:r>
-            <a:r>
-              <a:rPr lang="en-GB" sz="1600" b="0" dirty="0">
-                <a:solidFill>
-                  <a:srgbClr val="334155"/>
-                </a:solidFill>
-                <a:latin typeface="Calibri"/>
-              </a:rPr>
-              <a:t> </a:t>
-            </a:r>
-            <a:r>
-              <a:rPr lang="en-GB" sz="1600" b="0" dirty="0" err="1">
-                <a:solidFill>
-                  <a:srgbClr val="334155"/>
-                </a:solidFill>
-                <a:latin typeface="Calibri"/>
-              </a:rPr>
-              <a:t>Sorteeri</a:t>
-            </a:r>
-            <a:r>
-              <a:rPr lang="en-GB" sz="1600" b="0" dirty="0">
-                <a:solidFill>
-                  <a:srgbClr val="334155"/>
-                </a:solidFill>
-                <a:latin typeface="Calibri"/>
-              </a:rPr>
-              <a:t> </a:t>
-            </a:r>
-            <a:r>
-              <a:rPr lang="en-GB" sz="1600" b="0" dirty="0" err="1">
-                <a:solidFill>
-                  <a:srgbClr val="334155"/>
-                </a:solidFill>
-                <a:latin typeface="Calibri"/>
-              </a:rPr>
-              <a:t>nime</a:t>
-            </a:r>
-            <a:r>
-              <a:rPr lang="en-GB" sz="1600" b="0" dirty="0">
-                <a:solidFill>
-                  <a:srgbClr val="334155"/>
-                </a:solidFill>
-                <a:latin typeface="Calibri"/>
-              </a:rPr>
-              <a:t> </a:t>
-            </a:r>
-            <a:r>
-              <a:rPr lang="en-GB" sz="1600" b="0" dirty="0" err="1">
-                <a:solidFill>
-                  <a:srgbClr val="334155"/>
-                </a:solidFill>
-                <a:latin typeface="Calibri"/>
-              </a:rPr>
-              <a:t>järgi</a:t>
-            </a:r>
-            <a:r>
-              <a:rPr lang="en-GB" sz="1600" b="0" dirty="0">
-                <a:solidFill>
-                  <a:srgbClr val="334155"/>
-                </a:solidFill>
-                <a:latin typeface="Calibri"/>
-              </a:rPr>
-              <a:t>.</a:t>
-            </a:r>
-            <a:endParaRPr sz="1600" b="0" dirty="0">
-              <a:solidFill>
-                <a:srgbClr val="334155"/>
-              </a:solidFill>
-              <a:latin typeface="Calibri"/>
-            </a:endParaRPr>
-          </a:p>
-          <a:p>
-            <a:pPr>
-              <a:spcAft>
-                <a:spcPts val="400"/>
-              </a:spcAft>
-            </a:pPr>
-            <a:r>
-              <a:rPr sz="1600" b="0" dirty="0">
-                <a:solidFill>
-                  <a:srgbClr val="334155"/>
-                </a:solidFill>
-                <a:latin typeface="Calibri"/>
-              </a:rPr>
-              <a:t>3. Kuva tooted, </a:t>
-            </a:r>
-            <a:r>
-              <a:rPr sz="1600" b="0" dirty="0" err="1">
-                <a:solidFill>
-                  <a:srgbClr val="334155"/>
-                </a:solidFill>
-                <a:latin typeface="Calibri"/>
-              </a:rPr>
-              <a:t>mille</a:t>
-            </a:r>
-            <a:r>
-              <a:rPr sz="1600" b="0" dirty="0">
-                <a:solidFill>
-                  <a:srgbClr val="334155"/>
-                </a:solidFill>
-                <a:latin typeface="Calibri"/>
-              </a:rPr>
-              <a:t> hind &gt; 100 €, </a:t>
-            </a:r>
-            <a:r>
-              <a:rPr sz="1600" b="0" dirty="0" err="1">
-                <a:solidFill>
-                  <a:srgbClr val="334155"/>
-                </a:solidFill>
-                <a:latin typeface="Calibri"/>
-              </a:rPr>
-              <a:t>hinna</a:t>
-            </a:r>
-            <a:r>
-              <a:rPr sz="1600" b="0" dirty="0">
-                <a:solidFill>
-                  <a:srgbClr val="334155"/>
-                </a:solidFill>
-                <a:latin typeface="Calibri"/>
-              </a:rPr>
-              <a:t> </a:t>
-            </a:r>
-            <a:r>
-              <a:rPr sz="1600" b="0" dirty="0" err="1">
-                <a:solidFill>
-                  <a:srgbClr val="334155"/>
-                </a:solidFill>
-                <a:latin typeface="Calibri"/>
-              </a:rPr>
-              <a:t>järgi</a:t>
-            </a:r>
-            <a:r>
-              <a:rPr sz="1600" b="0" dirty="0">
-                <a:solidFill>
-                  <a:srgbClr val="334155"/>
-                </a:solidFill>
-                <a:latin typeface="Calibri"/>
-              </a:rPr>
-              <a:t> </a:t>
-            </a:r>
-            <a:r>
-              <a:rPr sz="1600" b="0" dirty="0" err="1">
-                <a:solidFill>
-                  <a:srgbClr val="334155"/>
-                </a:solidFill>
-                <a:latin typeface="Calibri"/>
-              </a:rPr>
-              <a:t>kahanevalt</a:t>
-            </a:r>
-            <a:r>
-              <a:rPr sz="1600" b="0" dirty="0">
-                <a:solidFill>
-                  <a:srgbClr val="334155"/>
-                </a:solidFill>
-                <a:latin typeface="Calibri"/>
-              </a:rPr>
-              <a:t>.</a:t>
-            </a:r>
-            <a:endParaRPr lang="en-GB" sz="1600" b="0" dirty="0">
-              <a:solidFill>
-                <a:srgbClr val="334155"/>
-              </a:solidFill>
-              <a:latin typeface="Calibri"/>
-            </a:endParaRPr>
-          </a:p>
-          <a:p>
-            <a:pPr>
-              <a:spcAft>
-                <a:spcPts val="400"/>
-              </a:spcAft>
-            </a:pPr>
-            <a:endParaRPr lang="en-GB" sz="1600" dirty="0">
-              <a:solidFill>
-                <a:srgbClr val="334155"/>
-              </a:solidFill>
-              <a:latin typeface="Calibri"/>
-            </a:endParaRPr>
-          </a:p>
-          <a:p>
-            <a:pPr marL="457200" indent="-457200">
-              <a:spcAft>
-                <a:spcPts val="400"/>
-              </a:spcAft>
-              <a:buAutoNum type="arabicPeriod"/>
-            </a:pPr>
-            <a:r>
-              <a:rPr lang="en-GB" sz="1600" b="0" dirty="0">
-                <a:solidFill>
-                  <a:srgbClr val="334155"/>
-                </a:solidFill>
-                <a:latin typeface="Calibri"/>
-              </a:rPr>
-              <a:t>Mitu </a:t>
-            </a:r>
-            <a:r>
-              <a:rPr lang="en-GB" sz="1600" b="0" dirty="0" err="1">
-                <a:solidFill>
-                  <a:srgbClr val="334155"/>
-                </a:solidFill>
-                <a:latin typeface="Calibri"/>
-              </a:rPr>
-              <a:t>klienti</a:t>
-            </a:r>
-            <a:r>
-              <a:rPr lang="en-GB" sz="1600" b="0" dirty="0">
-                <a:solidFill>
-                  <a:srgbClr val="334155"/>
-                </a:solidFill>
-                <a:latin typeface="Calibri"/>
-              </a:rPr>
-              <a:t>?</a:t>
-            </a:r>
-          </a:p>
-          <a:p>
-            <a:pPr marL="457200" indent="-457200">
-              <a:spcAft>
-                <a:spcPts val="400"/>
-              </a:spcAft>
-              <a:buAutoNum type="arabicPeriod"/>
-            </a:pPr>
-            <a:r>
-              <a:rPr lang="en-GB" sz="1600" dirty="0">
-                <a:solidFill>
-                  <a:srgbClr val="334155"/>
-                </a:solidFill>
-                <a:latin typeface="Calibri"/>
-              </a:rPr>
-              <a:t>Mitu </a:t>
-            </a:r>
-            <a:r>
-              <a:rPr lang="en-GB" sz="1600" dirty="0" err="1">
-                <a:solidFill>
-                  <a:srgbClr val="334155"/>
-                </a:solidFill>
-                <a:latin typeface="Calibri"/>
-              </a:rPr>
-              <a:t>klienti</a:t>
-            </a:r>
-            <a:r>
-              <a:rPr lang="en-GB" sz="1600" dirty="0">
-                <a:solidFill>
-                  <a:srgbClr val="334155"/>
-                </a:solidFill>
-                <a:latin typeface="Calibri"/>
-              </a:rPr>
-              <a:t> (Tallinn)?</a:t>
-            </a:r>
-          </a:p>
-          <a:p>
-            <a:pPr marL="457200" indent="-457200">
-              <a:spcAft>
-                <a:spcPts val="400"/>
-              </a:spcAft>
-              <a:buAutoNum type="arabicPeriod"/>
-            </a:pPr>
-            <a:r>
-              <a:rPr lang="en-GB" sz="1600" b="0" dirty="0">
-                <a:solidFill>
-                  <a:srgbClr val="334155"/>
-                </a:solidFill>
-                <a:latin typeface="Calibri"/>
-              </a:rPr>
-              <a:t>Mitu </a:t>
-            </a:r>
-            <a:r>
-              <a:rPr lang="en-GB" sz="1600" b="0" dirty="0" err="1">
-                <a:solidFill>
-                  <a:srgbClr val="334155"/>
-                </a:solidFill>
-                <a:latin typeface="Calibri"/>
-              </a:rPr>
-              <a:t>toodet</a:t>
-            </a:r>
-            <a:r>
-              <a:rPr lang="en-GB" sz="1600" b="0" dirty="0">
-                <a:solidFill>
-                  <a:srgbClr val="334155"/>
-                </a:solidFill>
-                <a:latin typeface="Calibri"/>
-              </a:rPr>
-              <a:t>?</a:t>
-            </a:r>
-            <a:endParaRPr sz="1600" b="0" dirty="0">
-              <a:solidFill>
-                <a:srgbClr val="334155"/>
-              </a:solidFill>
-              <a:latin typeface="Calibri"/>
-            </a:endParaRPr>
-          </a:p>
-        </p:txBody>
-      </p:sp>
-      <p:sp>
-        <p:nvSpPr>
-          <p:cNvPr id="14" name="Rounded Rectangle 13"/>
-          <p:cNvSpPr/>
-          <p:nvPr/>
-        </p:nvSpPr>
-        <p:spPr>
-          <a:xfrm>
-            <a:off x="6263640" y="1691640"/>
-            <a:ext cx="5532120" cy="4343400"/>
-          </a:xfrm>
-          <a:prstGeom prst="roundRect">
-            <a:avLst>
-              <a:gd name="adj" fmla="val 8000"/>
-            </a:avLst>
-          </a:prstGeom>
-          <a:solidFill>
-            <a:srgbClr val="FFFFFF"/>
-          </a:solidFill>
-          <a:ln>
-            <a:noFill/>
-          </a:ln>
-          <a:effectLst/>
-        </p:spPr>
-        <p:style>
-          <a:lnRef idx="1">
-            <a:schemeClr val="accent1"/>
-          </a:lnRef>
-          <a:fillRef idx="3">
-            <a:schemeClr val="accent1"/>
-          </a:fillRef>
-          <a:effectRef idx="2">
-            <a:schemeClr val="accent1"/>
-          </a:effectRef>
-          <a:fontRef idx="minor">
-            <a:schemeClr val="lt1"/>
-          </a:fontRef>
-        </p:style>
-        <p:txBody>
-          <a:bodyPr rtlCol="0" anchor="ctr"/>
-          <a:lstStyle/>
-          <a:p>
-            <a:pPr algn="ctr"/>
-            <a:endParaRPr/>
-          </a:p>
-        </p:txBody>
-      </p:sp>
-      <p:sp>
-        <p:nvSpPr>
-          <p:cNvPr id="15" name="Rectangle 14"/>
-          <p:cNvSpPr/>
-          <p:nvPr/>
-        </p:nvSpPr>
-        <p:spPr>
-          <a:xfrm>
-            <a:off x="6263640" y="1691640"/>
-            <a:ext cx="91440" cy="4343400"/>
-          </a:xfrm>
-          <a:prstGeom prst="rect">
-            <a:avLst/>
-          </a:prstGeom>
-          <a:solidFill>
-            <a:srgbClr val="B45309"/>
-          </a:solidFill>
-          <a:ln>
-            <a:noFill/>
-          </a:ln>
-          <a:effectLst/>
-        </p:spPr>
-        <p:style>
-          <a:lnRef idx="1">
-            <a:schemeClr val="accent1"/>
-          </a:lnRef>
-          <a:fillRef idx="3">
-            <a:schemeClr val="accent1"/>
-          </a:fillRef>
-          <a:effectRef idx="2">
-            <a:schemeClr val="accent1"/>
-          </a:effectRef>
-          <a:fontRef idx="minor">
-            <a:schemeClr val="lt1"/>
-          </a:fontRef>
-        </p:style>
-        <p:txBody>
-          <a:bodyPr rtlCol="0" anchor="ctr"/>
-          <a:lstStyle/>
-          <a:p>
-            <a:pPr algn="ctr"/>
-            <a:endParaRPr/>
-          </a:p>
-        </p:txBody>
-      </p:sp>
-      <p:sp>
-        <p:nvSpPr>
-          <p:cNvPr id="16" name="TextBox 15"/>
-          <p:cNvSpPr txBox="1"/>
-          <p:nvPr/>
-        </p:nvSpPr>
-        <p:spPr>
-          <a:xfrm>
-            <a:off x="6519672" y="1801368"/>
-            <a:ext cx="5166359" cy="365760"/>
-          </a:xfrm>
-          <a:prstGeom prst="rect">
-            <a:avLst/>
-          </a:prstGeom>
-          <a:noFill/>
-        </p:spPr>
-        <p:txBody>
-          <a:bodyPr wrap="square" anchor="t"/>
-          <a:lstStyle/>
-          <a:p>
-            <a:pPr algn="l"/>
-            <a:r>
-              <a:rPr sz="1600" b="1" dirty="0">
-                <a:solidFill>
-                  <a:srgbClr val="0F203E"/>
-                </a:solidFill>
-                <a:latin typeface="Calibri"/>
-              </a:rPr>
-              <a:t>Tase 2</a:t>
-            </a:r>
-          </a:p>
-        </p:txBody>
-      </p:sp>
-      <p:sp>
-        <p:nvSpPr>
-          <p:cNvPr id="17" name="TextBox 16"/>
-          <p:cNvSpPr txBox="1"/>
-          <p:nvPr/>
-        </p:nvSpPr>
-        <p:spPr>
-          <a:xfrm>
-            <a:off x="6519672" y="2167128"/>
-            <a:ext cx="5120640" cy="3749039"/>
-          </a:xfrm>
-          <a:prstGeom prst="rect">
-            <a:avLst/>
-          </a:prstGeom>
-          <a:noFill/>
-        </p:spPr>
-        <p:txBody>
-          <a:bodyPr wrap="square">
-            <a:spAutoFit/>
-          </a:bodyPr>
-          <a:lstStyle/>
-          <a:p>
-            <a:pPr>
-              <a:spcAft>
-                <a:spcPts val="400"/>
-              </a:spcAft>
-            </a:pPr>
-            <a:r>
-              <a:rPr sz="1600" b="0">
-                <a:solidFill>
-                  <a:srgbClr val="334155"/>
-                </a:solidFill>
-                <a:latin typeface="Calibri"/>
-              </a:rPr>
-              <a:t>1. Kliendid, kelle nimi algab M-iga VÕI linn on Tartu.</a:t>
-            </a:r>
-          </a:p>
-          <a:p>
-            <a:pPr>
-              <a:spcAft>
-                <a:spcPts val="400"/>
-              </a:spcAft>
-            </a:pPr>
-            <a:r>
-              <a:rPr sz="1600" b="0">
-                <a:solidFill>
-                  <a:srgbClr val="334155"/>
-                </a:solidFill>
-                <a:latin typeface="Calibri"/>
-              </a:rPr>
-              <a:t>2. Tellimused, kus makseviis on Apple Pay või Krediitkaart JA kuupäev alates 2026-03-01.</a:t>
-            </a:r>
-          </a:p>
-        </p:txBody>
-      </p:sp>
-    </p:spTree>
-  </p:cSld>
-  <p:clrMapOvr>
-    <a:masterClrMapping/>
-  </p:clrMapOvr>
-</p:sld>
-</file>
-
-<file path=ppt/slides/slide33.xml><?xml version="1.0" encoding="utf-8"?>
-<p:sld xmlns:a="http://schemas.openxmlformats.org/drawingml/2006/main" xmlns:r="http://schemas.openxmlformats.org/officeDocument/2006/relationships" xmlns:p="http://schemas.openxmlformats.org/presentationml/2006/main">
-  <p:cSld>
-    <p:spTree>
-      <p:nvGrpSpPr>
-        <p:cNvPr id="1" name=""/>
-        <p:cNvGrpSpPr/>
-        <p:nvPr/>
-      </p:nvGrpSpPr>
-      <p:grpSpPr>
-        <a:xfrm>
-          <a:off x="0" y="0"/>
-          <a:ext cx="0" cy="0"/>
-          <a:chOff x="0" y="0"/>
-          <a:chExt cx="0" cy="0"/>
-        </a:xfrm>
-      </p:grpSpPr>
-      <p:sp>
-        <p:nvSpPr>
           <p:cNvPr id="2" name="Content Placeholder 2">
             <a:extLst>
               <a:ext uri="{FF2B5EF4-FFF2-40B4-BE49-F238E27FC236}">
@@ -46501,6 +45289,1488 @@
         <p14:creationId xmlns:p14="http://schemas.microsoft.com/office/powerpoint/2010/main" val="1391787190"/>
       </p:ext>
     </p:extLst>
+  </p:cSld>
+  <p:clrMapOvr>
+    <a:masterClrMapping/>
+  </p:clrMapOvr>
+</p:sld>
+</file>
+
+<file path=ppt/slides/slide33.xml><?xml version="1.0" encoding="utf-8"?>
+<p:sld xmlns:a="http://schemas.openxmlformats.org/drawingml/2006/main" xmlns:r="http://schemas.openxmlformats.org/officeDocument/2006/relationships" xmlns:p="http://schemas.openxmlformats.org/presentationml/2006/main">
+  <p:cSld>
+    <p:spTree>
+      <p:nvGrpSpPr>
+        <p:cNvPr id="1" name=""/>
+        <p:cNvGrpSpPr/>
+        <p:nvPr/>
+      </p:nvGrpSpPr>
+      <p:grpSpPr>
+        <a:xfrm>
+          <a:off x="0" y="0"/>
+          <a:ext cx="0" cy="0"/>
+          <a:chOff x="0" y="0"/>
+          <a:chExt cx="0" cy="0"/>
+        </a:xfrm>
+      </p:grpSpPr>
+      <p:sp>
+        <p:nvSpPr>
+          <p:cNvPr id="2" name="Rectangle 1"/>
+          <p:cNvSpPr/>
+          <p:nvPr/>
+        </p:nvSpPr>
+        <p:spPr>
+          <a:xfrm>
+            <a:off x="0" y="0"/>
+            <a:ext cx="12191695" cy="6858000"/>
+          </a:xfrm>
+          <a:prstGeom prst="rect">
+            <a:avLst/>
+          </a:prstGeom>
+          <a:solidFill>
+            <a:srgbClr val="F7F9FC"/>
+          </a:solidFill>
+          <a:ln>
+            <a:noFill/>
+          </a:ln>
+          <a:effectLst/>
+        </p:spPr>
+        <p:style>
+          <a:lnRef idx="1">
+            <a:schemeClr val="accent1"/>
+          </a:lnRef>
+          <a:fillRef idx="3">
+            <a:schemeClr val="accent1"/>
+          </a:fillRef>
+          <a:effectRef idx="2">
+            <a:schemeClr val="accent1"/>
+          </a:effectRef>
+          <a:fontRef idx="minor">
+            <a:schemeClr val="lt1"/>
+          </a:fontRef>
+        </p:style>
+        <p:txBody>
+          <a:bodyPr rtlCol="0" anchor="ctr"/>
+          <a:lstStyle/>
+          <a:p>
+            <a:pPr algn="ctr"/>
+            <a:endParaRPr/>
+          </a:p>
+        </p:txBody>
+      </p:sp>
+      <p:sp>
+        <p:nvSpPr>
+          <p:cNvPr id="3" name="Rectangle 2"/>
+          <p:cNvSpPr/>
+          <p:nvPr/>
+        </p:nvSpPr>
+        <p:spPr>
+          <a:xfrm>
+            <a:off x="0" y="0"/>
+            <a:ext cx="12191695" cy="841248"/>
+          </a:xfrm>
+          <a:prstGeom prst="rect">
+            <a:avLst/>
+          </a:prstGeom>
+          <a:solidFill>
+            <a:srgbClr val="0F203E"/>
+          </a:solidFill>
+          <a:ln>
+            <a:noFill/>
+          </a:ln>
+          <a:effectLst/>
+        </p:spPr>
+        <p:style>
+          <a:lnRef idx="1">
+            <a:schemeClr val="accent1"/>
+          </a:lnRef>
+          <a:fillRef idx="3">
+            <a:schemeClr val="accent1"/>
+          </a:fillRef>
+          <a:effectRef idx="2">
+            <a:schemeClr val="accent1"/>
+          </a:effectRef>
+          <a:fontRef idx="minor">
+            <a:schemeClr val="lt1"/>
+          </a:fontRef>
+        </p:style>
+        <p:txBody>
+          <a:bodyPr rtlCol="0" anchor="ctr"/>
+          <a:lstStyle/>
+          <a:p>
+            <a:pPr algn="ctr"/>
+            <a:endParaRPr/>
+          </a:p>
+        </p:txBody>
+      </p:sp>
+      <p:sp>
+        <p:nvSpPr>
+          <p:cNvPr id="4" name="Rectangle 3"/>
+          <p:cNvSpPr/>
+          <p:nvPr/>
+        </p:nvSpPr>
+        <p:spPr>
+          <a:xfrm>
+            <a:off x="0" y="841248"/>
+            <a:ext cx="12191695" cy="73152"/>
+          </a:xfrm>
+          <a:prstGeom prst="rect">
+            <a:avLst/>
+          </a:prstGeom>
+          <a:solidFill>
+            <a:srgbClr val="007073"/>
+          </a:solidFill>
+          <a:ln>
+            <a:noFill/>
+          </a:ln>
+          <a:effectLst/>
+        </p:spPr>
+        <p:style>
+          <a:lnRef idx="1">
+            <a:schemeClr val="accent1"/>
+          </a:lnRef>
+          <a:fillRef idx="3">
+            <a:schemeClr val="accent1"/>
+          </a:fillRef>
+          <a:effectRef idx="2">
+            <a:schemeClr val="accent1"/>
+          </a:effectRef>
+          <a:fontRef idx="minor">
+            <a:schemeClr val="lt1"/>
+          </a:fontRef>
+        </p:style>
+        <p:txBody>
+          <a:bodyPr rtlCol="0" anchor="ctr"/>
+          <a:lstStyle/>
+          <a:p>
+            <a:pPr algn="ctr"/>
+            <a:endParaRPr/>
+          </a:p>
+        </p:txBody>
+      </p:sp>
+      <p:sp>
+        <p:nvSpPr>
+          <p:cNvPr id="5" name="TextBox 4"/>
+          <p:cNvSpPr txBox="1"/>
+          <p:nvPr/>
+        </p:nvSpPr>
+        <p:spPr>
+          <a:xfrm>
+            <a:off x="365760" y="164592"/>
+            <a:ext cx="11430000" cy="548640"/>
+          </a:xfrm>
+          <a:prstGeom prst="rect">
+            <a:avLst/>
+          </a:prstGeom>
+          <a:noFill/>
+        </p:spPr>
+        <p:txBody>
+          <a:bodyPr wrap="square" anchor="ctr"/>
+          <a:lstStyle/>
+          <a:p>
+            <a:pPr algn="l"/>
+            <a:r>
+              <a:rPr sz="2600" b="1" dirty="0">
+                <a:solidFill>
+                  <a:srgbClr val="FFFFFF"/>
+                </a:solidFill>
+                <a:latin typeface="Calibri"/>
+              </a:rPr>
+              <a:t>1. </a:t>
+            </a:r>
+            <a:r>
+              <a:rPr sz="2600" b="1" dirty="0" err="1">
+                <a:solidFill>
+                  <a:srgbClr val="FFFFFF"/>
+                </a:solidFill>
+                <a:latin typeface="Calibri"/>
+              </a:rPr>
+              <a:t>päev</a:t>
+            </a:r>
+            <a:r>
+              <a:rPr sz="2600" b="1" dirty="0">
+                <a:solidFill>
+                  <a:srgbClr val="FFFFFF"/>
+                </a:solidFill>
+                <a:latin typeface="Calibri"/>
+              </a:rPr>
+              <a:t>  ·  </a:t>
+            </a:r>
+            <a:r>
+              <a:rPr sz="2600" b="1" dirty="0" err="1">
+                <a:solidFill>
+                  <a:srgbClr val="FFFFFF"/>
+                </a:solidFill>
+                <a:latin typeface="Calibri"/>
+              </a:rPr>
+              <a:t>harjutused</a:t>
+            </a:r>
+            <a:r>
+              <a:rPr lang="en-GB" sz="2600" b="1" dirty="0">
+                <a:solidFill>
+                  <a:srgbClr val="FFFFFF"/>
+                </a:solidFill>
+                <a:latin typeface="Calibri"/>
+              </a:rPr>
+              <a:t> </a:t>
+            </a:r>
+            <a:r>
+              <a:rPr lang="en-GB" sz="4000" b="1" dirty="0">
+                <a:solidFill>
+                  <a:srgbClr val="FF0000"/>
+                </a:solidFill>
+                <a:latin typeface="Calibri"/>
+              </a:rPr>
+              <a:t>ISE</a:t>
+            </a:r>
+            <a:endParaRPr sz="2600" b="1" dirty="0">
+              <a:solidFill>
+                <a:srgbClr val="FF0000"/>
+              </a:solidFill>
+              <a:latin typeface="Calibri"/>
+            </a:endParaRPr>
+          </a:p>
+        </p:txBody>
+      </p:sp>
+      <p:sp>
+        <p:nvSpPr>
+          <p:cNvPr id="6" name="Rectangle 5"/>
+          <p:cNvSpPr/>
+          <p:nvPr/>
+        </p:nvSpPr>
+        <p:spPr>
+          <a:xfrm>
+            <a:off x="0" y="6601968"/>
+            <a:ext cx="12191695" cy="256032"/>
+          </a:xfrm>
+          <a:prstGeom prst="rect">
+            <a:avLst/>
+          </a:prstGeom>
+          <a:solidFill>
+            <a:srgbClr val="0F203E"/>
+          </a:solidFill>
+          <a:ln>
+            <a:noFill/>
+          </a:ln>
+          <a:effectLst/>
+        </p:spPr>
+        <p:style>
+          <a:lnRef idx="1">
+            <a:schemeClr val="accent1"/>
+          </a:lnRef>
+          <a:fillRef idx="3">
+            <a:schemeClr val="accent1"/>
+          </a:fillRef>
+          <a:effectRef idx="2">
+            <a:schemeClr val="accent1"/>
+          </a:effectRef>
+          <a:fontRef idx="minor">
+            <a:schemeClr val="lt1"/>
+          </a:fontRef>
+        </p:style>
+        <p:txBody>
+          <a:bodyPr rtlCol="0" anchor="ctr"/>
+          <a:lstStyle/>
+          <a:p>
+            <a:pPr algn="ctr"/>
+            <a:endParaRPr/>
+          </a:p>
+        </p:txBody>
+      </p:sp>
+      <p:sp>
+        <p:nvSpPr>
+          <p:cNvPr id="7" name="TextBox 6"/>
+          <p:cNvSpPr txBox="1"/>
+          <p:nvPr/>
+        </p:nvSpPr>
+        <p:spPr>
+          <a:xfrm>
+            <a:off x="365760" y="6601968"/>
+            <a:ext cx="8229600" cy="256032"/>
+          </a:xfrm>
+          <a:prstGeom prst="rect">
+            <a:avLst/>
+          </a:prstGeom>
+          <a:noFill/>
+        </p:spPr>
+        <p:txBody>
+          <a:bodyPr wrap="square" anchor="ctr"/>
+          <a:lstStyle/>
+          <a:p>
+            <a:pPr algn="l"/>
+            <a:r>
+              <a:rPr sz="1100" b="0">
+                <a:solidFill>
+                  <a:srgbClr val="94A3B8"/>
+                </a:solidFill>
+                <a:latin typeface="Calibri"/>
+              </a:rPr>
+              <a:t>SQL koolitus  ·  1. päev</a:t>
+            </a:r>
+          </a:p>
+        </p:txBody>
+      </p:sp>
+      <p:sp>
+        <p:nvSpPr>
+          <p:cNvPr id="8" name="TextBox 7"/>
+          <p:cNvSpPr txBox="1"/>
+          <p:nvPr/>
+        </p:nvSpPr>
+        <p:spPr>
+          <a:xfrm>
+            <a:off x="9601200" y="6601968"/>
+            <a:ext cx="2194560" cy="256032"/>
+          </a:xfrm>
+          <a:prstGeom prst="rect">
+            <a:avLst/>
+          </a:prstGeom>
+          <a:noFill/>
+        </p:spPr>
+        <p:txBody>
+          <a:bodyPr wrap="square" anchor="ctr"/>
+          <a:lstStyle/>
+          <a:p>
+            <a:pPr algn="r"/>
+            <a:r>
+              <a:rPr sz="1100" b="0">
+                <a:solidFill>
+                  <a:srgbClr val="94A3B8"/>
+                </a:solidFill>
+                <a:latin typeface="Calibri"/>
+              </a:rPr>
+              <a:t>17</a:t>
+            </a:r>
+          </a:p>
+        </p:txBody>
+      </p:sp>
+      <p:sp>
+        <p:nvSpPr>
+          <p:cNvPr id="10" name="Rounded Rectangle 9"/>
+          <p:cNvSpPr/>
+          <p:nvPr/>
+        </p:nvSpPr>
+        <p:spPr>
+          <a:xfrm>
+            <a:off x="365760" y="1691640"/>
+            <a:ext cx="5669280" cy="4343400"/>
+          </a:xfrm>
+          <a:prstGeom prst="roundRect">
+            <a:avLst>
+              <a:gd name="adj" fmla="val 8000"/>
+            </a:avLst>
+          </a:prstGeom>
+          <a:solidFill>
+            <a:srgbClr val="FFFFFF"/>
+          </a:solidFill>
+          <a:ln>
+            <a:noFill/>
+          </a:ln>
+          <a:effectLst/>
+        </p:spPr>
+        <p:style>
+          <a:lnRef idx="1">
+            <a:schemeClr val="accent1"/>
+          </a:lnRef>
+          <a:fillRef idx="3">
+            <a:schemeClr val="accent1"/>
+          </a:fillRef>
+          <a:effectRef idx="2">
+            <a:schemeClr val="accent1"/>
+          </a:effectRef>
+          <a:fontRef idx="minor">
+            <a:schemeClr val="lt1"/>
+          </a:fontRef>
+        </p:style>
+        <p:txBody>
+          <a:bodyPr rtlCol="0" anchor="ctr"/>
+          <a:lstStyle/>
+          <a:p>
+            <a:pPr algn="ctr"/>
+            <a:endParaRPr sz="1400"/>
+          </a:p>
+        </p:txBody>
+      </p:sp>
+      <p:sp>
+        <p:nvSpPr>
+          <p:cNvPr id="11" name="Rectangle 10"/>
+          <p:cNvSpPr/>
+          <p:nvPr/>
+        </p:nvSpPr>
+        <p:spPr>
+          <a:xfrm>
+            <a:off x="365760" y="1691640"/>
+            <a:ext cx="91440" cy="4343400"/>
+          </a:xfrm>
+          <a:prstGeom prst="rect">
+            <a:avLst/>
+          </a:prstGeom>
+          <a:solidFill>
+            <a:srgbClr val="047857"/>
+          </a:solidFill>
+          <a:ln>
+            <a:noFill/>
+          </a:ln>
+          <a:effectLst/>
+        </p:spPr>
+        <p:style>
+          <a:lnRef idx="1">
+            <a:schemeClr val="accent1"/>
+          </a:lnRef>
+          <a:fillRef idx="3">
+            <a:schemeClr val="accent1"/>
+          </a:fillRef>
+          <a:effectRef idx="2">
+            <a:schemeClr val="accent1"/>
+          </a:effectRef>
+          <a:fontRef idx="minor">
+            <a:schemeClr val="lt1"/>
+          </a:fontRef>
+        </p:style>
+        <p:txBody>
+          <a:bodyPr rtlCol="0" anchor="ctr"/>
+          <a:lstStyle/>
+          <a:p>
+            <a:pPr algn="ctr"/>
+            <a:endParaRPr/>
+          </a:p>
+        </p:txBody>
+      </p:sp>
+      <p:sp>
+        <p:nvSpPr>
+          <p:cNvPr id="12" name="TextBox 11"/>
+          <p:cNvSpPr txBox="1"/>
+          <p:nvPr/>
+        </p:nvSpPr>
+        <p:spPr>
+          <a:xfrm>
+            <a:off x="621792" y="1801368"/>
+            <a:ext cx="5303520" cy="365760"/>
+          </a:xfrm>
+          <a:prstGeom prst="rect">
+            <a:avLst/>
+          </a:prstGeom>
+          <a:noFill/>
+        </p:spPr>
+        <p:txBody>
+          <a:bodyPr wrap="square" anchor="t"/>
+          <a:lstStyle/>
+          <a:p>
+            <a:pPr algn="l"/>
+            <a:r>
+              <a:rPr b="1" dirty="0">
+                <a:solidFill>
+                  <a:srgbClr val="0F203E"/>
+                </a:solidFill>
+                <a:latin typeface="Calibri"/>
+              </a:rPr>
+              <a:t>Tase 1</a:t>
+            </a:r>
+          </a:p>
+        </p:txBody>
+      </p:sp>
+      <p:sp>
+        <p:nvSpPr>
+          <p:cNvPr id="13" name="TextBox 12"/>
+          <p:cNvSpPr txBox="1"/>
+          <p:nvPr/>
+        </p:nvSpPr>
+        <p:spPr>
+          <a:xfrm>
+            <a:off x="621792" y="2167128"/>
+            <a:ext cx="5257800" cy="2154436"/>
+          </a:xfrm>
+          <a:prstGeom prst="rect">
+            <a:avLst/>
+          </a:prstGeom>
+          <a:noFill/>
+        </p:spPr>
+        <p:txBody>
+          <a:bodyPr wrap="square">
+            <a:spAutoFit/>
+          </a:bodyPr>
+          <a:lstStyle/>
+          <a:p>
+            <a:pPr>
+              <a:spcAft>
+                <a:spcPts val="400"/>
+              </a:spcAft>
+            </a:pPr>
+            <a:r>
+              <a:rPr sz="1600" b="0" dirty="0">
+                <a:solidFill>
+                  <a:srgbClr val="334155"/>
+                </a:solidFill>
+                <a:latin typeface="Calibri"/>
+              </a:rPr>
+              <a:t>1. Kuva </a:t>
+            </a:r>
+            <a:r>
+              <a:rPr sz="1600" b="0" dirty="0" err="1">
+                <a:solidFill>
+                  <a:srgbClr val="334155"/>
+                </a:solidFill>
+                <a:latin typeface="Calibri"/>
+              </a:rPr>
+              <a:t>kõikide</a:t>
+            </a:r>
+            <a:r>
+              <a:rPr sz="1600" b="0" dirty="0">
+                <a:solidFill>
+                  <a:srgbClr val="334155"/>
+                </a:solidFill>
+                <a:latin typeface="Calibri"/>
+              </a:rPr>
+              <a:t> </a:t>
+            </a:r>
+            <a:r>
+              <a:rPr sz="1600" b="0" dirty="0" err="1">
+                <a:solidFill>
+                  <a:srgbClr val="334155"/>
+                </a:solidFill>
+                <a:latin typeface="Calibri"/>
+              </a:rPr>
+              <a:t>klientide</a:t>
+            </a:r>
+            <a:r>
+              <a:rPr sz="1600" b="0" dirty="0">
+                <a:solidFill>
+                  <a:srgbClr val="334155"/>
+                </a:solidFill>
+                <a:latin typeface="Calibri"/>
+              </a:rPr>
+              <a:t> </a:t>
+            </a:r>
+            <a:r>
+              <a:rPr sz="1600" b="0" dirty="0" err="1">
+                <a:solidFill>
+                  <a:srgbClr val="334155"/>
+                </a:solidFill>
+                <a:latin typeface="Calibri"/>
+              </a:rPr>
+              <a:t>nimed</a:t>
+            </a:r>
+            <a:r>
+              <a:rPr sz="1600" b="0" dirty="0">
+                <a:solidFill>
+                  <a:srgbClr val="334155"/>
+                </a:solidFill>
+                <a:latin typeface="Calibri"/>
+              </a:rPr>
+              <a:t> ja </a:t>
+            </a:r>
+            <a:r>
+              <a:rPr sz="1600" b="0" dirty="0" err="1">
+                <a:solidFill>
+                  <a:srgbClr val="334155"/>
+                </a:solidFill>
+                <a:latin typeface="Calibri"/>
+              </a:rPr>
+              <a:t>linnad</a:t>
+            </a:r>
+            <a:r>
+              <a:rPr sz="1600" b="0" dirty="0">
+                <a:solidFill>
+                  <a:srgbClr val="334155"/>
+                </a:solidFill>
+                <a:latin typeface="Calibri"/>
+              </a:rPr>
+              <a:t>.</a:t>
+            </a:r>
+            <a:r>
+              <a:rPr lang="en-GB" sz="1600" b="0" dirty="0">
+                <a:solidFill>
+                  <a:srgbClr val="334155"/>
+                </a:solidFill>
+                <a:latin typeface="Calibri"/>
+              </a:rPr>
+              <a:t> </a:t>
+            </a:r>
+            <a:r>
+              <a:rPr lang="en-GB" sz="1600" b="0" dirty="0" err="1">
+                <a:solidFill>
+                  <a:srgbClr val="334155"/>
+                </a:solidFill>
+                <a:latin typeface="Calibri"/>
+              </a:rPr>
+              <a:t>Sorteeri</a:t>
+            </a:r>
+            <a:r>
+              <a:rPr lang="en-GB" sz="1600" b="0" dirty="0">
+                <a:solidFill>
+                  <a:srgbClr val="334155"/>
+                </a:solidFill>
+                <a:latin typeface="Calibri"/>
+              </a:rPr>
+              <a:t> </a:t>
+            </a:r>
+            <a:r>
+              <a:rPr lang="en-GB" sz="1600" b="0" dirty="0" err="1">
+                <a:solidFill>
+                  <a:srgbClr val="334155"/>
+                </a:solidFill>
+                <a:latin typeface="Calibri"/>
+              </a:rPr>
+              <a:t>linna</a:t>
+            </a:r>
+            <a:r>
+              <a:rPr lang="en-GB" sz="1600" b="0" dirty="0">
+                <a:solidFill>
+                  <a:srgbClr val="334155"/>
+                </a:solidFill>
+                <a:latin typeface="Calibri"/>
+              </a:rPr>
+              <a:t> </a:t>
+            </a:r>
+            <a:r>
+              <a:rPr lang="en-GB" sz="1600" b="0" dirty="0" err="1">
+                <a:solidFill>
+                  <a:srgbClr val="334155"/>
+                </a:solidFill>
+                <a:latin typeface="Calibri"/>
+              </a:rPr>
+              <a:t>järgi</a:t>
+            </a:r>
+            <a:r>
+              <a:rPr lang="en-GB" sz="1600" dirty="0">
+                <a:solidFill>
+                  <a:srgbClr val="334155"/>
+                </a:solidFill>
+                <a:latin typeface="Calibri"/>
+              </a:rPr>
+              <a:t>.</a:t>
+            </a:r>
+            <a:endParaRPr sz="1600" b="0" dirty="0">
+              <a:solidFill>
+                <a:srgbClr val="334155"/>
+              </a:solidFill>
+              <a:latin typeface="Calibri"/>
+            </a:endParaRPr>
+          </a:p>
+          <a:p>
+            <a:pPr>
+              <a:spcAft>
+                <a:spcPts val="400"/>
+              </a:spcAft>
+            </a:pPr>
+            <a:r>
+              <a:rPr sz="1600" b="0" dirty="0">
+                <a:solidFill>
+                  <a:srgbClr val="334155"/>
+                </a:solidFill>
+                <a:latin typeface="Calibri"/>
+              </a:rPr>
+              <a:t>2. Leia </a:t>
+            </a:r>
+            <a:r>
+              <a:rPr sz="1600" b="0" dirty="0" err="1">
+                <a:solidFill>
+                  <a:srgbClr val="334155"/>
+                </a:solidFill>
+                <a:latin typeface="Calibri"/>
+              </a:rPr>
+              <a:t>kliendid</a:t>
+            </a:r>
+            <a:r>
+              <a:rPr sz="1600" b="0" dirty="0">
+                <a:solidFill>
+                  <a:srgbClr val="334155"/>
+                </a:solidFill>
+                <a:latin typeface="Calibri"/>
+              </a:rPr>
+              <a:t>, </a:t>
+            </a:r>
+            <a:r>
+              <a:rPr sz="1600" b="0" dirty="0" err="1">
+                <a:solidFill>
+                  <a:srgbClr val="334155"/>
+                </a:solidFill>
+                <a:latin typeface="Calibri"/>
+              </a:rPr>
+              <a:t>kelle</a:t>
+            </a:r>
+            <a:r>
+              <a:rPr sz="1600" b="0" dirty="0">
+                <a:solidFill>
+                  <a:srgbClr val="334155"/>
+                </a:solidFill>
+                <a:latin typeface="Calibri"/>
+              </a:rPr>
+              <a:t> linn on Tallinn.</a:t>
+            </a:r>
+            <a:r>
+              <a:rPr lang="en-GB" sz="1600" b="0" dirty="0">
+                <a:solidFill>
+                  <a:srgbClr val="334155"/>
+                </a:solidFill>
+                <a:latin typeface="Calibri"/>
+              </a:rPr>
+              <a:t> </a:t>
+            </a:r>
+            <a:r>
+              <a:rPr lang="en-GB" sz="1600" b="0" dirty="0" err="1">
+                <a:solidFill>
+                  <a:srgbClr val="334155"/>
+                </a:solidFill>
+                <a:latin typeface="Calibri"/>
+              </a:rPr>
+              <a:t>Sorteeri</a:t>
+            </a:r>
+            <a:r>
+              <a:rPr lang="en-GB" sz="1600" b="0" dirty="0">
+                <a:solidFill>
+                  <a:srgbClr val="334155"/>
+                </a:solidFill>
+                <a:latin typeface="Calibri"/>
+              </a:rPr>
+              <a:t> </a:t>
+            </a:r>
+            <a:r>
+              <a:rPr lang="en-GB" sz="1600" b="0" dirty="0" err="1">
+                <a:solidFill>
+                  <a:srgbClr val="334155"/>
+                </a:solidFill>
+                <a:latin typeface="Calibri"/>
+              </a:rPr>
+              <a:t>nime</a:t>
+            </a:r>
+            <a:r>
+              <a:rPr lang="en-GB" sz="1600" b="0" dirty="0">
+                <a:solidFill>
+                  <a:srgbClr val="334155"/>
+                </a:solidFill>
+                <a:latin typeface="Calibri"/>
+              </a:rPr>
+              <a:t> </a:t>
+            </a:r>
+            <a:r>
+              <a:rPr lang="en-GB" sz="1600" b="0" dirty="0" err="1">
+                <a:solidFill>
+                  <a:srgbClr val="334155"/>
+                </a:solidFill>
+                <a:latin typeface="Calibri"/>
+              </a:rPr>
+              <a:t>järgi</a:t>
+            </a:r>
+            <a:r>
+              <a:rPr lang="en-GB" sz="1600" b="0" dirty="0">
+                <a:solidFill>
+                  <a:srgbClr val="334155"/>
+                </a:solidFill>
+                <a:latin typeface="Calibri"/>
+              </a:rPr>
+              <a:t>.</a:t>
+            </a:r>
+            <a:endParaRPr sz="1600" b="0" dirty="0">
+              <a:solidFill>
+                <a:srgbClr val="334155"/>
+              </a:solidFill>
+              <a:latin typeface="Calibri"/>
+            </a:endParaRPr>
+          </a:p>
+          <a:p>
+            <a:pPr>
+              <a:spcAft>
+                <a:spcPts val="400"/>
+              </a:spcAft>
+            </a:pPr>
+            <a:r>
+              <a:rPr sz="1600" b="0" dirty="0">
+                <a:solidFill>
+                  <a:srgbClr val="334155"/>
+                </a:solidFill>
+                <a:latin typeface="Calibri"/>
+              </a:rPr>
+              <a:t>3. Kuva tooted, </a:t>
+            </a:r>
+            <a:r>
+              <a:rPr sz="1600" b="0" dirty="0" err="1">
+                <a:solidFill>
+                  <a:srgbClr val="334155"/>
+                </a:solidFill>
+                <a:latin typeface="Calibri"/>
+              </a:rPr>
+              <a:t>mille</a:t>
+            </a:r>
+            <a:r>
+              <a:rPr sz="1600" b="0" dirty="0">
+                <a:solidFill>
+                  <a:srgbClr val="334155"/>
+                </a:solidFill>
+                <a:latin typeface="Calibri"/>
+              </a:rPr>
+              <a:t> hind &gt; 100 €, </a:t>
+            </a:r>
+            <a:r>
+              <a:rPr sz="1600" b="0" dirty="0" err="1">
+                <a:solidFill>
+                  <a:srgbClr val="334155"/>
+                </a:solidFill>
+                <a:latin typeface="Calibri"/>
+              </a:rPr>
+              <a:t>hinna</a:t>
+            </a:r>
+            <a:r>
+              <a:rPr sz="1600" b="0" dirty="0">
+                <a:solidFill>
+                  <a:srgbClr val="334155"/>
+                </a:solidFill>
+                <a:latin typeface="Calibri"/>
+              </a:rPr>
+              <a:t> </a:t>
+            </a:r>
+            <a:r>
+              <a:rPr sz="1600" b="0" dirty="0" err="1">
+                <a:solidFill>
+                  <a:srgbClr val="334155"/>
+                </a:solidFill>
+                <a:latin typeface="Calibri"/>
+              </a:rPr>
+              <a:t>järgi</a:t>
+            </a:r>
+            <a:r>
+              <a:rPr sz="1600" b="0" dirty="0">
+                <a:solidFill>
+                  <a:srgbClr val="334155"/>
+                </a:solidFill>
+                <a:latin typeface="Calibri"/>
+              </a:rPr>
+              <a:t> </a:t>
+            </a:r>
+            <a:r>
+              <a:rPr sz="1600" b="0" dirty="0" err="1">
+                <a:solidFill>
+                  <a:srgbClr val="334155"/>
+                </a:solidFill>
+                <a:latin typeface="Calibri"/>
+              </a:rPr>
+              <a:t>kahanevalt</a:t>
+            </a:r>
+            <a:r>
+              <a:rPr sz="1600" b="0" dirty="0">
+                <a:solidFill>
+                  <a:srgbClr val="334155"/>
+                </a:solidFill>
+                <a:latin typeface="Calibri"/>
+              </a:rPr>
+              <a:t>.</a:t>
+            </a:r>
+            <a:endParaRPr lang="en-GB" sz="1600" b="0" dirty="0">
+              <a:solidFill>
+                <a:srgbClr val="334155"/>
+              </a:solidFill>
+              <a:latin typeface="Calibri"/>
+            </a:endParaRPr>
+          </a:p>
+          <a:p>
+            <a:pPr>
+              <a:spcAft>
+                <a:spcPts val="400"/>
+              </a:spcAft>
+            </a:pPr>
+            <a:endParaRPr lang="en-GB" sz="1600" dirty="0">
+              <a:solidFill>
+                <a:srgbClr val="334155"/>
+              </a:solidFill>
+              <a:latin typeface="Calibri"/>
+            </a:endParaRPr>
+          </a:p>
+          <a:p>
+            <a:pPr marL="457200" indent="-457200">
+              <a:spcAft>
+                <a:spcPts val="400"/>
+              </a:spcAft>
+              <a:buAutoNum type="arabicPeriod"/>
+            </a:pPr>
+            <a:r>
+              <a:rPr lang="en-GB" sz="1600" b="0" dirty="0">
+                <a:solidFill>
+                  <a:srgbClr val="334155"/>
+                </a:solidFill>
+                <a:latin typeface="Calibri"/>
+              </a:rPr>
+              <a:t>Mitu </a:t>
+            </a:r>
+            <a:r>
+              <a:rPr lang="en-GB" sz="1600" b="0" dirty="0" err="1">
+                <a:solidFill>
+                  <a:srgbClr val="334155"/>
+                </a:solidFill>
+                <a:latin typeface="Calibri"/>
+              </a:rPr>
+              <a:t>klienti</a:t>
+            </a:r>
+            <a:r>
+              <a:rPr lang="en-GB" sz="1600" b="0" dirty="0">
+                <a:solidFill>
+                  <a:srgbClr val="334155"/>
+                </a:solidFill>
+                <a:latin typeface="Calibri"/>
+              </a:rPr>
+              <a:t>?</a:t>
+            </a:r>
+          </a:p>
+          <a:p>
+            <a:pPr marL="457200" indent="-457200">
+              <a:spcAft>
+                <a:spcPts val="400"/>
+              </a:spcAft>
+              <a:buAutoNum type="arabicPeriod"/>
+            </a:pPr>
+            <a:r>
+              <a:rPr lang="en-GB" sz="1600" dirty="0">
+                <a:solidFill>
+                  <a:srgbClr val="334155"/>
+                </a:solidFill>
+                <a:latin typeface="Calibri"/>
+              </a:rPr>
+              <a:t>Mitu </a:t>
+            </a:r>
+            <a:r>
+              <a:rPr lang="en-GB" sz="1600" dirty="0" err="1">
+                <a:solidFill>
+                  <a:srgbClr val="334155"/>
+                </a:solidFill>
+                <a:latin typeface="Calibri"/>
+              </a:rPr>
+              <a:t>klienti</a:t>
+            </a:r>
+            <a:r>
+              <a:rPr lang="en-GB" sz="1600" dirty="0">
+                <a:solidFill>
+                  <a:srgbClr val="334155"/>
+                </a:solidFill>
+                <a:latin typeface="Calibri"/>
+              </a:rPr>
+              <a:t> (Tallinn)?</a:t>
+            </a:r>
+          </a:p>
+          <a:p>
+            <a:pPr marL="457200" indent="-457200">
+              <a:spcAft>
+                <a:spcPts val="400"/>
+              </a:spcAft>
+              <a:buAutoNum type="arabicPeriod"/>
+            </a:pPr>
+            <a:r>
+              <a:rPr lang="en-GB" sz="1600" b="0" dirty="0">
+                <a:solidFill>
+                  <a:srgbClr val="334155"/>
+                </a:solidFill>
+                <a:latin typeface="Calibri"/>
+              </a:rPr>
+              <a:t>Mitu </a:t>
+            </a:r>
+            <a:r>
+              <a:rPr lang="en-GB" sz="1600" b="0" dirty="0" err="1">
+                <a:solidFill>
+                  <a:srgbClr val="334155"/>
+                </a:solidFill>
+                <a:latin typeface="Calibri"/>
+              </a:rPr>
+              <a:t>toodet</a:t>
+            </a:r>
+            <a:r>
+              <a:rPr lang="en-GB" sz="1600" b="0" dirty="0">
+                <a:solidFill>
+                  <a:srgbClr val="334155"/>
+                </a:solidFill>
+                <a:latin typeface="Calibri"/>
+              </a:rPr>
+              <a:t>?</a:t>
+            </a:r>
+            <a:endParaRPr sz="1600" b="0" dirty="0">
+              <a:solidFill>
+                <a:srgbClr val="334155"/>
+              </a:solidFill>
+              <a:latin typeface="Calibri"/>
+            </a:endParaRPr>
+          </a:p>
+        </p:txBody>
+      </p:sp>
+      <p:sp>
+        <p:nvSpPr>
+          <p:cNvPr id="14" name="Rounded Rectangle 13"/>
+          <p:cNvSpPr/>
+          <p:nvPr/>
+        </p:nvSpPr>
+        <p:spPr>
+          <a:xfrm>
+            <a:off x="6263640" y="1691640"/>
+            <a:ext cx="5532120" cy="4343400"/>
+          </a:xfrm>
+          <a:prstGeom prst="roundRect">
+            <a:avLst>
+              <a:gd name="adj" fmla="val 8000"/>
+            </a:avLst>
+          </a:prstGeom>
+          <a:solidFill>
+            <a:srgbClr val="FFFFFF"/>
+          </a:solidFill>
+          <a:ln>
+            <a:noFill/>
+          </a:ln>
+          <a:effectLst/>
+        </p:spPr>
+        <p:style>
+          <a:lnRef idx="1">
+            <a:schemeClr val="accent1"/>
+          </a:lnRef>
+          <a:fillRef idx="3">
+            <a:schemeClr val="accent1"/>
+          </a:fillRef>
+          <a:effectRef idx="2">
+            <a:schemeClr val="accent1"/>
+          </a:effectRef>
+          <a:fontRef idx="minor">
+            <a:schemeClr val="lt1"/>
+          </a:fontRef>
+        </p:style>
+        <p:txBody>
+          <a:bodyPr rtlCol="0" anchor="ctr"/>
+          <a:lstStyle/>
+          <a:p>
+            <a:pPr algn="ctr"/>
+            <a:endParaRPr/>
+          </a:p>
+        </p:txBody>
+      </p:sp>
+      <p:sp>
+        <p:nvSpPr>
+          <p:cNvPr id="15" name="Rectangle 14"/>
+          <p:cNvSpPr/>
+          <p:nvPr/>
+        </p:nvSpPr>
+        <p:spPr>
+          <a:xfrm>
+            <a:off x="6263640" y="1691640"/>
+            <a:ext cx="91440" cy="4343400"/>
+          </a:xfrm>
+          <a:prstGeom prst="rect">
+            <a:avLst/>
+          </a:prstGeom>
+          <a:solidFill>
+            <a:srgbClr val="B45309"/>
+          </a:solidFill>
+          <a:ln>
+            <a:noFill/>
+          </a:ln>
+          <a:effectLst/>
+        </p:spPr>
+        <p:style>
+          <a:lnRef idx="1">
+            <a:schemeClr val="accent1"/>
+          </a:lnRef>
+          <a:fillRef idx="3">
+            <a:schemeClr val="accent1"/>
+          </a:fillRef>
+          <a:effectRef idx="2">
+            <a:schemeClr val="accent1"/>
+          </a:effectRef>
+          <a:fontRef idx="minor">
+            <a:schemeClr val="lt1"/>
+          </a:fontRef>
+        </p:style>
+        <p:txBody>
+          <a:bodyPr rtlCol="0" anchor="ctr"/>
+          <a:lstStyle/>
+          <a:p>
+            <a:pPr algn="ctr"/>
+            <a:endParaRPr/>
+          </a:p>
+        </p:txBody>
+      </p:sp>
+      <p:sp>
+        <p:nvSpPr>
+          <p:cNvPr id="16" name="TextBox 15"/>
+          <p:cNvSpPr txBox="1"/>
+          <p:nvPr/>
+        </p:nvSpPr>
+        <p:spPr>
+          <a:xfrm>
+            <a:off x="6519672" y="1801368"/>
+            <a:ext cx="5166359" cy="365760"/>
+          </a:xfrm>
+          <a:prstGeom prst="rect">
+            <a:avLst/>
+          </a:prstGeom>
+          <a:noFill/>
+        </p:spPr>
+        <p:txBody>
+          <a:bodyPr wrap="square" anchor="t"/>
+          <a:lstStyle/>
+          <a:p>
+            <a:pPr algn="l"/>
+            <a:r>
+              <a:rPr sz="1600" b="1" dirty="0">
+                <a:solidFill>
+                  <a:srgbClr val="0F203E"/>
+                </a:solidFill>
+                <a:latin typeface="Calibri"/>
+              </a:rPr>
+              <a:t>Tase 2</a:t>
+            </a:r>
+          </a:p>
+        </p:txBody>
+      </p:sp>
+      <p:sp>
+        <p:nvSpPr>
+          <p:cNvPr id="17" name="TextBox 16"/>
+          <p:cNvSpPr txBox="1"/>
+          <p:nvPr/>
+        </p:nvSpPr>
+        <p:spPr>
+          <a:xfrm>
+            <a:off x="6519672" y="2167128"/>
+            <a:ext cx="5120640" cy="3749039"/>
+          </a:xfrm>
+          <a:prstGeom prst="rect">
+            <a:avLst/>
+          </a:prstGeom>
+          <a:noFill/>
+        </p:spPr>
+        <p:txBody>
+          <a:bodyPr wrap="square">
+            <a:spAutoFit/>
+          </a:bodyPr>
+          <a:lstStyle/>
+          <a:p>
+            <a:pPr>
+              <a:spcAft>
+                <a:spcPts val="400"/>
+              </a:spcAft>
+            </a:pPr>
+            <a:r>
+              <a:rPr sz="1600" b="0" dirty="0">
+                <a:solidFill>
+                  <a:srgbClr val="334155"/>
+                </a:solidFill>
+                <a:latin typeface="Calibri"/>
+              </a:rPr>
+              <a:t>1. </a:t>
+            </a:r>
+            <a:r>
+              <a:rPr sz="1600" b="0" dirty="0" err="1">
+                <a:solidFill>
+                  <a:srgbClr val="334155"/>
+                </a:solidFill>
+                <a:latin typeface="Calibri"/>
+              </a:rPr>
+              <a:t>Kliendid</a:t>
+            </a:r>
+            <a:r>
+              <a:rPr sz="1600" b="0" dirty="0">
+                <a:solidFill>
+                  <a:srgbClr val="334155"/>
+                </a:solidFill>
+                <a:latin typeface="Calibri"/>
+              </a:rPr>
+              <a:t>, </a:t>
+            </a:r>
+            <a:r>
+              <a:rPr sz="1600" b="0" dirty="0" err="1">
+                <a:solidFill>
+                  <a:srgbClr val="334155"/>
+                </a:solidFill>
+                <a:latin typeface="Calibri"/>
+              </a:rPr>
+              <a:t>kelle</a:t>
+            </a:r>
+            <a:r>
+              <a:rPr sz="1600" b="0" dirty="0">
+                <a:solidFill>
+                  <a:srgbClr val="334155"/>
+                </a:solidFill>
+                <a:latin typeface="Calibri"/>
+              </a:rPr>
+              <a:t> </a:t>
+            </a:r>
+            <a:r>
+              <a:rPr sz="1600" b="0" dirty="0" err="1">
+                <a:solidFill>
+                  <a:srgbClr val="334155"/>
+                </a:solidFill>
+                <a:latin typeface="Calibri"/>
+              </a:rPr>
+              <a:t>nimi</a:t>
+            </a:r>
+            <a:r>
+              <a:rPr sz="1600" b="0" dirty="0">
+                <a:solidFill>
+                  <a:srgbClr val="334155"/>
+                </a:solidFill>
+                <a:latin typeface="Calibri"/>
+              </a:rPr>
+              <a:t> </a:t>
+            </a:r>
+            <a:r>
+              <a:rPr sz="1600" b="0" dirty="0" err="1">
+                <a:solidFill>
+                  <a:srgbClr val="334155"/>
+                </a:solidFill>
+                <a:latin typeface="Calibri"/>
+              </a:rPr>
+              <a:t>algab</a:t>
+            </a:r>
+            <a:r>
+              <a:rPr sz="1600" b="0" dirty="0">
+                <a:solidFill>
+                  <a:srgbClr val="334155"/>
+                </a:solidFill>
+                <a:latin typeface="Calibri"/>
+              </a:rPr>
+              <a:t> M-</a:t>
+            </a:r>
+            <a:r>
+              <a:rPr sz="1600" b="0" dirty="0" err="1">
+                <a:solidFill>
+                  <a:srgbClr val="334155"/>
+                </a:solidFill>
+                <a:latin typeface="Calibri"/>
+              </a:rPr>
+              <a:t>iga</a:t>
+            </a:r>
+            <a:r>
+              <a:rPr sz="1600" b="0" dirty="0">
+                <a:solidFill>
+                  <a:srgbClr val="334155"/>
+                </a:solidFill>
+                <a:latin typeface="Calibri"/>
+              </a:rPr>
+              <a:t> VÕI linn on Tartu.</a:t>
+            </a:r>
+          </a:p>
+          <a:p>
+            <a:pPr>
+              <a:spcAft>
+                <a:spcPts val="400"/>
+              </a:spcAft>
+            </a:pPr>
+            <a:r>
+              <a:rPr sz="1600" b="0" dirty="0">
+                <a:solidFill>
+                  <a:srgbClr val="334155"/>
+                </a:solidFill>
+                <a:latin typeface="Calibri"/>
+              </a:rPr>
+              <a:t>2. </a:t>
+            </a:r>
+            <a:r>
+              <a:rPr sz="1600" b="0" dirty="0" err="1">
+                <a:solidFill>
+                  <a:srgbClr val="334155"/>
+                </a:solidFill>
+                <a:latin typeface="Calibri"/>
+              </a:rPr>
+              <a:t>Tellimused</a:t>
+            </a:r>
+            <a:r>
+              <a:rPr sz="1600" b="0" dirty="0">
+                <a:solidFill>
+                  <a:srgbClr val="334155"/>
+                </a:solidFill>
+                <a:latin typeface="Calibri"/>
+              </a:rPr>
+              <a:t>, </a:t>
+            </a:r>
+            <a:r>
+              <a:rPr sz="1600" b="0" dirty="0" err="1">
+                <a:solidFill>
+                  <a:srgbClr val="334155"/>
+                </a:solidFill>
+                <a:latin typeface="Calibri"/>
+              </a:rPr>
+              <a:t>kus</a:t>
+            </a:r>
+            <a:r>
+              <a:rPr sz="1600" b="0" dirty="0">
+                <a:solidFill>
+                  <a:srgbClr val="334155"/>
+                </a:solidFill>
+                <a:latin typeface="Calibri"/>
+              </a:rPr>
+              <a:t> </a:t>
+            </a:r>
+            <a:r>
+              <a:rPr sz="1600" b="0" dirty="0" err="1">
+                <a:solidFill>
+                  <a:srgbClr val="334155"/>
+                </a:solidFill>
+                <a:latin typeface="Calibri"/>
+              </a:rPr>
+              <a:t>makseviis</a:t>
+            </a:r>
+            <a:r>
+              <a:rPr sz="1600" b="0" dirty="0">
+                <a:solidFill>
+                  <a:srgbClr val="334155"/>
+                </a:solidFill>
+                <a:latin typeface="Calibri"/>
+              </a:rPr>
+              <a:t> on Apple Pay </a:t>
+            </a:r>
+            <a:r>
+              <a:rPr sz="1600" b="0" dirty="0" err="1">
+                <a:solidFill>
+                  <a:srgbClr val="334155"/>
+                </a:solidFill>
+                <a:latin typeface="Calibri"/>
+              </a:rPr>
+              <a:t>või</a:t>
+            </a:r>
+            <a:r>
+              <a:rPr sz="1600" b="0" dirty="0">
+                <a:solidFill>
+                  <a:srgbClr val="334155"/>
+                </a:solidFill>
+                <a:latin typeface="Calibri"/>
+              </a:rPr>
+              <a:t> </a:t>
+            </a:r>
+            <a:r>
+              <a:rPr sz="1600" b="0" dirty="0" err="1">
+                <a:solidFill>
+                  <a:srgbClr val="334155"/>
+                </a:solidFill>
+                <a:latin typeface="Calibri"/>
+              </a:rPr>
+              <a:t>Krediitkaart</a:t>
+            </a:r>
+            <a:r>
+              <a:rPr sz="1600" b="0" dirty="0">
+                <a:solidFill>
+                  <a:srgbClr val="334155"/>
+                </a:solidFill>
+                <a:latin typeface="Calibri"/>
+              </a:rPr>
+              <a:t> JA </a:t>
+            </a:r>
+            <a:r>
+              <a:rPr sz="1600" b="0" dirty="0" err="1">
+                <a:solidFill>
+                  <a:srgbClr val="334155"/>
+                </a:solidFill>
+                <a:latin typeface="Calibri"/>
+              </a:rPr>
+              <a:t>kuupäev</a:t>
+            </a:r>
+            <a:r>
+              <a:rPr sz="1600" b="0" dirty="0">
+                <a:solidFill>
+                  <a:srgbClr val="334155"/>
+                </a:solidFill>
+                <a:latin typeface="Calibri"/>
+              </a:rPr>
+              <a:t> alates 2026-03-01.</a:t>
+            </a:r>
+          </a:p>
+        </p:txBody>
+      </p:sp>
+      <p:sp>
+        <p:nvSpPr>
+          <p:cNvPr id="19" name="TextBox 18">
+            <a:extLst>
+              <a:ext uri="{FF2B5EF4-FFF2-40B4-BE49-F238E27FC236}">
+                <a16:creationId xmlns:a16="http://schemas.microsoft.com/office/drawing/2014/main" id="{CB19DA89-AC10-EA19-846D-E3B3F40FED28}"/>
+              </a:ext>
+            </a:extLst>
+          </p:cNvPr>
+          <p:cNvSpPr txBox="1"/>
+          <p:nvPr/>
+        </p:nvSpPr>
+        <p:spPr>
+          <a:xfrm>
+            <a:off x="4852797" y="1060591"/>
+            <a:ext cx="5120640" cy="400110"/>
+          </a:xfrm>
+          <a:prstGeom prst="rect">
+            <a:avLst/>
+          </a:prstGeom>
+          <a:noFill/>
+        </p:spPr>
+        <p:txBody>
+          <a:bodyPr wrap="square">
+            <a:spAutoFit/>
+          </a:bodyPr>
+          <a:lstStyle/>
+          <a:p>
+            <a:pPr>
+              <a:spcAft>
+                <a:spcPts val="400"/>
+              </a:spcAft>
+            </a:pPr>
+            <a:r>
+              <a:rPr lang="en-GB" sz="2000" b="0" dirty="0" err="1">
+                <a:solidFill>
+                  <a:srgbClr val="334155"/>
+                </a:solidFill>
+                <a:latin typeface="Calibri"/>
+              </a:rPr>
+              <a:t>Trepi</a:t>
+            </a:r>
+            <a:r>
+              <a:rPr lang="en-GB" sz="2000" b="0" dirty="0">
+                <a:solidFill>
+                  <a:srgbClr val="334155"/>
+                </a:solidFill>
+                <a:latin typeface="Calibri"/>
+              </a:rPr>
+              <a:t> </a:t>
+            </a:r>
+            <a:r>
+              <a:rPr lang="en-GB" sz="2000" b="0" dirty="0" err="1">
+                <a:solidFill>
+                  <a:srgbClr val="334155"/>
+                </a:solidFill>
+                <a:latin typeface="Calibri"/>
+              </a:rPr>
+              <a:t>ja</a:t>
+            </a:r>
+            <a:r>
+              <a:rPr lang="en-GB" sz="2000" b="0" dirty="0">
+                <a:solidFill>
+                  <a:srgbClr val="334155"/>
+                </a:solidFill>
+                <a:latin typeface="Calibri"/>
+              </a:rPr>
+              <a:t> </a:t>
+            </a:r>
+            <a:r>
+              <a:rPr lang="en-GB" sz="2000" b="0" dirty="0" err="1">
+                <a:solidFill>
+                  <a:srgbClr val="334155"/>
+                </a:solidFill>
+                <a:latin typeface="Calibri"/>
+              </a:rPr>
+              <a:t>kommenteeri</a:t>
+            </a:r>
+            <a:r>
+              <a:rPr lang="en-GB" sz="2000" b="0" dirty="0">
+                <a:solidFill>
+                  <a:srgbClr val="334155"/>
+                </a:solidFill>
+                <a:latin typeface="Calibri"/>
+              </a:rPr>
+              <a:t> </a:t>
+            </a:r>
+            <a:r>
+              <a:rPr lang="en-GB" sz="2000" b="0" dirty="0" err="1">
+                <a:solidFill>
+                  <a:srgbClr val="334155"/>
+                </a:solidFill>
+                <a:latin typeface="Calibri"/>
+              </a:rPr>
+              <a:t>kood</a:t>
+            </a:r>
+            <a:endParaRPr sz="2000" b="0" dirty="0">
+              <a:solidFill>
+                <a:srgbClr val="334155"/>
+              </a:solidFill>
+              <a:latin typeface="Calibri"/>
+            </a:endParaRPr>
+          </a:p>
+        </p:txBody>
+      </p:sp>
+    </p:spTree>
   </p:cSld>
   <p:clrMapOvr>
     <a:masterClrMapping/>
@@ -52190,12 +52460,21 @@
 </file>
 
 <file path=customXml/item1.xml><?xml version="1.0" encoding="utf-8"?>
+<?mso-contentType ?>
+<FormTemplates xmlns="http://schemas.microsoft.com/sharepoint/v3/contenttype/forms">
+  <Display>DocumentLibraryForm</Display>
+  <Edit>DocumentLibraryForm</Edit>
+  <New>DocumentLibraryForm</New>
+</FormTemplates>
+</file>
+
+<file path=customXml/item2.xml><?xml version="1.0" encoding="utf-8"?>
 <p:properties xmlns:p="http://schemas.microsoft.com/office/2006/metadata/properties" xmlns:xsi="http://www.w3.org/2001/XMLSchema-instance" xmlns:pc="http://schemas.microsoft.com/office/infopath/2007/PartnerControls">
   <documentManagement/>
 </p:properties>
 </file>
 
-<file path=customXml/item2.xml><?xml version="1.0" encoding="utf-8"?>
+<file path=customXml/item3.xml><?xml version="1.0" encoding="utf-8"?>
 <ct:contentTypeSchema xmlns:ct="http://schemas.microsoft.com/office/2006/metadata/contentType" xmlns:ma="http://schemas.microsoft.com/office/2006/metadata/properties/metaAttributes" ct:_="" ma:_="" ma:contentTypeName="Document" ma:contentTypeID="0x010100C4D27B8FA8976546BCD79313C588588D" ma:contentTypeVersion="8" ma:contentTypeDescription="Create a new document." ma:contentTypeScope="" ma:versionID="a112c56f6fe148a79025c76584832af0">
   <xsd:schema xmlns:xsd="http://www.w3.org/2001/XMLSchema" xmlns:xs="http://www.w3.org/2001/XMLSchema" xmlns:p="http://schemas.microsoft.com/office/2006/metadata/properties" xmlns:ns2="a1a2d923-8fea-42f1-bd41-9cdfff65694e" targetNamespace="http://schemas.microsoft.com/office/2006/metadata/properties" ma:root="true" ma:fieldsID="97c8655d467eaa9470a714421e7268c0" ns2:_="">
     <xsd:import namespace="a1a2d923-8fea-42f1-bd41-9cdfff65694e"/>
@@ -52363,16 +52642,15 @@
 </ct:contentTypeSchema>
 </file>
 
-<file path=customXml/item3.xml><?xml version="1.0" encoding="utf-8"?>
-<?mso-contentType ?>
-<FormTemplates xmlns="http://schemas.microsoft.com/sharepoint/v3/contenttype/forms">
-  <Display>DocumentLibraryForm</Display>
-  <Edit>DocumentLibraryForm</Edit>
-  <New>DocumentLibraryForm</New>
-</FormTemplates>
+<file path=customXml/itemProps1.xml><?xml version="1.0" encoding="utf-8"?>
+<ds:datastoreItem xmlns:ds="http://schemas.openxmlformats.org/officeDocument/2006/customXml" ds:itemID="{9DC439CA-6F1C-4005-ACA6-A52E04DEE0A7}">
+  <ds:schemaRefs>
+    <ds:schemaRef ds:uri="http://schemas.microsoft.com/sharepoint/v3/contenttype/forms"/>
+  </ds:schemaRefs>
+</ds:datastoreItem>
 </file>
 
-<file path=customXml/itemProps1.xml><?xml version="1.0" encoding="utf-8"?>
+<file path=customXml/itemProps2.xml><?xml version="1.0" encoding="utf-8"?>
 <ds:datastoreItem xmlns:ds="http://schemas.openxmlformats.org/officeDocument/2006/customXml" ds:itemID="{5BDF4908-A52A-47DD-A794-6E02D71942FC}">
   <ds:schemaRefs>
     <ds:schemaRef ds:uri="http://schemas.microsoft.com/office/2006/metadata/properties"/>
@@ -52381,7 +52659,7 @@
 </ds:datastoreItem>
 </file>
 
-<file path=customXml/itemProps2.xml><?xml version="1.0" encoding="utf-8"?>
+<file path=customXml/itemProps3.xml><?xml version="1.0" encoding="utf-8"?>
 <ds:datastoreItem xmlns:ds="http://schemas.openxmlformats.org/officeDocument/2006/customXml" ds:itemID="{9CF4F972-2392-44D0-AA45-41AC4FDC4A59}">
   <ds:schemaRefs>
     <ds:schemaRef ds:uri="a1a2d923-8fea-42f1-bd41-9cdfff65694e"/>
@@ -52399,14 +52677,6 @@
 </ds:datastoreItem>
 </file>
 
-<file path=customXml/itemProps3.xml><?xml version="1.0" encoding="utf-8"?>
-<ds:datastoreItem xmlns:ds="http://schemas.openxmlformats.org/officeDocument/2006/customXml" ds:itemID="{9DC439CA-6F1C-4005-ACA6-A52E04DEE0A7}">
-  <ds:schemaRefs>
-    <ds:schemaRef ds:uri="http://schemas.microsoft.com/sharepoint/v3/contenttype/forms"/>
-  </ds:schemaRefs>
-</ds:datastoreItem>
-</file>
-
 <file path=docMetadata/LabelInfo.xml><?xml version="1.0" encoding="utf-8"?>
 <clbl:labelList xmlns:clbl="http://schemas.microsoft.com/office/2020/mipLabelMetadata">
   <clbl:label id="{4fc69ca6-ce6b-4059-8ad9-2049c3c135b3}" enabled="0" method="" siteId="{4fc69ca6-ce6b-4059-8ad9-2049c3c135b3}" removed="1"/>

--- a/Materjalid/Day6 SQL/6-paev-andmetarkus-esitlus.pptx
+++ b/Materjalid/Day6 SQL/6-paev-andmetarkus-esitlus.pptx
@@ -28,9 +28,9 @@
     <p:sldId id="547" r:id="rId19"/>
     <p:sldId id="559" r:id="rId20"/>
     <p:sldId id="560" r:id="rId21"/>
-    <p:sldId id="562" r:id="rId22"/>
-    <p:sldId id="563" r:id="rId23"/>
-    <p:sldId id="260" r:id="rId24"/>
+    <p:sldId id="260" r:id="rId22"/>
+    <p:sldId id="562" r:id="rId23"/>
+    <p:sldId id="563" r:id="rId24"/>
     <p:sldId id="259" r:id="rId25"/>
     <p:sldId id="561" r:id="rId26"/>
     <p:sldId id="564" r:id="rId27"/>
@@ -32619,987 +32619,6 @@
       </p:grpSpPr>
       <p:sp>
         <p:nvSpPr>
-          <p:cNvPr id="19" name="TextBox 18">
-            <a:extLst>
-              <a:ext uri="{FF2B5EF4-FFF2-40B4-BE49-F238E27FC236}">
-                <a16:creationId xmlns:a16="http://schemas.microsoft.com/office/drawing/2014/main" id="{0DF1AF69-BC06-9EC1-70BB-5B8EA2CAA36D}"/>
-              </a:ext>
-            </a:extLst>
-          </p:cNvPr>
-          <p:cNvSpPr txBox="1"/>
-          <p:nvPr/>
-        </p:nvSpPr>
-        <p:spPr>
-          <a:xfrm>
-            <a:off x="118533" y="1354723"/>
-            <a:ext cx="6096000" cy="3539430"/>
-          </a:xfrm>
-          <a:prstGeom prst="rect">
-            <a:avLst/>
-          </a:prstGeom>
-          <a:noFill/>
-        </p:spPr>
-        <p:txBody>
-          <a:bodyPr wrap="square">
-            <a:spAutoFit/>
-          </a:bodyPr>
-          <a:lstStyle/>
-          <a:p>
-            <a:pPr marL="742950" lvl="1" indent="-285750">
-              <a:buFont typeface="Arial" panose="020B0604020202020204" pitchFamily="34" charset="0"/>
-              <a:buChar char="•"/>
-            </a:pPr>
-            <a:r>
-              <a:rPr lang="en-GB" sz="1600" dirty="0"/>
-              <a:t>Ava SQL editor</a:t>
-            </a:r>
-          </a:p>
-          <a:p>
-            <a:pPr marL="742950" lvl="1" indent="-285750">
-              <a:buFont typeface="Arial" panose="020B0604020202020204" pitchFamily="34" charset="0"/>
-              <a:buChar char="•"/>
-            </a:pPr>
-            <a:br>
-              <a:rPr lang="en-GB" sz="1600" dirty="0"/>
-            </a:br>
-            <a:br>
-              <a:rPr lang="en-GB" sz="1600" dirty="0"/>
-            </a:br>
-            <a:br>
-              <a:rPr lang="en-GB" sz="1600" dirty="0"/>
-            </a:br>
-            <a:br>
-              <a:rPr lang="en-GB" sz="1600" dirty="0"/>
-            </a:br>
-            <a:br>
-              <a:rPr lang="en-GB" sz="1600" dirty="0"/>
-            </a:br>
-            <a:br>
-              <a:rPr lang="en-GB" sz="1600" dirty="0"/>
-            </a:br>
-            <a:br>
-              <a:rPr lang="en-GB" sz="1600" dirty="0"/>
-            </a:br>
-            <a:br>
-              <a:rPr lang="en-GB" sz="1600" dirty="0"/>
-            </a:br>
-            <a:br>
-              <a:rPr lang="en-GB" sz="1600" dirty="0"/>
-            </a:br>
-            <a:endParaRPr lang="en-GB" sz="1600" dirty="0"/>
-          </a:p>
-          <a:p>
-            <a:pPr marL="742950" lvl="1" indent="-285750">
-              <a:buFont typeface="Arial" panose="020B0604020202020204" pitchFamily="34" charset="0"/>
-              <a:buChar char="•"/>
-            </a:pPr>
-            <a:r>
-              <a:rPr lang="en-GB" sz="1600" dirty="0" err="1"/>
-              <a:t>Kirjuta</a:t>
-            </a:r>
-            <a:r>
-              <a:rPr lang="en-GB" sz="1600" dirty="0"/>
-              <a:t> SQL </a:t>
-            </a:r>
-            <a:r>
-              <a:rPr lang="en-GB" sz="1600" dirty="0" err="1"/>
-              <a:t>kood</a:t>
-            </a:r>
-            <a:endParaRPr lang="en-GB" sz="1600" dirty="0"/>
-          </a:p>
-          <a:p>
-            <a:pPr marL="742950" lvl="1" indent="-285750">
-              <a:buFont typeface="Arial" panose="020B0604020202020204" pitchFamily="34" charset="0"/>
-              <a:buChar char="•"/>
-            </a:pPr>
-            <a:r>
-              <a:rPr lang="en-GB" sz="1600" dirty="0" err="1"/>
-              <a:t>Selekteeri</a:t>
-            </a:r>
-            <a:r>
-              <a:rPr lang="en-GB" sz="1600" dirty="0"/>
-              <a:t> SQL</a:t>
-            </a:r>
-          </a:p>
-          <a:p>
-            <a:pPr marL="742950" lvl="1" indent="-285750">
-              <a:buFont typeface="Arial" panose="020B0604020202020204" pitchFamily="34" charset="0"/>
-              <a:buChar char="•"/>
-            </a:pPr>
-            <a:r>
-              <a:rPr lang="en-GB" sz="1600" dirty="0" err="1"/>
-              <a:t>Vajuta</a:t>
-            </a:r>
-            <a:r>
-              <a:rPr lang="en-GB" sz="1600" dirty="0"/>
-              <a:t> Execute SQL query</a:t>
-            </a:r>
-          </a:p>
-        </p:txBody>
-      </p:sp>
-      <p:pic>
-        <p:nvPicPr>
-          <p:cNvPr id="28" name="Picture 27">
-            <a:extLst>
-              <a:ext uri="{FF2B5EF4-FFF2-40B4-BE49-F238E27FC236}">
-                <a16:creationId xmlns:a16="http://schemas.microsoft.com/office/drawing/2014/main" id="{C0E0FC1B-7531-0A8D-C8F3-D380C7D5D083}"/>
-              </a:ext>
-            </a:extLst>
-          </p:cNvPr>
-          <p:cNvPicPr>
-            <a:picLocks noChangeAspect="1"/>
-          </p:cNvPicPr>
-          <p:nvPr/>
-        </p:nvPicPr>
-        <p:blipFill>
-          <a:blip r:embed="rId2"/>
-          <a:stretch>
-            <a:fillRect/>
-          </a:stretch>
-        </p:blipFill>
-        <p:spPr>
-          <a:xfrm>
-            <a:off x="5822615" y="93132"/>
-            <a:ext cx="4669590" cy="5706533"/>
-          </a:xfrm>
-          <a:prstGeom prst="rect">
-            <a:avLst/>
-          </a:prstGeom>
-        </p:spPr>
-      </p:pic>
-      <p:sp>
-        <p:nvSpPr>
-          <p:cNvPr id="2" name="Title 1">
-            <a:extLst>
-              <a:ext uri="{FF2B5EF4-FFF2-40B4-BE49-F238E27FC236}">
-                <a16:creationId xmlns:a16="http://schemas.microsoft.com/office/drawing/2014/main" id="{989F1F5B-2773-801D-DBF5-20EC51A0BCFE}"/>
-              </a:ext>
-            </a:extLst>
-          </p:cNvPr>
-          <p:cNvSpPr>
-            <a:spLocks noGrp="1"/>
-          </p:cNvSpPr>
-          <p:nvPr>
-            <p:ph type="ctrTitle"/>
-          </p:nvPr>
-        </p:nvSpPr>
-        <p:spPr/>
-        <p:txBody>
-          <a:bodyPr/>
-          <a:lstStyle/>
-          <a:p>
-            <a:r>
-              <a:rPr lang="en-GB" dirty="0" err="1"/>
-              <a:t>Tabelite</a:t>
-            </a:r>
-            <a:r>
-              <a:rPr lang="en-GB" dirty="0"/>
-              <a:t> </a:t>
-            </a:r>
-            <a:r>
-              <a:rPr lang="en-GB" dirty="0" err="1"/>
-              <a:t>loomine</a:t>
-            </a:r>
-            <a:r>
-              <a:rPr lang="en-GB" dirty="0"/>
-              <a:t> SQL </a:t>
-            </a:r>
-            <a:r>
-              <a:rPr lang="en-GB" dirty="0" err="1"/>
-              <a:t>abil</a:t>
-            </a:r>
-            <a:br>
-              <a:rPr lang="en-GB" dirty="0"/>
-            </a:br>
-            <a:r>
-              <a:rPr lang="en-GB" dirty="0">
-                <a:solidFill>
-                  <a:srgbClr val="FF0000"/>
-                </a:solidFill>
-              </a:rPr>
-              <a:t>NÄITAN</a:t>
-            </a:r>
-          </a:p>
-        </p:txBody>
-      </p:sp>
-      <p:pic>
-        <p:nvPicPr>
-          <p:cNvPr id="17" name="Content Placeholder 4">
-            <a:extLst>
-              <a:ext uri="{FF2B5EF4-FFF2-40B4-BE49-F238E27FC236}">
-                <a16:creationId xmlns:a16="http://schemas.microsoft.com/office/drawing/2014/main" id="{705C1C1D-AADA-4BA0-5EAD-D9A03E885761}"/>
-              </a:ext>
-            </a:extLst>
-          </p:cNvPr>
-          <p:cNvPicPr>
-            <a:picLocks noChangeAspect="1"/>
-          </p:cNvPicPr>
-          <p:nvPr/>
-        </p:nvPicPr>
-        <p:blipFill>
-          <a:blip r:embed="rId3"/>
-          <a:stretch>
-            <a:fillRect/>
-          </a:stretch>
-        </p:blipFill>
-        <p:spPr>
-          <a:xfrm>
-            <a:off x="877888" y="1647576"/>
-            <a:ext cx="4039164" cy="1781424"/>
-          </a:xfrm>
-          <a:prstGeom prst="rect">
-            <a:avLst/>
-          </a:prstGeom>
-        </p:spPr>
-      </p:pic>
-      <p:cxnSp>
-        <p:nvCxnSpPr>
-          <p:cNvPr id="21" name="Straight Arrow Connector 20">
-            <a:extLst>
-              <a:ext uri="{FF2B5EF4-FFF2-40B4-BE49-F238E27FC236}">
-                <a16:creationId xmlns:a16="http://schemas.microsoft.com/office/drawing/2014/main" id="{6464DF01-41B0-0F72-2D23-3A601D614942}"/>
-              </a:ext>
-            </a:extLst>
-          </p:cNvPr>
-          <p:cNvCxnSpPr>
-            <a:cxnSpLocks/>
-          </p:cNvCxnSpPr>
-          <p:nvPr/>
-        </p:nvCxnSpPr>
-        <p:spPr>
-          <a:xfrm flipV="1">
-            <a:off x="3403600" y="504852"/>
-            <a:ext cx="2692400" cy="4126415"/>
-          </a:xfrm>
-          <a:prstGeom prst="straightConnector1">
-            <a:avLst/>
-          </a:prstGeom>
-          <a:ln>
-            <a:tailEnd type="triangle"/>
-          </a:ln>
-        </p:spPr>
-        <p:style>
-          <a:lnRef idx="1">
-            <a:schemeClr val="accent1"/>
-          </a:lnRef>
-          <a:fillRef idx="0">
-            <a:schemeClr val="accent1"/>
-          </a:fillRef>
-          <a:effectRef idx="0">
-            <a:schemeClr val="accent1"/>
-          </a:effectRef>
-          <a:fontRef idx="minor">
-            <a:schemeClr val="tx1"/>
-          </a:fontRef>
-        </p:style>
-      </p:cxnSp>
-    </p:spTree>
-    <p:extLst>
-      <p:ext uri="{BB962C8B-B14F-4D97-AF65-F5344CB8AC3E}">
-        <p14:creationId xmlns:p14="http://schemas.microsoft.com/office/powerpoint/2010/main" val="1353473769"/>
-      </p:ext>
-    </p:extLst>
-  </p:cSld>
-  <p:clrMapOvr>
-    <a:masterClrMapping/>
-  </p:clrMapOvr>
-</p:sld>
-</file>
-
-<file path=ppt/slides/slide19.xml><?xml version="1.0" encoding="utf-8"?>
-<p:sld xmlns:a="http://schemas.openxmlformats.org/drawingml/2006/main" xmlns:r="http://schemas.openxmlformats.org/officeDocument/2006/relationships" xmlns:p="http://schemas.openxmlformats.org/presentationml/2006/main">
-  <p:cSld>
-    <p:spTree>
-      <p:nvGrpSpPr>
-        <p:cNvPr id="1" name=""/>
-        <p:cNvGrpSpPr/>
-        <p:nvPr/>
-      </p:nvGrpSpPr>
-      <p:grpSpPr>
-        <a:xfrm>
-          <a:off x="0" y="0"/>
-          <a:ext cx="0" cy="0"/>
-          <a:chOff x="0" y="0"/>
-          <a:chExt cx="0" cy="0"/>
-        </a:xfrm>
-      </p:grpSpPr>
-      <p:sp>
-        <p:nvSpPr>
-          <p:cNvPr id="2" name="Title 1">
-            <a:extLst>
-              <a:ext uri="{FF2B5EF4-FFF2-40B4-BE49-F238E27FC236}">
-                <a16:creationId xmlns:a16="http://schemas.microsoft.com/office/drawing/2014/main" id="{780A8080-41AA-B878-C289-712161E71585}"/>
-              </a:ext>
-            </a:extLst>
-          </p:cNvPr>
-          <p:cNvSpPr>
-            <a:spLocks noGrp="1"/>
-          </p:cNvSpPr>
-          <p:nvPr>
-            <p:ph type="ctrTitle"/>
-          </p:nvPr>
-        </p:nvSpPr>
-        <p:spPr/>
-        <p:txBody>
-          <a:bodyPr/>
-          <a:lstStyle/>
-          <a:p>
-            <a:r>
-              <a:rPr lang="en-GB" dirty="0"/>
-              <a:t>Tee </a:t>
-            </a:r>
-            <a:r>
-              <a:rPr lang="en-GB" dirty="0">
-                <a:solidFill>
-                  <a:srgbClr val="FF0000"/>
-                </a:solidFill>
-              </a:rPr>
-              <a:t>ISE</a:t>
-            </a:r>
-            <a:r>
-              <a:rPr lang="en-GB" dirty="0"/>
-              <a:t> </a:t>
-            </a:r>
-            <a:r>
-              <a:rPr lang="en-GB" dirty="0" err="1"/>
-              <a:t>läbi</a:t>
-            </a:r>
-            <a:r>
-              <a:rPr lang="en-GB" dirty="0"/>
-              <a:t> 4 </a:t>
-            </a:r>
-            <a:r>
-              <a:rPr lang="en-GB" dirty="0" err="1"/>
-              <a:t>tabeli</a:t>
-            </a:r>
-            <a:r>
-              <a:rPr lang="en-GB" dirty="0"/>
-              <a:t> </a:t>
-            </a:r>
-            <a:r>
-              <a:rPr lang="en-GB" dirty="0" err="1"/>
-              <a:t>loomine</a:t>
-            </a:r>
-            <a:r>
-              <a:rPr lang="en-GB" dirty="0"/>
-              <a:t> </a:t>
-            </a:r>
-            <a:r>
-              <a:rPr lang="en-GB" dirty="0" err="1"/>
-              <a:t>ja</a:t>
-            </a:r>
-            <a:r>
-              <a:rPr lang="en-GB" dirty="0"/>
-              <a:t> </a:t>
-            </a:r>
-            <a:r>
-              <a:rPr lang="en-GB" dirty="0" err="1"/>
-              <a:t>kontrolli</a:t>
-            </a:r>
-            <a:r>
-              <a:rPr lang="en-GB" dirty="0"/>
-              <a:t> </a:t>
-            </a:r>
-            <a:r>
-              <a:rPr lang="en-GB" dirty="0" err="1"/>
-              <a:t>tulemust</a:t>
-            </a:r>
-            <a:endParaRPr lang="en-GB" dirty="0"/>
-          </a:p>
-        </p:txBody>
-      </p:sp>
-      <p:pic>
-        <p:nvPicPr>
-          <p:cNvPr id="5" name="Picture 4">
-            <a:extLst>
-              <a:ext uri="{FF2B5EF4-FFF2-40B4-BE49-F238E27FC236}">
-                <a16:creationId xmlns:a16="http://schemas.microsoft.com/office/drawing/2014/main" id="{BBD085A6-8ACC-2645-246A-18FA531627B0}"/>
-              </a:ext>
-            </a:extLst>
-          </p:cNvPr>
-          <p:cNvPicPr>
-            <a:picLocks noChangeAspect="1"/>
-          </p:cNvPicPr>
-          <p:nvPr/>
-        </p:nvPicPr>
-        <p:blipFill>
-          <a:blip r:embed="rId2"/>
-          <a:stretch>
-            <a:fillRect/>
-          </a:stretch>
-        </p:blipFill>
-        <p:spPr>
-          <a:xfrm>
-            <a:off x="6096000" y="1400040"/>
-            <a:ext cx="4205895" cy="3689290"/>
-          </a:xfrm>
-          <a:prstGeom prst="rect">
-            <a:avLst/>
-          </a:prstGeom>
-        </p:spPr>
-      </p:pic>
-      <p:sp>
-        <p:nvSpPr>
-          <p:cNvPr id="7" name="Content Placeholder 6">
-            <a:extLst>
-              <a:ext uri="{FF2B5EF4-FFF2-40B4-BE49-F238E27FC236}">
-                <a16:creationId xmlns:a16="http://schemas.microsoft.com/office/drawing/2014/main" id="{581BEDD7-F60F-F2B5-76B5-DAA0EC022CCB}"/>
-              </a:ext>
-            </a:extLst>
-          </p:cNvPr>
-          <p:cNvSpPr txBox="1">
-            <a:spLocks noGrp="1"/>
-          </p:cNvSpPr>
-          <p:nvPr>
-            <p:ph sz="quarter" idx="10"/>
-          </p:nvPr>
-        </p:nvSpPr>
-        <p:spPr>
-          <a:xfrm>
-            <a:off x="6096000" y="1051069"/>
-            <a:ext cx="6149445" cy="793935"/>
-          </a:xfrm>
-          <a:prstGeom prst="rect">
-            <a:avLst/>
-          </a:prstGeom>
-          <a:noFill/>
-        </p:spPr>
-        <p:txBody>
-          <a:bodyPr wrap="square">
-            <a:spAutoFit/>
-          </a:bodyPr>
-          <a:lstStyle/>
-          <a:p>
-            <a:pPr marL="0" marR="0">
-              <a:buNone/>
-            </a:pPr>
-            <a:r>
-              <a:rPr lang="en-GB" dirty="0"/>
-              <a:t>Kas </a:t>
-            </a:r>
-            <a:r>
-              <a:rPr lang="en-GB" dirty="0" err="1"/>
-              <a:t>näed</a:t>
-            </a:r>
-            <a:r>
-              <a:rPr lang="en-GB" dirty="0"/>
-              <a:t> </a:t>
-            </a:r>
-            <a:r>
-              <a:rPr lang="en-GB" dirty="0" err="1"/>
-              <a:t>tabelit</a:t>
-            </a:r>
-            <a:r>
-              <a:rPr lang="en-GB" dirty="0"/>
-              <a:t> </a:t>
-            </a:r>
-            <a:r>
-              <a:rPr lang="en-GB" dirty="0" err="1"/>
-              <a:t>ja</a:t>
-            </a:r>
-            <a:r>
-              <a:rPr lang="en-GB" dirty="0"/>
-              <a:t> </a:t>
-            </a:r>
-            <a:r>
-              <a:rPr lang="en-GB" dirty="0" err="1"/>
-              <a:t>veerge</a:t>
-            </a:r>
-            <a:r>
-              <a:rPr lang="en-GB" dirty="0"/>
-              <a:t>?</a:t>
-            </a:r>
-          </a:p>
-          <a:p>
-            <a:pPr marL="0" marR="0">
-              <a:buNone/>
-            </a:pPr>
-            <a:endParaRPr lang="en-GB" b="1" dirty="0"/>
-          </a:p>
-          <a:p>
-            <a:pPr marL="0" marR="0">
-              <a:buNone/>
-            </a:pPr>
-            <a:endParaRPr lang="en-GB" b="1" dirty="0"/>
-          </a:p>
-        </p:txBody>
-      </p:sp>
-      <p:pic>
-        <p:nvPicPr>
-          <p:cNvPr id="9" name="Picture 8">
-            <a:extLst>
-              <a:ext uri="{FF2B5EF4-FFF2-40B4-BE49-F238E27FC236}">
-                <a16:creationId xmlns:a16="http://schemas.microsoft.com/office/drawing/2014/main" id="{EEE1C979-09F9-C97F-66A8-B7D27753CB0A}"/>
-              </a:ext>
-            </a:extLst>
-          </p:cNvPr>
-          <p:cNvPicPr>
-            <a:picLocks noChangeAspect="1"/>
-          </p:cNvPicPr>
-          <p:nvPr/>
-        </p:nvPicPr>
-        <p:blipFill>
-          <a:blip r:embed="rId3"/>
-          <a:stretch>
-            <a:fillRect/>
-          </a:stretch>
-        </p:blipFill>
-        <p:spPr>
-          <a:xfrm>
-            <a:off x="9168078" y="3083903"/>
-            <a:ext cx="3619686" cy="3111660"/>
-          </a:xfrm>
-          <a:prstGeom prst="rect">
-            <a:avLst/>
-          </a:prstGeom>
-        </p:spPr>
-      </p:pic>
-      <p:sp>
-        <p:nvSpPr>
-          <p:cNvPr id="11" name="TextBox 10">
-            <a:extLst>
-              <a:ext uri="{FF2B5EF4-FFF2-40B4-BE49-F238E27FC236}">
-                <a16:creationId xmlns:a16="http://schemas.microsoft.com/office/drawing/2014/main" id="{AE01E8B0-0D43-9341-8E62-2153E79923E1}"/>
-              </a:ext>
-            </a:extLst>
-          </p:cNvPr>
-          <p:cNvSpPr txBox="1"/>
-          <p:nvPr/>
-        </p:nvSpPr>
-        <p:spPr>
-          <a:xfrm>
-            <a:off x="313265" y="6085713"/>
-            <a:ext cx="8415867" cy="369332"/>
-          </a:xfrm>
-          <a:prstGeom prst="rect">
-            <a:avLst/>
-          </a:prstGeom>
-          <a:noFill/>
-        </p:spPr>
-        <p:txBody>
-          <a:bodyPr wrap="square">
-            <a:spAutoFit/>
-          </a:bodyPr>
-          <a:lstStyle/>
-          <a:p>
-            <a:pPr marL="0" marR="0">
-              <a:buNone/>
-            </a:pPr>
-            <a:r>
-              <a:rPr lang="en-GB" sz="1600" b="1" dirty="0"/>
-              <a:t>Kui table </a:t>
-            </a:r>
-            <a:r>
-              <a:rPr lang="en-GB" sz="1600" b="1" dirty="0" err="1"/>
-              <a:t>tekib</a:t>
-            </a:r>
-            <a:r>
-              <a:rPr lang="en-GB" sz="1600" b="1" dirty="0"/>
-              <a:t> </a:t>
-            </a:r>
-            <a:r>
-              <a:rPr lang="en-GB" sz="1600" b="1" dirty="0" err="1"/>
-              <a:t>valesti</a:t>
-            </a:r>
-            <a:r>
-              <a:rPr lang="en-GB" sz="1600" b="1" dirty="0"/>
-              <a:t>, </a:t>
-            </a:r>
-            <a:r>
-              <a:rPr lang="en-GB" sz="1600" b="1" dirty="0" err="1"/>
-              <a:t>saab</a:t>
-            </a:r>
-            <a:r>
-              <a:rPr lang="en-GB" sz="1600" b="1" dirty="0"/>
-              <a:t> </a:t>
-            </a:r>
-            <a:r>
-              <a:rPr lang="en-GB" sz="1600" b="1" dirty="0" err="1"/>
-              <a:t>selle</a:t>
-            </a:r>
-            <a:r>
-              <a:rPr lang="en-GB" sz="1600" b="1" dirty="0"/>
-              <a:t> </a:t>
-            </a:r>
-            <a:r>
-              <a:rPr lang="en-GB" sz="1600" b="1" dirty="0" err="1"/>
-              <a:t>kustutada</a:t>
-            </a:r>
-            <a:r>
-              <a:rPr lang="en-GB" sz="1600" b="1" dirty="0"/>
-              <a:t> </a:t>
-            </a:r>
-            <a:r>
-              <a:rPr lang="en-GB" sz="1600" b="1" dirty="0" err="1"/>
-              <a:t>käsuga</a:t>
-            </a:r>
-            <a:r>
-              <a:rPr lang="en-GB" sz="1600" b="1" dirty="0"/>
-              <a:t>: </a:t>
-            </a:r>
-            <a:r>
-              <a:rPr lang="en-GB" sz="1800" b="1" dirty="0">
-                <a:solidFill>
-                  <a:schemeClr val="tx1"/>
-                </a:solidFill>
-                <a:effectLst/>
-                <a:latin typeface="+mn-lt"/>
-              </a:rPr>
-              <a:t>drop</a:t>
-            </a:r>
-            <a:r>
-              <a:rPr lang="en-GB" sz="1800" dirty="0">
-                <a:solidFill>
-                  <a:schemeClr val="tx1"/>
-                </a:solidFill>
-                <a:effectLst/>
-                <a:latin typeface="+mn-lt"/>
-              </a:rPr>
-              <a:t> </a:t>
-            </a:r>
-            <a:r>
-              <a:rPr lang="en-GB" sz="1800" b="1" dirty="0">
-                <a:solidFill>
-                  <a:schemeClr val="tx1"/>
-                </a:solidFill>
-                <a:effectLst/>
-                <a:latin typeface="+mn-lt"/>
-              </a:rPr>
-              <a:t>table</a:t>
-            </a:r>
-            <a:r>
-              <a:rPr lang="en-GB" sz="1800" dirty="0">
-                <a:solidFill>
-                  <a:schemeClr val="tx1"/>
-                </a:solidFill>
-                <a:effectLst/>
-                <a:latin typeface="+mn-lt"/>
-              </a:rPr>
-              <a:t> [</a:t>
-            </a:r>
-            <a:r>
-              <a:rPr lang="en-GB" sz="1800" dirty="0" err="1">
-                <a:solidFill>
-                  <a:schemeClr val="tx1"/>
-                </a:solidFill>
-                <a:effectLst/>
-                <a:latin typeface="+mn-lt"/>
-              </a:rPr>
-              <a:t>tabeli_nimi</a:t>
-            </a:r>
-            <a:r>
-              <a:rPr lang="en-GB" sz="1800" dirty="0">
-                <a:solidFill>
-                  <a:schemeClr val="tx1"/>
-                </a:solidFill>
-                <a:effectLst/>
-                <a:latin typeface="+mn-lt"/>
-              </a:rPr>
-              <a:t>]</a:t>
-            </a:r>
-            <a:endParaRPr lang="en-GB" sz="1000" dirty="0">
-              <a:solidFill>
-                <a:srgbClr val="000000"/>
-              </a:solidFill>
-              <a:effectLst/>
-              <a:latin typeface="Consolas" panose="020B0609020204030204" pitchFamily="49" charset="0"/>
-            </a:endParaRPr>
-          </a:p>
-        </p:txBody>
-      </p:sp>
-      <p:pic>
-        <p:nvPicPr>
-          <p:cNvPr id="13" name="Picture 12">
-            <a:extLst>
-              <a:ext uri="{FF2B5EF4-FFF2-40B4-BE49-F238E27FC236}">
-                <a16:creationId xmlns:a16="http://schemas.microsoft.com/office/drawing/2014/main" id="{2433208A-2EAA-AACD-8457-DF991B5A4C2A}"/>
-              </a:ext>
-            </a:extLst>
-          </p:cNvPr>
-          <p:cNvPicPr>
-            <a:picLocks noChangeAspect="1"/>
-          </p:cNvPicPr>
-          <p:nvPr/>
-        </p:nvPicPr>
-        <p:blipFill>
-          <a:blip r:embed="rId4"/>
-          <a:stretch>
-            <a:fillRect/>
-          </a:stretch>
-        </p:blipFill>
-        <p:spPr>
-          <a:xfrm>
-            <a:off x="2116667" y="1296049"/>
-            <a:ext cx="3869885" cy="4729243"/>
-          </a:xfrm>
-          <a:prstGeom prst="rect">
-            <a:avLst/>
-          </a:prstGeom>
-        </p:spPr>
-      </p:pic>
-      <p:pic>
-        <p:nvPicPr>
-          <p:cNvPr id="15" name="Content Placeholder 4">
-            <a:extLst>
-              <a:ext uri="{FF2B5EF4-FFF2-40B4-BE49-F238E27FC236}">
-                <a16:creationId xmlns:a16="http://schemas.microsoft.com/office/drawing/2014/main" id="{AC87158D-01BD-FAB5-3B5E-662487ECC55B}"/>
-              </a:ext>
-            </a:extLst>
-          </p:cNvPr>
-          <p:cNvPicPr>
-            <a:picLocks noChangeAspect="1"/>
-          </p:cNvPicPr>
-          <p:nvPr/>
-        </p:nvPicPr>
-        <p:blipFill>
-          <a:blip r:embed="rId5"/>
-          <a:srcRect r="30643"/>
-          <a:stretch>
-            <a:fillRect/>
-          </a:stretch>
-        </p:blipFill>
-        <p:spPr>
-          <a:xfrm>
-            <a:off x="74174" y="1400040"/>
-            <a:ext cx="2042493" cy="1298824"/>
-          </a:xfrm>
-          <a:prstGeom prst="rect">
-            <a:avLst/>
-          </a:prstGeom>
-        </p:spPr>
-      </p:pic>
-    </p:spTree>
-    <p:extLst>
-      <p:ext uri="{BB962C8B-B14F-4D97-AF65-F5344CB8AC3E}">
-        <p14:creationId xmlns:p14="http://schemas.microsoft.com/office/powerpoint/2010/main" val="2811429562"/>
-      </p:ext>
-    </p:extLst>
-  </p:cSld>
-  <p:clrMapOvr>
-    <a:masterClrMapping/>
-  </p:clrMapOvr>
-</p:sld>
-</file>
-
-<file path=ppt/slides/slide2.xml><?xml version="1.0" encoding="utf-8"?>
-<p:sld xmlns:a="http://schemas.openxmlformats.org/drawingml/2006/main" xmlns:r="http://schemas.openxmlformats.org/officeDocument/2006/relationships" xmlns:p="http://schemas.openxmlformats.org/presentationml/2006/main">
-  <p:cSld>
-    <p:spTree>
-      <p:nvGrpSpPr>
-        <p:cNvPr id="1" name=""/>
-        <p:cNvGrpSpPr/>
-        <p:nvPr/>
-      </p:nvGrpSpPr>
-      <p:grpSpPr>
-        <a:xfrm>
-          <a:off x="0" y="0"/>
-          <a:ext cx="0" cy="0"/>
-          <a:chOff x="0" y="0"/>
-          <a:chExt cx="0" cy="0"/>
-        </a:xfrm>
-      </p:grpSpPr>
-      <p:sp>
-        <p:nvSpPr>
-          <p:cNvPr id="2" name="Title 1">
-            <a:extLst>
-              <a:ext uri="{FF2B5EF4-FFF2-40B4-BE49-F238E27FC236}">
-                <a16:creationId xmlns:a16="http://schemas.microsoft.com/office/drawing/2014/main" id="{29608667-DE06-3788-24A4-71A38A1D6F27}"/>
-              </a:ext>
-            </a:extLst>
-          </p:cNvPr>
-          <p:cNvSpPr>
-            <a:spLocks noGrp="1"/>
-          </p:cNvSpPr>
-          <p:nvPr>
-            <p:ph type="ctrTitle"/>
-          </p:nvPr>
-        </p:nvSpPr>
-        <p:spPr/>
-        <p:txBody>
-          <a:bodyPr/>
-          <a:lstStyle/>
-          <a:p>
-            <a:r>
-              <a:rPr lang="en-GB" dirty="0" err="1"/>
-              <a:t>Tagasiside</a:t>
-            </a:r>
-            <a:endParaRPr lang="en-GB" dirty="0"/>
-          </a:p>
-        </p:txBody>
-      </p:sp>
-      <p:sp>
-        <p:nvSpPr>
-          <p:cNvPr id="3" name="Content Placeholder 2">
-            <a:extLst>
-              <a:ext uri="{FF2B5EF4-FFF2-40B4-BE49-F238E27FC236}">
-                <a16:creationId xmlns:a16="http://schemas.microsoft.com/office/drawing/2014/main" id="{EC99E317-BA8D-D33B-059A-2EDFC9C83BCA}"/>
-              </a:ext>
-            </a:extLst>
-          </p:cNvPr>
-          <p:cNvSpPr>
-            <a:spLocks noGrp="1"/>
-          </p:cNvSpPr>
-          <p:nvPr>
-            <p:ph sz="quarter" idx="10"/>
-          </p:nvPr>
-        </p:nvSpPr>
-        <p:spPr>
-          <a:xfrm>
-            <a:off x="557213" y="5219701"/>
-            <a:ext cx="10941050" cy="838200"/>
-          </a:xfrm>
-        </p:spPr>
-        <p:txBody>
-          <a:bodyPr/>
-          <a:lstStyle/>
-          <a:p>
-            <a:r>
-              <a:rPr lang="en-GB" dirty="0">
-                <a:hlinkClick r:id="rId2"/>
-              </a:rPr>
-              <a:t>https://www.linkedin.com/jobs/view/4462316073/</a:t>
-            </a:r>
-            <a:endParaRPr lang="en-GB" dirty="0"/>
-          </a:p>
-          <a:p>
-            <a:r>
-              <a:rPr lang="en-GB" dirty="0">
-                <a:hlinkClick r:id="rId3"/>
-              </a:rPr>
-              <a:t>https://www.linkedin.com/jobs/view/4463667405/</a:t>
-            </a:r>
-            <a:endParaRPr lang="en-GB" dirty="0"/>
-          </a:p>
-          <a:p>
-            <a:endParaRPr lang="en-GB" dirty="0"/>
-          </a:p>
-        </p:txBody>
-      </p:sp>
-      <p:sp>
-        <p:nvSpPr>
-          <p:cNvPr id="4" name="Title 1">
-            <a:extLst>
-              <a:ext uri="{FF2B5EF4-FFF2-40B4-BE49-F238E27FC236}">
-                <a16:creationId xmlns:a16="http://schemas.microsoft.com/office/drawing/2014/main" id="{496C45BC-CE1D-0477-B969-3E9F7AAB21B7}"/>
-              </a:ext>
-            </a:extLst>
-          </p:cNvPr>
-          <p:cNvSpPr txBox="1">
-            <a:spLocks/>
-          </p:cNvSpPr>
-          <p:nvPr/>
-        </p:nvSpPr>
-        <p:spPr>
-          <a:xfrm>
-            <a:off x="557213" y="4312299"/>
-            <a:ext cx="10044112" cy="357043"/>
-          </a:xfrm>
-          <a:prstGeom prst="rect">
-            <a:avLst/>
-          </a:prstGeom>
-        </p:spPr>
-        <p:txBody>
-          <a:bodyPr vert="horz" lIns="0" tIns="0" rIns="0" bIns="0" rtlCol="0" anchor="t" anchorCtr="0">
-            <a:noAutofit/>
-          </a:bodyPr>
-          <a:lstStyle>
-            <a:lvl1pPr algn="l" defTabSz="914400" rtl="0" eaLnBrk="1" latinLnBrk="0" hangingPunct="1">
-              <a:lnSpc>
-                <a:spcPct val="90000"/>
-              </a:lnSpc>
-              <a:spcBef>
-                <a:spcPct val="0"/>
-              </a:spcBef>
-              <a:buNone/>
-              <a:defRPr sz="3200" b="0" i="0" kern="1200" spc="0">
-                <a:solidFill>
-                  <a:schemeClr val="tx1"/>
-                </a:solidFill>
-                <a:latin typeface="+mj-lt"/>
-                <a:ea typeface="Inter Semi Bold" panose="02000503000000020004" pitchFamily="2" charset="0"/>
-                <a:cs typeface="Inter Semi Bold" panose="02000503000000020004" pitchFamily="2" charset="0"/>
-              </a:defRPr>
-            </a:lvl1pPr>
-          </a:lstStyle>
-          <a:p>
-            <a:r>
-              <a:rPr lang="en-GB" dirty="0" err="1"/>
-              <a:t>Huvitav</a:t>
-            </a:r>
-            <a:r>
-              <a:rPr lang="en-GB" dirty="0"/>
-              <a:t> </a:t>
-            </a:r>
-            <a:r>
-              <a:rPr lang="en-GB" dirty="0" err="1"/>
-              <a:t>töökuulutus</a:t>
-            </a:r>
-            <a:endParaRPr lang="en-GB" dirty="0"/>
-          </a:p>
-        </p:txBody>
-      </p:sp>
-      <p:pic>
-        <p:nvPicPr>
-          <p:cNvPr id="6" name="Picture 5">
-            <a:extLst>
-              <a:ext uri="{FF2B5EF4-FFF2-40B4-BE49-F238E27FC236}">
-                <a16:creationId xmlns:a16="http://schemas.microsoft.com/office/drawing/2014/main" id="{4DEC8323-CA84-5B85-C070-E2C31CDC0725}"/>
-              </a:ext>
-            </a:extLst>
-          </p:cNvPr>
-          <p:cNvPicPr>
-            <a:picLocks noChangeAspect="1"/>
-          </p:cNvPicPr>
-          <p:nvPr/>
-        </p:nvPicPr>
-        <p:blipFill>
-          <a:blip r:embed="rId4"/>
-          <a:stretch>
-            <a:fillRect/>
-          </a:stretch>
-        </p:blipFill>
-        <p:spPr>
-          <a:xfrm>
-            <a:off x="3990975" y="223870"/>
-            <a:ext cx="7941404" cy="3759672"/>
-          </a:xfrm>
-          <a:prstGeom prst="rect">
-            <a:avLst/>
-          </a:prstGeom>
-        </p:spPr>
-      </p:pic>
-    </p:spTree>
-    <p:extLst>
-      <p:ext uri="{BB962C8B-B14F-4D97-AF65-F5344CB8AC3E}">
-        <p14:creationId xmlns:p14="http://schemas.microsoft.com/office/powerpoint/2010/main" val="320732036"/>
-      </p:ext>
-    </p:extLst>
-  </p:cSld>
-  <p:clrMapOvr>
-    <a:masterClrMapping/>
-  </p:clrMapOvr>
-</p:sld>
-</file>
-
-<file path=ppt/slides/slide20.xml><?xml version="1.0" encoding="utf-8"?>
-<p:sld xmlns:a="http://schemas.openxmlformats.org/drawingml/2006/main" xmlns:r="http://schemas.openxmlformats.org/officeDocument/2006/relationships" xmlns:p="http://schemas.openxmlformats.org/presentationml/2006/main">
-  <p:cSld>
-    <p:spTree>
-      <p:nvGrpSpPr>
-        <p:cNvPr id="1" name=""/>
-        <p:cNvGrpSpPr/>
-        <p:nvPr/>
-      </p:nvGrpSpPr>
-      <p:grpSpPr>
-        <a:xfrm>
-          <a:off x="0" y="0"/>
-          <a:ext cx="0" cy="0"/>
-          <a:chOff x="0" y="0"/>
-          <a:chExt cx="0" cy="0"/>
-        </a:xfrm>
-      </p:grpSpPr>
-      <p:sp>
-        <p:nvSpPr>
           <p:cNvPr id="3" name="Rectangle 2"/>
           <p:cNvSpPr/>
           <p:nvPr/>
@@ -33710,13 +32729,76 @@
           <a:p>
             <a:pPr algn="l"/>
             <a:r>
-              <a:rPr sz="2600" b="1">
+              <a:rPr sz="2600" b="1" dirty="0" err="1">
                 <a:solidFill>
                   <a:srgbClr val="FFFFFF"/>
                 </a:solidFill>
                 <a:latin typeface="Calibri"/>
               </a:rPr>
-              <a:t>Andmemudel — kuidas tabelid seotud on</a:t>
+              <a:t>Andmemudel</a:t>
+            </a:r>
+            <a:r>
+              <a:rPr sz="2600" b="1" dirty="0">
+                <a:solidFill>
+                  <a:srgbClr val="FFFFFF"/>
+                </a:solidFill>
+                <a:latin typeface="Calibri"/>
+              </a:rPr>
+              <a:t> — </a:t>
+            </a:r>
+            <a:r>
+              <a:rPr sz="2600" b="1" dirty="0" err="1">
+                <a:solidFill>
+                  <a:srgbClr val="FFFFFF"/>
+                </a:solidFill>
+                <a:latin typeface="Calibri"/>
+              </a:rPr>
+              <a:t>kuidas</a:t>
+            </a:r>
+            <a:r>
+              <a:rPr sz="2600" b="1" dirty="0">
+                <a:solidFill>
+                  <a:srgbClr val="FFFFFF"/>
+                </a:solidFill>
+                <a:latin typeface="Calibri"/>
+              </a:rPr>
+              <a:t> </a:t>
+            </a:r>
+            <a:r>
+              <a:rPr sz="2600" b="1" dirty="0" err="1">
+                <a:solidFill>
+                  <a:srgbClr val="FFFFFF"/>
+                </a:solidFill>
+                <a:latin typeface="Calibri"/>
+              </a:rPr>
+              <a:t>tabelid</a:t>
+            </a:r>
+            <a:r>
+              <a:rPr sz="2600" b="1" dirty="0">
+                <a:solidFill>
+                  <a:srgbClr val="FFFFFF"/>
+                </a:solidFill>
+                <a:latin typeface="Calibri"/>
+              </a:rPr>
+              <a:t> </a:t>
+            </a:r>
+            <a:r>
+              <a:rPr sz="2600" b="1" dirty="0" err="1">
+                <a:solidFill>
+                  <a:srgbClr val="FFFFFF"/>
+                </a:solidFill>
+                <a:latin typeface="Calibri"/>
+              </a:rPr>
+              <a:t>seotud</a:t>
+            </a:r>
+            <a:r>
+              <a:rPr sz="2600" b="1" dirty="0">
+                <a:solidFill>
+                  <a:srgbClr val="FFFFFF"/>
+                </a:solidFill>
+                <a:latin typeface="Calibri"/>
+              </a:rPr>
+              <a:t> on</a:t>
             </a:r>
           </a:p>
         </p:txBody>
@@ -34410,14 +33492,419 @@
           <a:p>
             <a:pPr algn="l"/>
             <a:r>
-              <a:rPr sz="1600" b="0">
+              <a:rPr sz="1600" b="0" dirty="0" err="1">
                 <a:solidFill>
                   <a:srgbClr val="334155"/>
                 </a:solidFill>
                 <a:latin typeface="Calibri"/>
               </a:rPr>
-              <a:t>Üks klient → mitu tellimust.  Üks tellimus → mitu rida.  Iga rida viitab ühele tootele.
-3. päeval liidame need neli tabelit, et vastata küsimusele: kes tõi kõige rohkem tulu?</a:t>
+              <a:t>Üks</a:t>
+            </a:r>
+            <a:r>
+              <a:rPr sz="1600" b="0" dirty="0">
+                <a:solidFill>
+                  <a:srgbClr val="334155"/>
+                </a:solidFill>
+                <a:latin typeface="Calibri"/>
+              </a:rPr>
+              <a:t> </a:t>
+            </a:r>
+            <a:r>
+              <a:rPr sz="1600" b="0" dirty="0" err="1">
+                <a:solidFill>
+                  <a:srgbClr val="334155"/>
+                </a:solidFill>
+                <a:latin typeface="Calibri"/>
+              </a:rPr>
+              <a:t>klient</a:t>
+            </a:r>
+            <a:r>
+              <a:rPr sz="1600" b="0" dirty="0">
+                <a:solidFill>
+                  <a:srgbClr val="334155"/>
+                </a:solidFill>
+                <a:latin typeface="Calibri"/>
+              </a:rPr>
+              <a:t> → </a:t>
+            </a:r>
+            <a:r>
+              <a:rPr sz="1600" b="0" dirty="0" err="1">
+                <a:solidFill>
+                  <a:srgbClr val="334155"/>
+                </a:solidFill>
+                <a:latin typeface="Calibri"/>
+              </a:rPr>
+              <a:t>mitu</a:t>
+            </a:r>
+            <a:r>
+              <a:rPr sz="1600" b="0" dirty="0">
+                <a:solidFill>
+                  <a:srgbClr val="334155"/>
+                </a:solidFill>
+                <a:latin typeface="Calibri"/>
+              </a:rPr>
+              <a:t> </a:t>
+            </a:r>
+            <a:r>
+              <a:rPr sz="1600" b="0" dirty="0" err="1">
+                <a:solidFill>
+                  <a:srgbClr val="334155"/>
+                </a:solidFill>
+                <a:latin typeface="Calibri"/>
+              </a:rPr>
+              <a:t>tellimust</a:t>
+            </a:r>
+            <a:r>
+              <a:rPr sz="1600" b="0" dirty="0">
+                <a:solidFill>
+                  <a:srgbClr val="334155"/>
+                </a:solidFill>
+                <a:latin typeface="Calibri"/>
+              </a:rPr>
+              <a:t>.  </a:t>
+            </a:r>
+            <a:r>
+              <a:rPr sz="1600" b="0" dirty="0" err="1">
+                <a:solidFill>
+                  <a:srgbClr val="334155"/>
+                </a:solidFill>
+                <a:latin typeface="Calibri"/>
+              </a:rPr>
+              <a:t>Üks</a:t>
+            </a:r>
+            <a:r>
+              <a:rPr sz="1600" b="0" dirty="0">
+                <a:solidFill>
+                  <a:srgbClr val="334155"/>
+                </a:solidFill>
+                <a:latin typeface="Calibri"/>
+              </a:rPr>
+              <a:t> </a:t>
+            </a:r>
+            <a:r>
+              <a:rPr sz="1600" b="0" dirty="0" err="1">
+                <a:solidFill>
+                  <a:srgbClr val="334155"/>
+                </a:solidFill>
+                <a:latin typeface="Calibri"/>
+              </a:rPr>
+              <a:t>tellimus</a:t>
+            </a:r>
+            <a:r>
+              <a:rPr sz="1600" b="0" dirty="0">
+                <a:solidFill>
+                  <a:srgbClr val="334155"/>
+                </a:solidFill>
+                <a:latin typeface="Calibri"/>
+              </a:rPr>
+              <a:t> → </a:t>
+            </a:r>
+            <a:r>
+              <a:rPr sz="1600" b="0" dirty="0" err="1">
+                <a:solidFill>
+                  <a:srgbClr val="334155"/>
+                </a:solidFill>
+                <a:latin typeface="Calibri"/>
+              </a:rPr>
+              <a:t>mitu</a:t>
+            </a:r>
+            <a:r>
+              <a:rPr sz="1600" b="0" dirty="0">
+                <a:solidFill>
+                  <a:srgbClr val="334155"/>
+                </a:solidFill>
+                <a:latin typeface="Calibri"/>
+              </a:rPr>
+              <a:t> </a:t>
+            </a:r>
+            <a:r>
+              <a:rPr sz="1600" b="0" dirty="0" err="1">
+                <a:solidFill>
+                  <a:srgbClr val="334155"/>
+                </a:solidFill>
+                <a:latin typeface="Calibri"/>
+              </a:rPr>
+              <a:t>rida</a:t>
+            </a:r>
+            <a:r>
+              <a:rPr sz="1600" b="0" dirty="0">
+                <a:solidFill>
+                  <a:srgbClr val="334155"/>
+                </a:solidFill>
+                <a:latin typeface="Calibri"/>
+              </a:rPr>
+              <a:t>.  Iga </a:t>
+            </a:r>
+            <a:r>
+              <a:rPr sz="1600" b="0" dirty="0" err="1">
+                <a:solidFill>
+                  <a:srgbClr val="334155"/>
+                </a:solidFill>
+                <a:latin typeface="Calibri"/>
+              </a:rPr>
+              <a:t>rida</a:t>
+            </a:r>
+            <a:r>
+              <a:rPr sz="1600" b="0" dirty="0">
+                <a:solidFill>
+                  <a:srgbClr val="334155"/>
+                </a:solidFill>
+                <a:latin typeface="Calibri"/>
+              </a:rPr>
+              <a:t> </a:t>
+            </a:r>
+            <a:r>
+              <a:rPr sz="1600" b="0" dirty="0" err="1">
+                <a:solidFill>
+                  <a:srgbClr val="334155"/>
+                </a:solidFill>
+                <a:latin typeface="Calibri"/>
+              </a:rPr>
+              <a:t>viitab</a:t>
+            </a:r>
+            <a:r>
+              <a:rPr sz="1600" b="0" dirty="0">
+                <a:solidFill>
+                  <a:srgbClr val="334155"/>
+                </a:solidFill>
+                <a:latin typeface="Calibri"/>
+              </a:rPr>
+              <a:t> </a:t>
+            </a:r>
+            <a:r>
+              <a:rPr sz="1600" b="0" dirty="0" err="1">
+                <a:solidFill>
+                  <a:srgbClr val="334155"/>
+                </a:solidFill>
+                <a:latin typeface="Calibri"/>
+              </a:rPr>
+              <a:t>ühele</a:t>
+            </a:r>
+            <a:r>
+              <a:rPr sz="1600" b="0" dirty="0">
+                <a:solidFill>
+                  <a:srgbClr val="334155"/>
+                </a:solidFill>
+                <a:latin typeface="Calibri"/>
+              </a:rPr>
+              <a:t> </a:t>
+            </a:r>
+            <a:r>
+              <a:rPr sz="1600" b="0" dirty="0" err="1">
+                <a:solidFill>
+                  <a:srgbClr val="334155"/>
+                </a:solidFill>
+                <a:latin typeface="Calibri"/>
+              </a:rPr>
+              <a:t>tootele</a:t>
+            </a:r>
+            <a:r>
+              <a:rPr sz="1600" b="0" dirty="0">
+                <a:solidFill>
+                  <a:srgbClr val="334155"/>
+                </a:solidFill>
+                <a:latin typeface="Calibri"/>
+              </a:rPr>
+              <a:t>.
+3. </a:t>
+            </a:r>
+            <a:r>
+              <a:rPr sz="1600" b="0" dirty="0" err="1">
+                <a:solidFill>
+                  <a:srgbClr val="334155"/>
+                </a:solidFill>
+                <a:latin typeface="Calibri"/>
+              </a:rPr>
+              <a:t>päeval</a:t>
+            </a:r>
+            <a:r>
+              <a:rPr sz="1600" b="0" dirty="0">
+                <a:solidFill>
+                  <a:srgbClr val="334155"/>
+                </a:solidFill>
+                <a:latin typeface="Calibri"/>
+              </a:rPr>
+              <a:t> </a:t>
+            </a:r>
+            <a:r>
+              <a:rPr sz="1600" b="0" dirty="0" err="1">
+                <a:solidFill>
+                  <a:srgbClr val="334155"/>
+                </a:solidFill>
+                <a:latin typeface="Calibri"/>
+              </a:rPr>
+              <a:t>liidame</a:t>
+            </a:r>
+            <a:r>
+              <a:rPr sz="1600" b="0" dirty="0">
+                <a:solidFill>
+                  <a:srgbClr val="334155"/>
+                </a:solidFill>
+                <a:latin typeface="Calibri"/>
+              </a:rPr>
+              <a:t> need </a:t>
+            </a:r>
+            <a:r>
+              <a:rPr sz="1600" b="0" dirty="0" err="1">
+                <a:solidFill>
+                  <a:srgbClr val="334155"/>
+                </a:solidFill>
+                <a:latin typeface="Calibri"/>
+              </a:rPr>
+              <a:t>neli</a:t>
+            </a:r>
+            <a:r>
+              <a:rPr sz="1600" b="0" dirty="0">
+                <a:solidFill>
+                  <a:srgbClr val="334155"/>
+                </a:solidFill>
+                <a:latin typeface="Calibri"/>
+              </a:rPr>
+              <a:t> </a:t>
+            </a:r>
+            <a:r>
+              <a:rPr sz="1600" b="0" dirty="0" err="1">
+                <a:solidFill>
+                  <a:srgbClr val="334155"/>
+                </a:solidFill>
+                <a:latin typeface="Calibri"/>
+              </a:rPr>
+              <a:t>tabelit</a:t>
+            </a:r>
+            <a:r>
+              <a:rPr sz="1600" b="0" dirty="0">
+                <a:solidFill>
+                  <a:srgbClr val="334155"/>
+                </a:solidFill>
+                <a:latin typeface="Calibri"/>
+              </a:rPr>
+              <a:t>, et </a:t>
+            </a:r>
+            <a:r>
+              <a:rPr sz="1600" b="0" dirty="0" err="1">
+                <a:solidFill>
+                  <a:srgbClr val="334155"/>
+                </a:solidFill>
+                <a:latin typeface="Calibri"/>
+              </a:rPr>
+              <a:t>vastata</a:t>
+            </a:r>
+            <a:r>
+              <a:rPr sz="1600" b="0" dirty="0">
+                <a:solidFill>
+                  <a:srgbClr val="334155"/>
+                </a:solidFill>
+                <a:latin typeface="Calibri"/>
+              </a:rPr>
+              <a:t> </a:t>
+            </a:r>
+            <a:r>
+              <a:rPr sz="1600" b="0" dirty="0" err="1">
+                <a:solidFill>
+                  <a:srgbClr val="334155"/>
+                </a:solidFill>
+                <a:latin typeface="Calibri"/>
+              </a:rPr>
+              <a:t>küsimusele</a:t>
+            </a:r>
+            <a:r>
+              <a:rPr sz="1600" b="0" dirty="0">
+                <a:solidFill>
+                  <a:srgbClr val="334155"/>
+                </a:solidFill>
+                <a:latin typeface="Calibri"/>
+              </a:rPr>
+              <a:t>: </a:t>
+            </a:r>
+            <a:r>
+              <a:rPr sz="1600" b="0" dirty="0" err="1">
+                <a:solidFill>
+                  <a:srgbClr val="334155"/>
+                </a:solidFill>
+                <a:latin typeface="Calibri"/>
+              </a:rPr>
+              <a:t>kes</a:t>
+            </a:r>
+            <a:r>
+              <a:rPr sz="1600" b="0" dirty="0">
+                <a:solidFill>
+                  <a:srgbClr val="334155"/>
+                </a:solidFill>
+                <a:latin typeface="Calibri"/>
+              </a:rPr>
+              <a:t> </a:t>
+            </a:r>
+            <a:r>
+              <a:rPr sz="1600" b="0" dirty="0" err="1">
+                <a:solidFill>
+                  <a:srgbClr val="334155"/>
+                </a:solidFill>
+                <a:latin typeface="Calibri"/>
+              </a:rPr>
+              <a:t>tõi</a:t>
+            </a:r>
+            <a:r>
+              <a:rPr sz="1600" b="0" dirty="0">
+                <a:solidFill>
+                  <a:srgbClr val="334155"/>
+                </a:solidFill>
+                <a:latin typeface="Calibri"/>
+              </a:rPr>
+              <a:t> </a:t>
+            </a:r>
+            <a:r>
+              <a:rPr sz="1600" b="0" dirty="0" err="1">
+                <a:solidFill>
+                  <a:srgbClr val="334155"/>
+                </a:solidFill>
+                <a:latin typeface="Calibri"/>
+              </a:rPr>
+              <a:t>kõige</a:t>
+            </a:r>
+            <a:r>
+              <a:rPr sz="1600" b="0" dirty="0">
+                <a:solidFill>
+                  <a:srgbClr val="334155"/>
+                </a:solidFill>
+                <a:latin typeface="Calibri"/>
+              </a:rPr>
+              <a:t> </a:t>
+            </a:r>
+            <a:r>
+              <a:rPr sz="1600" b="0" dirty="0" err="1">
+                <a:solidFill>
+                  <a:srgbClr val="334155"/>
+                </a:solidFill>
+                <a:latin typeface="Calibri"/>
+              </a:rPr>
+              <a:t>rohkem</a:t>
+            </a:r>
+            <a:r>
+              <a:rPr sz="1600" b="0" dirty="0">
+                <a:solidFill>
+                  <a:srgbClr val="334155"/>
+                </a:solidFill>
+                <a:latin typeface="Calibri"/>
+              </a:rPr>
+              <a:t> </a:t>
+            </a:r>
+            <a:r>
+              <a:rPr sz="1600" b="0" dirty="0" err="1">
+                <a:solidFill>
+                  <a:srgbClr val="334155"/>
+                </a:solidFill>
+                <a:latin typeface="Calibri"/>
+              </a:rPr>
+              <a:t>tulu</a:t>
+            </a:r>
+            <a:r>
+              <a:rPr sz="1600" b="0" dirty="0">
+                <a:solidFill>
+                  <a:srgbClr val="334155"/>
+                </a:solidFill>
+                <a:latin typeface="Calibri"/>
+              </a:rPr>
+              <a:t>?</a:t>
             </a:r>
           </a:p>
         </p:txBody>
@@ -34543,7 +34030,1078 @@
           </a:fontRef>
         </p:style>
       </p:cxnSp>
+      <p:sp>
+        <p:nvSpPr>
+          <p:cNvPr id="6" name="TextBox 5">
+            <a:extLst>
+              <a:ext uri="{FF2B5EF4-FFF2-40B4-BE49-F238E27FC236}">
+                <a16:creationId xmlns:a16="http://schemas.microsoft.com/office/drawing/2014/main" id="{9E1E6F9D-285F-77E2-66A7-C798625B8B91}"/>
+              </a:ext>
+            </a:extLst>
+          </p:cNvPr>
+          <p:cNvSpPr txBox="1"/>
+          <p:nvPr/>
+        </p:nvSpPr>
+        <p:spPr>
+          <a:xfrm>
+            <a:off x="365760" y="4368420"/>
+            <a:ext cx="3379470" cy="512064"/>
+          </a:xfrm>
+          <a:prstGeom prst="rect">
+            <a:avLst/>
+          </a:prstGeom>
+          <a:noFill/>
+        </p:spPr>
+        <p:txBody>
+          <a:bodyPr wrap="square" anchor="t"/>
+          <a:lstStyle/>
+          <a:p>
+            <a:pPr algn="l"/>
+            <a:r>
+              <a:rPr lang="en-GB" sz="1600" b="1" dirty="0">
+                <a:solidFill>
+                  <a:srgbClr val="334155"/>
+                </a:solidFill>
+                <a:latin typeface="Calibri"/>
+              </a:rPr>
+              <a:t>E-</a:t>
+            </a:r>
+            <a:r>
+              <a:rPr lang="en-GB" sz="1600" b="1" dirty="0" err="1">
+                <a:solidFill>
+                  <a:srgbClr val="334155"/>
+                </a:solidFill>
+                <a:latin typeface="Calibri"/>
+              </a:rPr>
+              <a:t>poe</a:t>
+            </a:r>
+            <a:r>
+              <a:rPr lang="en-GB" sz="1600" b="1" dirty="0">
+                <a:solidFill>
+                  <a:srgbClr val="334155"/>
+                </a:solidFill>
+                <a:latin typeface="Calibri"/>
+              </a:rPr>
+              <a:t> </a:t>
+            </a:r>
+            <a:r>
+              <a:rPr lang="en-GB" sz="1600" b="1" dirty="0" err="1">
+                <a:solidFill>
+                  <a:srgbClr val="334155"/>
+                </a:solidFill>
+                <a:latin typeface="Calibri"/>
+              </a:rPr>
+              <a:t>müügi</a:t>
+            </a:r>
+            <a:r>
+              <a:rPr lang="en-GB" sz="1600" b="1" dirty="0">
+                <a:solidFill>
+                  <a:srgbClr val="334155"/>
+                </a:solidFill>
+                <a:latin typeface="Calibri"/>
+              </a:rPr>
+              <a:t> </a:t>
+            </a:r>
+            <a:r>
+              <a:rPr lang="en-GB" sz="1600" b="1" dirty="0" err="1">
+                <a:solidFill>
+                  <a:srgbClr val="334155"/>
+                </a:solidFill>
+                <a:latin typeface="Calibri"/>
+              </a:rPr>
+              <a:t>andmestik</a:t>
+            </a:r>
+            <a:endParaRPr lang="en-GB" sz="1600" b="1" dirty="0">
+              <a:solidFill>
+                <a:srgbClr val="334155"/>
+              </a:solidFill>
+              <a:latin typeface="Calibri"/>
+            </a:endParaRPr>
+          </a:p>
+        </p:txBody>
+      </p:sp>
     </p:spTree>
+  </p:cSld>
+  <p:clrMapOvr>
+    <a:masterClrMapping/>
+  </p:clrMapOvr>
+</p:sld>
+</file>
+
+<file path=ppt/slides/slide19.xml><?xml version="1.0" encoding="utf-8"?>
+<p:sld xmlns:a="http://schemas.openxmlformats.org/drawingml/2006/main" xmlns:r="http://schemas.openxmlformats.org/officeDocument/2006/relationships" xmlns:p="http://schemas.openxmlformats.org/presentationml/2006/main">
+  <p:cSld>
+    <p:spTree>
+      <p:nvGrpSpPr>
+        <p:cNvPr id="1" name=""/>
+        <p:cNvGrpSpPr/>
+        <p:nvPr/>
+      </p:nvGrpSpPr>
+      <p:grpSpPr>
+        <a:xfrm>
+          <a:off x="0" y="0"/>
+          <a:ext cx="0" cy="0"/>
+          <a:chOff x="0" y="0"/>
+          <a:chExt cx="0" cy="0"/>
+        </a:xfrm>
+      </p:grpSpPr>
+      <p:sp>
+        <p:nvSpPr>
+          <p:cNvPr id="19" name="TextBox 18">
+            <a:extLst>
+              <a:ext uri="{FF2B5EF4-FFF2-40B4-BE49-F238E27FC236}">
+                <a16:creationId xmlns:a16="http://schemas.microsoft.com/office/drawing/2014/main" id="{0DF1AF69-BC06-9EC1-70BB-5B8EA2CAA36D}"/>
+              </a:ext>
+            </a:extLst>
+          </p:cNvPr>
+          <p:cNvSpPr txBox="1"/>
+          <p:nvPr/>
+        </p:nvSpPr>
+        <p:spPr>
+          <a:xfrm>
+            <a:off x="118533" y="1354723"/>
+            <a:ext cx="6096000" cy="3539430"/>
+          </a:xfrm>
+          <a:prstGeom prst="rect">
+            <a:avLst/>
+          </a:prstGeom>
+          <a:noFill/>
+        </p:spPr>
+        <p:txBody>
+          <a:bodyPr wrap="square">
+            <a:spAutoFit/>
+          </a:bodyPr>
+          <a:lstStyle/>
+          <a:p>
+            <a:pPr marL="742950" lvl="1" indent="-285750">
+              <a:buFont typeface="Arial" panose="020B0604020202020204" pitchFamily="34" charset="0"/>
+              <a:buChar char="•"/>
+            </a:pPr>
+            <a:r>
+              <a:rPr lang="en-GB" sz="1600" dirty="0"/>
+              <a:t>Ava SQL editor</a:t>
+            </a:r>
+          </a:p>
+          <a:p>
+            <a:pPr marL="742950" lvl="1" indent="-285750">
+              <a:buFont typeface="Arial" panose="020B0604020202020204" pitchFamily="34" charset="0"/>
+              <a:buChar char="•"/>
+            </a:pPr>
+            <a:br>
+              <a:rPr lang="en-GB" sz="1600" dirty="0"/>
+            </a:br>
+            <a:br>
+              <a:rPr lang="en-GB" sz="1600" dirty="0"/>
+            </a:br>
+            <a:br>
+              <a:rPr lang="en-GB" sz="1600" dirty="0"/>
+            </a:br>
+            <a:br>
+              <a:rPr lang="en-GB" sz="1600" dirty="0"/>
+            </a:br>
+            <a:br>
+              <a:rPr lang="en-GB" sz="1600" dirty="0"/>
+            </a:br>
+            <a:br>
+              <a:rPr lang="en-GB" sz="1600" dirty="0"/>
+            </a:br>
+            <a:br>
+              <a:rPr lang="en-GB" sz="1600" dirty="0"/>
+            </a:br>
+            <a:br>
+              <a:rPr lang="en-GB" sz="1600" dirty="0"/>
+            </a:br>
+            <a:br>
+              <a:rPr lang="en-GB" sz="1600" dirty="0"/>
+            </a:br>
+            <a:endParaRPr lang="en-GB" sz="1600" dirty="0"/>
+          </a:p>
+          <a:p>
+            <a:pPr marL="742950" lvl="1" indent="-285750">
+              <a:buFont typeface="Arial" panose="020B0604020202020204" pitchFamily="34" charset="0"/>
+              <a:buChar char="•"/>
+            </a:pPr>
+            <a:r>
+              <a:rPr lang="en-GB" sz="1600" dirty="0" err="1"/>
+              <a:t>Kirjuta</a:t>
+            </a:r>
+            <a:r>
+              <a:rPr lang="en-GB" sz="1600" dirty="0"/>
+              <a:t> SQL </a:t>
+            </a:r>
+            <a:r>
+              <a:rPr lang="en-GB" sz="1600" dirty="0" err="1"/>
+              <a:t>kood</a:t>
+            </a:r>
+            <a:endParaRPr lang="en-GB" sz="1600" dirty="0"/>
+          </a:p>
+          <a:p>
+            <a:pPr marL="742950" lvl="1" indent="-285750">
+              <a:buFont typeface="Arial" panose="020B0604020202020204" pitchFamily="34" charset="0"/>
+              <a:buChar char="•"/>
+            </a:pPr>
+            <a:r>
+              <a:rPr lang="en-GB" sz="1600" dirty="0" err="1"/>
+              <a:t>Selekteeri</a:t>
+            </a:r>
+            <a:r>
+              <a:rPr lang="en-GB" sz="1600" dirty="0"/>
+              <a:t> SQL</a:t>
+            </a:r>
+          </a:p>
+          <a:p>
+            <a:pPr marL="742950" lvl="1" indent="-285750">
+              <a:buFont typeface="Arial" panose="020B0604020202020204" pitchFamily="34" charset="0"/>
+              <a:buChar char="•"/>
+            </a:pPr>
+            <a:r>
+              <a:rPr lang="en-GB" sz="1600" dirty="0" err="1"/>
+              <a:t>Vajuta</a:t>
+            </a:r>
+            <a:r>
+              <a:rPr lang="en-GB" sz="1600" dirty="0"/>
+              <a:t> Execute SQL query</a:t>
+            </a:r>
+          </a:p>
+        </p:txBody>
+      </p:sp>
+      <p:pic>
+        <p:nvPicPr>
+          <p:cNvPr id="28" name="Picture 27">
+            <a:extLst>
+              <a:ext uri="{FF2B5EF4-FFF2-40B4-BE49-F238E27FC236}">
+                <a16:creationId xmlns:a16="http://schemas.microsoft.com/office/drawing/2014/main" id="{C0E0FC1B-7531-0A8D-C8F3-D380C7D5D083}"/>
+              </a:ext>
+            </a:extLst>
+          </p:cNvPr>
+          <p:cNvPicPr>
+            <a:picLocks noChangeAspect="1"/>
+          </p:cNvPicPr>
+          <p:nvPr/>
+        </p:nvPicPr>
+        <p:blipFill>
+          <a:blip r:embed="rId2"/>
+          <a:stretch>
+            <a:fillRect/>
+          </a:stretch>
+        </p:blipFill>
+        <p:spPr>
+          <a:xfrm>
+            <a:off x="5822615" y="93132"/>
+            <a:ext cx="4669590" cy="5706533"/>
+          </a:xfrm>
+          <a:prstGeom prst="rect">
+            <a:avLst/>
+          </a:prstGeom>
+        </p:spPr>
+      </p:pic>
+      <p:sp>
+        <p:nvSpPr>
+          <p:cNvPr id="2" name="Title 1">
+            <a:extLst>
+              <a:ext uri="{FF2B5EF4-FFF2-40B4-BE49-F238E27FC236}">
+                <a16:creationId xmlns:a16="http://schemas.microsoft.com/office/drawing/2014/main" id="{989F1F5B-2773-801D-DBF5-20EC51A0BCFE}"/>
+              </a:ext>
+            </a:extLst>
+          </p:cNvPr>
+          <p:cNvSpPr>
+            <a:spLocks noGrp="1"/>
+          </p:cNvSpPr>
+          <p:nvPr>
+            <p:ph type="ctrTitle"/>
+          </p:nvPr>
+        </p:nvSpPr>
+        <p:spPr/>
+        <p:txBody>
+          <a:bodyPr/>
+          <a:lstStyle/>
+          <a:p>
+            <a:r>
+              <a:rPr lang="en-GB" dirty="0" err="1"/>
+              <a:t>Tabelite</a:t>
+            </a:r>
+            <a:r>
+              <a:rPr lang="en-GB" dirty="0"/>
+              <a:t> </a:t>
+            </a:r>
+            <a:r>
+              <a:rPr lang="en-GB" dirty="0" err="1"/>
+              <a:t>loomine</a:t>
+            </a:r>
+            <a:r>
+              <a:rPr lang="en-GB" dirty="0"/>
+              <a:t> SQL </a:t>
+            </a:r>
+            <a:r>
+              <a:rPr lang="en-GB" dirty="0" err="1"/>
+              <a:t>abil</a:t>
+            </a:r>
+            <a:br>
+              <a:rPr lang="en-GB" dirty="0"/>
+            </a:br>
+            <a:r>
+              <a:rPr lang="en-GB" dirty="0">
+                <a:solidFill>
+                  <a:srgbClr val="FF0000"/>
+                </a:solidFill>
+              </a:rPr>
+              <a:t>NÄITAN</a:t>
+            </a:r>
+          </a:p>
+        </p:txBody>
+      </p:sp>
+      <p:pic>
+        <p:nvPicPr>
+          <p:cNvPr id="17" name="Content Placeholder 4">
+            <a:extLst>
+              <a:ext uri="{FF2B5EF4-FFF2-40B4-BE49-F238E27FC236}">
+                <a16:creationId xmlns:a16="http://schemas.microsoft.com/office/drawing/2014/main" id="{705C1C1D-AADA-4BA0-5EAD-D9A03E885761}"/>
+              </a:ext>
+            </a:extLst>
+          </p:cNvPr>
+          <p:cNvPicPr>
+            <a:picLocks noChangeAspect="1"/>
+          </p:cNvPicPr>
+          <p:nvPr/>
+        </p:nvPicPr>
+        <p:blipFill>
+          <a:blip r:embed="rId3"/>
+          <a:stretch>
+            <a:fillRect/>
+          </a:stretch>
+        </p:blipFill>
+        <p:spPr>
+          <a:xfrm>
+            <a:off x="877888" y="1647576"/>
+            <a:ext cx="4039164" cy="1781424"/>
+          </a:xfrm>
+          <a:prstGeom prst="rect">
+            <a:avLst/>
+          </a:prstGeom>
+        </p:spPr>
+      </p:pic>
+      <p:cxnSp>
+        <p:nvCxnSpPr>
+          <p:cNvPr id="21" name="Straight Arrow Connector 20">
+            <a:extLst>
+              <a:ext uri="{FF2B5EF4-FFF2-40B4-BE49-F238E27FC236}">
+                <a16:creationId xmlns:a16="http://schemas.microsoft.com/office/drawing/2014/main" id="{6464DF01-41B0-0F72-2D23-3A601D614942}"/>
+              </a:ext>
+            </a:extLst>
+          </p:cNvPr>
+          <p:cNvCxnSpPr>
+            <a:cxnSpLocks/>
+          </p:cNvCxnSpPr>
+          <p:nvPr/>
+        </p:nvCxnSpPr>
+        <p:spPr>
+          <a:xfrm flipV="1">
+            <a:off x="3403600" y="504852"/>
+            <a:ext cx="2692400" cy="4126415"/>
+          </a:xfrm>
+          <a:prstGeom prst="straightConnector1">
+            <a:avLst/>
+          </a:prstGeom>
+          <a:ln>
+            <a:tailEnd type="triangle"/>
+          </a:ln>
+        </p:spPr>
+        <p:style>
+          <a:lnRef idx="1">
+            <a:schemeClr val="accent1"/>
+          </a:lnRef>
+          <a:fillRef idx="0">
+            <a:schemeClr val="accent1"/>
+          </a:fillRef>
+          <a:effectRef idx="0">
+            <a:schemeClr val="accent1"/>
+          </a:effectRef>
+          <a:fontRef idx="minor">
+            <a:schemeClr val="tx1"/>
+          </a:fontRef>
+        </p:style>
+      </p:cxnSp>
+    </p:spTree>
+    <p:extLst>
+      <p:ext uri="{BB962C8B-B14F-4D97-AF65-F5344CB8AC3E}">
+        <p14:creationId xmlns:p14="http://schemas.microsoft.com/office/powerpoint/2010/main" val="1353473769"/>
+      </p:ext>
+    </p:extLst>
+  </p:cSld>
+  <p:clrMapOvr>
+    <a:masterClrMapping/>
+  </p:clrMapOvr>
+</p:sld>
+</file>
+
+<file path=ppt/slides/slide2.xml><?xml version="1.0" encoding="utf-8"?>
+<p:sld xmlns:a="http://schemas.openxmlformats.org/drawingml/2006/main" xmlns:r="http://schemas.openxmlformats.org/officeDocument/2006/relationships" xmlns:p="http://schemas.openxmlformats.org/presentationml/2006/main">
+  <p:cSld>
+    <p:spTree>
+      <p:nvGrpSpPr>
+        <p:cNvPr id="1" name=""/>
+        <p:cNvGrpSpPr/>
+        <p:nvPr/>
+      </p:nvGrpSpPr>
+      <p:grpSpPr>
+        <a:xfrm>
+          <a:off x="0" y="0"/>
+          <a:ext cx="0" cy="0"/>
+          <a:chOff x="0" y="0"/>
+          <a:chExt cx="0" cy="0"/>
+        </a:xfrm>
+      </p:grpSpPr>
+      <p:sp>
+        <p:nvSpPr>
+          <p:cNvPr id="2" name="Title 1">
+            <a:extLst>
+              <a:ext uri="{FF2B5EF4-FFF2-40B4-BE49-F238E27FC236}">
+                <a16:creationId xmlns:a16="http://schemas.microsoft.com/office/drawing/2014/main" id="{29608667-DE06-3788-24A4-71A38A1D6F27}"/>
+              </a:ext>
+            </a:extLst>
+          </p:cNvPr>
+          <p:cNvSpPr>
+            <a:spLocks noGrp="1"/>
+          </p:cNvSpPr>
+          <p:nvPr>
+            <p:ph type="ctrTitle"/>
+          </p:nvPr>
+        </p:nvSpPr>
+        <p:spPr/>
+        <p:txBody>
+          <a:bodyPr/>
+          <a:lstStyle/>
+          <a:p>
+            <a:r>
+              <a:rPr lang="en-GB" dirty="0" err="1"/>
+              <a:t>Tagasiside</a:t>
+            </a:r>
+            <a:endParaRPr lang="en-GB" dirty="0"/>
+          </a:p>
+        </p:txBody>
+      </p:sp>
+      <p:sp>
+        <p:nvSpPr>
+          <p:cNvPr id="3" name="Content Placeholder 2">
+            <a:extLst>
+              <a:ext uri="{FF2B5EF4-FFF2-40B4-BE49-F238E27FC236}">
+                <a16:creationId xmlns:a16="http://schemas.microsoft.com/office/drawing/2014/main" id="{EC99E317-BA8D-D33B-059A-2EDFC9C83BCA}"/>
+              </a:ext>
+            </a:extLst>
+          </p:cNvPr>
+          <p:cNvSpPr>
+            <a:spLocks noGrp="1"/>
+          </p:cNvSpPr>
+          <p:nvPr>
+            <p:ph sz="quarter" idx="10"/>
+          </p:nvPr>
+        </p:nvSpPr>
+        <p:spPr>
+          <a:xfrm>
+            <a:off x="557213" y="5219701"/>
+            <a:ext cx="10941050" cy="838200"/>
+          </a:xfrm>
+        </p:spPr>
+        <p:txBody>
+          <a:bodyPr/>
+          <a:lstStyle/>
+          <a:p>
+            <a:r>
+              <a:rPr lang="en-GB" dirty="0">
+                <a:hlinkClick r:id="rId2"/>
+              </a:rPr>
+              <a:t>https://www.linkedin.com/jobs/view/4462316073/</a:t>
+            </a:r>
+            <a:endParaRPr lang="en-GB" dirty="0"/>
+          </a:p>
+          <a:p>
+            <a:r>
+              <a:rPr lang="en-GB" dirty="0">
+                <a:hlinkClick r:id="rId3"/>
+              </a:rPr>
+              <a:t>https://www.linkedin.com/jobs/view/4463667405/</a:t>
+            </a:r>
+            <a:endParaRPr lang="en-GB" dirty="0"/>
+          </a:p>
+          <a:p>
+            <a:endParaRPr lang="en-GB" dirty="0"/>
+          </a:p>
+        </p:txBody>
+      </p:sp>
+      <p:sp>
+        <p:nvSpPr>
+          <p:cNvPr id="4" name="Title 1">
+            <a:extLst>
+              <a:ext uri="{FF2B5EF4-FFF2-40B4-BE49-F238E27FC236}">
+                <a16:creationId xmlns:a16="http://schemas.microsoft.com/office/drawing/2014/main" id="{496C45BC-CE1D-0477-B969-3E9F7AAB21B7}"/>
+              </a:ext>
+            </a:extLst>
+          </p:cNvPr>
+          <p:cNvSpPr txBox="1">
+            <a:spLocks/>
+          </p:cNvSpPr>
+          <p:nvPr/>
+        </p:nvSpPr>
+        <p:spPr>
+          <a:xfrm>
+            <a:off x="557213" y="4312299"/>
+            <a:ext cx="10044112" cy="357043"/>
+          </a:xfrm>
+          <a:prstGeom prst="rect">
+            <a:avLst/>
+          </a:prstGeom>
+        </p:spPr>
+        <p:txBody>
+          <a:bodyPr vert="horz" lIns="0" tIns="0" rIns="0" bIns="0" rtlCol="0" anchor="t" anchorCtr="0">
+            <a:noAutofit/>
+          </a:bodyPr>
+          <a:lstStyle>
+            <a:lvl1pPr algn="l" defTabSz="914400" rtl="0" eaLnBrk="1" latinLnBrk="0" hangingPunct="1">
+              <a:lnSpc>
+                <a:spcPct val="90000"/>
+              </a:lnSpc>
+              <a:spcBef>
+                <a:spcPct val="0"/>
+              </a:spcBef>
+              <a:buNone/>
+              <a:defRPr sz="3200" b="0" i="0" kern="1200" spc="0">
+                <a:solidFill>
+                  <a:schemeClr val="tx1"/>
+                </a:solidFill>
+                <a:latin typeface="+mj-lt"/>
+                <a:ea typeface="Inter Semi Bold" panose="02000503000000020004" pitchFamily="2" charset="0"/>
+                <a:cs typeface="Inter Semi Bold" panose="02000503000000020004" pitchFamily="2" charset="0"/>
+              </a:defRPr>
+            </a:lvl1pPr>
+          </a:lstStyle>
+          <a:p>
+            <a:r>
+              <a:rPr lang="en-GB" dirty="0" err="1"/>
+              <a:t>Huvitav</a:t>
+            </a:r>
+            <a:r>
+              <a:rPr lang="en-GB" dirty="0"/>
+              <a:t> </a:t>
+            </a:r>
+            <a:r>
+              <a:rPr lang="en-GB" dirty="0" err="1"/>
+              <a:t>töökuulutus</a:t>
+            </a:r>
+            <a:endParaRPr lang="en-GB" dirty="0"/>
+          </a:p>
+        </p:txBody>
+      </p:sp>
+      <p:pic>
+        <p:nvPicPr>
+          <p:cNvPr id="6" name="Picture 5">
+            <a:extLst>
+              <a:ext uri="{FF2B5EF4-FFF2-40B4-BE49-F238E27FC236}">
+                <a16:creationId xmlns:a16="http://schemas.microsoft.com/office/drawing/2014/main" id="{4DEC8323-CA84-5B85-C070-E2C31CDC0725}"/>
+              </a:ext>
+            </a:extLst>
+          </p:cNvPr>
+          <p:cNvPicPr>
+            <a:picLocks noChangeAspect="1"/>
+          </p:cNvPicPr>
+          <p:nvPr/>
+        </p:nvPicPr>
+        <p:blipFill>
+          <a:blip r:embed="rId4"/>
+          <a:stretch>
+            <a:fillRect/>
+          </a:stretch>
+        </p:blipFill>
+        <p:spPr>
+          <a:xfrm>
+            <a:off x="3990975" y="223870"/>
+            <a:ext cx="7941404" cy="3759672"/>
+          </a:xfrm>
+          <a:prstGeom prst="rect">
+            <a:avLst/>
+          </a:prstGeom>
+        </p:spPr>
+      </p:pic>
+    </p:spTree>
+    <p:extLst>
+      <p:ext uri="{BB962C8B-B14F-4D97-AF65-F5344CB8AC3E}">
+        <p14:creationId xmlns:p14="http://schemas.microsoft.com/office/powerpoint/2010/main" val="320732036"/>
+      </p:ext>
+    </p:extLst>
+  </p:cSld>
+  <p:clrMapOvr>
+    <a:masterClrMapping/>
+  </p:clrMapOvr>
+</p:sld>
+</file>
+
+<file path=ppt/slides/slide20.xml><?xml version="1.0" encoding="utf-8"?>
+<p:sld xmlns:a="http://schemas.openxmlformats.org/drawingml/2006/main" xmlns:r="http://schemas.openxmlformats.org/officeDocument/2006/relationships" xmlns:p="http://schemas.openxmlformats.org/presentationml/2006/main">
+  <p:cSld>
+    <p:spTree>
+      <p:nvGrpSpPr>
+        <p:cNvPr id="1" name=""/>
+        <p:cNvGrpSpPr/>
+        <p:nvPr/>
+      </p:nvGrpSpPr>
+      <p:grpSpPr>
+        <a:xfrm>
+          <a:off x="0" y="0"/>
+          <a:ext cx="0" cy="0"/>
+          <a:chOff x="0" y="0"/>
+          <a:chExt cx="0" cy="0"/>
+        </a:xfrm>
+      </p:grpSpPr>
+      <p:sp>
+        <p:nvSpPr>
+          <p:cNvPr id="2" name="Title 1">
+            <a:extLst>
+              <a:ext uri="{FF2B5EF4-FFF2-40B4-BE49-F238E27FC236}">
+                <a16:creationId xmlns:a16="http://schemas.microsoft.com/office/drawing/2014/main" id="{780A8080-41AA-B878-C289-712161E71585}"/>
+              </a:ext>
+            </a:extLst>
+          </p:cNvPr>
+          <p:cNvSpPr>
+            <a:spLocks noGrp="1"/>
+          </p:cNvSpPr>
+          <p:nvPr>
+            <p:ph type="ctrTitle"/>
+          </p:nvPr>
+        </p:nvSpPr>
+        <p:spPr/>
+        <p:txBody>
+          <a:bodyPr/>
+          <a:lstStyle/>
+          <a:p>
+            <a:r>
+              <a:rPr lang="en-GB" dirty="0"/>
+              <a:t>Tee </a:t>
+            </a:r>
+            <a:r>
+              <a:rPr lang="en-GB" dirty="0">
+                <a:solidFill>
+                  <a:srgbClr val="FF0000"/>
+                </a:solidFill>
+              </a:rPr>
+              <a:t>ISE</a:t>
+            </a:r>
+            <a:r>
+              <a:rPr lang="en-GB" dirty="0"/>
+              <a:t> </a:t>
+            </a:r>
+            <a:r>
+              <a:rPr lang="en-GB" dirty="0" err="1"/>
+              <a:t>läbi</a:t>
+            </a:r>
+            <a:r>
+              <a:rPr lang="en-GB" dirty="0"/>
+              <a:t> 4 </a:t>
+            </a:r>
+            <a:r>
+              <a:rPr lang="en-GB" dirty="0" err="1"/>
+              <a:t>tabeli</a:t>
+            </a:r>
+            <a:r>
+              <a:rPr lang="en-GB" dirty="0"/>
+              <a:t> </a:t>
+            </a:r>
+            <a:r>
+              <a:rPr lang="en-GB" dirty="0" err="1"/>
+              <a:t>loomine</a:t>
+            </a:r>
+            <a:r>
+              <a:rPr lang="en-GB" dirty="0"/>
+              <a:t> </a:t>
+            </a:r>
+            <a:r>
+              <a:rPr lang="en-GB" dirty="0" err="1"/>
+              <a:t>ja</a:t>
+            </a:r>
+            <a:r>
+              <a:rPr lang="en-GB" dirty="0"/>
+              <a:t> </a:t>
+            </a:r>
+            <a:r>
+              <a:rPr lang="en-GB" dirty="0" err="1"/>
+              <a:t>kontrolli</a:t>
+            </a:r>
+            <a:r>
+              <a:rPr lang="en-GB" dirty="0"/>
+              <a:t> </a:t>
+            </a:r>
+            <a:r>
+              <a:rPr lang="en-GB" dirty="0" err="1"/>
+              <a:t>tulemust</a:t>
+            </a:r>
+            <a:endParaRPr lang="en-GB" dirty="0"/>
+          </a:p>
+        </p:txBody>
+      </p:sp>
+      <p:pic>
+        <p:nvPicPr>
+          <p:cNvPr id="5" name="Picture 4">
+            <a:extLst>
+              <a:ext uri="{FF2B5EF4-FFF2-40B4-BE49-F238E27FC236}">
+                <a16:creationId xmlns:a16="http://schemas.microsoft.com/office/drawing/2014/main" id="{BBD085A6-8ACC-2645-246A-18FA531627B0}"/>
+              </a:ext>
+            </a:extLst>
+          </p:cNvPr>
+          <p:cNvPicPr>
+            <a:picLocks noChangeAspect="1"/>
+          </p:cNvPicPr>
+          <p:nvPr/>
+        </p:nvPicPr>
+        <p:blipFill>
+          <a:blip r:embed="rId2"/>
+          <a:stretch>
+            <a:fillRect/>
+          </a:stretch>
+        </p:blipFill>
+        <p:spPr>
+          <a:xfrm>
+            <a:off x="6096000" y="1400040"/>
+            <a:ext cx="4205895" cy="3689290"/>
+          </a:xfrm>
+          <a:prstGeom prst="rect">
+            <a:avLst/>
+          </a:prstGeom>
+        </p:spPr>
+      </p:pic>
+      <p:sp>
+        <p:nvSpPr>
+          <p:cNvPr id="7" name="Content Placeholder 6">
+            <a:extLst>
+              <a:ext uri="{FF2B5EF4-FFF2-40B4-BE49-F238E27FC236}">
+                <a16:creationId xmlns:a16="http://schemas.microsoft.com/office/drawing/2014/main" id="{581BEDD7-F60F-F2B5-76B5-DAA0EC022CCB}"/>
+              </a:ext>
+            </a:extLst>
+          </p:cNvPr>
+          <p:cNvSpPr txBox="1">
+            <a:spLocks noGrp="1"/>
+          </p:cNvSpPr>
+          <p:nvPr>
+            <p:ph sz="quarter" idx="10"/>
+          </p:nvPr>
+        </p:nvSpPr>
+        <p:spPr>
+          <a:xfrm>
+            <a:off x="6096000" y="1051069"/>
+            <a:ext cx="6149445" cy="793935"/>
+          </a:xfrm>
+          <a:prstGeom prst="rect">
+            <a:avLst/>
+          </a:prstGeom>
+          <a:noFill/>
+        </p:spPr>
+        <p:txBody>
+          <a:bodyPr wrap="square">
+            <a:spAutoFit/>
+          </a:bodyPr>
+          <a:lstStyle/>
+          <a:p>
+            <a:pPr marL="0" marR="0">
+              <a:buNone/>
+            </a:pPr>
+            <a:r>
+              <a:rPr lang="en-GB" dirty="0"/>
+              <a:t>Kas </a:t>
+            </a:r>
+            <a:r>
+              <a:rPr lang="en-GB" dirty="0" err="1"/>
+              <a:t>näed</a:t>
+            </a:r>
+            <a:r>
+              <a:rPr lang="en-GB" dirty="0"/>
+              <a:t> </a:t>
+            </a:r>
+            <a:r>
+              <a:rPr lang="en-GB" dirty="0" err="1"/>
+              <a:t>tabelit</a:t>
+            </a:r>
+            <a:r>
+              <a:rPr lang="en-GB" dirty="0"/>
+              <a:t> </a:t>
+            </a:r>
+            <a:r>
+              <a:rPr lang="en-GB" dirty="0" err="1"/>
+              <a:t>ja</a:t>
+            </a:r>
+            <a:r>
+              <a:rPr lang="en-GB" dirty="0"/>
+              <a:t> </a:t>
+            </a:r>
+            <a:r>
+              <a:rPr lang="en-GB" dirty="0" err="1"/>
+              <a:t>veerge</a:t>
+            </a:r>
+            <a:r>
+              <a:rPr lang="en-GB" dirty="0"/>
+              <a:t>?</a:t>
+            </a:r>
+          </a:p>
+          <a:p>
+            <a:pPr marL="0" marR="0">
+              <a:buNone/>
+            </a:pPr>
+            <a:endParaRPr lang="en-GB" b="1" dirty="0"/>
+          </a:p>
+          <a:p>
+            <a:pPr marL="0" marR="0">
+              <a:buNone/>
+            </a:pPr>
+            <a:endParaRPr lang="en-GB" b="1" dirty="0"/>
+          </a:p>
+        </p:txBody>
+      </p:sp>
+      <p:pic>
+        <p:nvPicPr>
+          <p:cNvPr id="9" name="Picture 8">
+            <a:extLst>
+              <a:ext uri="{FF2B5EF4-FFF2-40B4-BE49-F238E27FC236}">
+                <a16:creationId xmlns:a16="http://schemas.microsoft.com/office/drawing/2014/main" id="{EEE1C979-09F9-C97F-66A8-B7D27753CB0A}"/>
+              </a:ext>
+            </a:extLst>
+          </p:cNvPr>
+          <p:cNvPicPr>
+            <a:picLocks noChangeAspect="1"/>
+          </p:cNvPicPr>
+          <p:nvPr/>
+        </p:nvPicPr>
+        <p:blipFill>
+          <a:blip r:embed="rId3"/>
+          <a:stretch>
+            <a:fillRect/>
+          </a:stretch>
+        </p:blipFill>
+        <p:spPr>
+          <a:xfrm>
+            <a:off x="9168078" y="3083903"/>
+            <a:ext cx="3619686" cy="3111660"/>
+          </a:xfrm>
+          <a:prstGeom prst="rect">
+            <a:avLst/>
+          </a:prstGeom>
+        </p:spPr>
+      </p:pic>
+      <p:sp>
+        <p:nvSpPr>
+          <p:cNvPr id="11" name="TextBox 10">
+            <a:extLst>
+              <a:ext uri="{FF2B5EF4-FFF2-40B4-BE49-F238E27FC236}">
+                <a16:creationId xmlns:a16="http://schemas.microsoft.com/office/drawing/2014/main" id="{AE01E8B0-0D43-9341-8E62-2153E79923E1}"/>
+              </a:ext>
+            </a:extLst>
+          </p:cNvPr>
+          <p:cNvSpPr txBox="1"/>
+          <p:nvPr/>
+        </p:nvSpPr>
+        <p:spPr>
+          <a:xfrm>
+            <a:off x="313265" y="6085713"/>
+            <a:ext cx="8415867" cy="369332"/>
+          </a:xfrm>
+          <a:prstGeom prst="rect">
+            <a:avLst/>
+          </a:prstGeom>
+          <a:noFill/>
+        </p:spPr>
+        <p:txBody>
+          <a:bodyPr wrap="square">
+            <a:spAutoFit/>
+          </a:bodyPr>
+          <a:lstStyle/>
+          <a:p>
+            <a:pPr marL="0" marR="0">
+              <a:buNone/>
+            </a:pPr>
+            <a:r>
+              <a:rPr lang="en-GB" sz="1600" b="1" dirty="0"/>
+              <a:t>Kui table </a:t>
+            </a:r>
+            <a:r>
+              <a:rPr lang="en-GB" sz="1600" b="1" dirty="0" err="1"/>
+              <a:t>tekib</a:t>
+            </a:r>
+            <a:r>
+              <a:rPr lang="en-GB" sz="1600" b="1" dirty="0"/>
+              <a:t> </a:t>
+            </a:r>
+            <a:r>
+              <a:rPr lang="en-GB" sz="1600" b="1" dirty="0" err="1"/>
+              <a:t>valesti</a:t>
+            </a:r>
+            <a:r>
+              <a:rPr lang="en-GB" sz="1600" b="1" dirty="0"/>
+              <a:t>, </a:t>
+            </a:r>
+            <a:r>
+              <a:rPr lang="en-GB" sz="1600" b="1" dirty="0" err="1"/>
+              <a:t>saab</a:t>
+            </a:r>
+            <a:r>
+              <a:rPr lang="en-GB" sz="1600" b="1" dirty="0"/>
+              <a:t> </a:t>
+            </a:r>
+            <a:r>
+              <a:rPr lang="en-GB" sz="1600" b="1" dirty="0" err="1"/>
+              <a:t>selle</a:t>
+            </a:r>
+            <a:r>
+              <a:rPr lang="en-GB" sz="1600" b="1" dirty="0"/>
+              <a:t> </a:t>
+            </a:r>
+            <a:r>
+              <a:rPr lang="en-GB" sz="1600" b="1" dirty="0" err="1"/>
+              <a:t>kustutada</a:t>
+            </a:r>
+            <a:r>
+              <a:rPr lang="en-GB" sz="1600" b="1" dirty="0"/>
+              <a:t> </a:t>
+            </a:r>
+            <a:r>
+              <a:rPr lang="en-GB" sz="1600" b="1" dirty="0" err="1"/>
+              <a:t>käsuga</a:t>
+            </a:r>
+            <a:r>
+              <a:rPr lang="en-GB" sz="1600" b="1" dirty="0"/>
+              <a:t>: </a:t>
+            </a:r>
+            <a:r>
+              <a:rPr lang="en-GB" sz="1800" b="1" dirty="0">
+                <a:solidFill>
+                  <a:schemeClr val="tx1"/>
+                </a:solidFill>
+                <a:effectLst/>
+                <a:latin typeface="+mn-lt"/>
+              </a:rPr>
+              <a:t>drop</a:t>
+            </a:r>
+            <a:r>
+              <a:rPr lang="en-GB" sz="1800" dirty="0">
+                <a:solidFill>
+                  <a:schemeClr val="tx1"/>
+                </a:solidFill>
+                <a:effectLst/>
+                <a:latin typeface="+mn-lt"/>
+              </a:rPr>
+              <a:t> </a:t>
+            </a:r>
+            <a:r>
+              <a:rPr lang="en-GB" sz="1800" b="1" dirty="0">
+                <a:solidFill>
+                  <a:schemeClr val="tx1"/>
+                </a:solidFill>
+                <a:effectLst/>
+                <a:latin typeface="+mn-lt"/>
+              </a:rPr>
+              <a:t>table</a:t>
+            </a:r>
+            <a:r>
+              <a:rPr lang="en-GB" sz="1800" dirty="0">
+                <a:solidFill>
+                  <a:schemeClr val="tx1"/>
+                </a:solidFill>
+                <a:effectLst/>
+                <a:latin typeface="+mn-lt"/>
+              </a:rPr>
+              <a:t> [</a:t>
+            </a:r>
+            <a:r>
+              <a:rPr lang="en-GB" sz="1800" dirty="0" err="1">
+                <a:solidFill>
+                  <a:schemeClr val="tx1"/>
+                </a:solidFill>
+                <a:effectLst/>
+                <a:latin typeface="+mn-lt"/>
+              </a:rPr>
+              <a:t>tabeli_nimi</a:t>
+            </a:r>
+            <a:r>
+              <a:rPr lang="en-GB" sz="1800" dirty="0">
+                <a:solidFill>
+                  <a:schemeClr val="tx1"/>
+                </a:solidFill>
+                <a:effectLst/>
+                <a:latin typeface="+mn-lt"/>
+              </a:rPr>
+              <a:t>]</a:t>
+            </a:r>
+            <a:endParaRPr lang="en-GB" sz="1000" dirty="0">
+              <a:solidFill>
+                <a:srgbClr val="000000"/>
+              </a:solidFill>
+              <a:effectLst/>
+              <a:latin typeface="Consolas" panose="020B0609020204030204" pitchFamily="49" charset="0"/>
+            </a:endParaRPr>
+          </a:p>
+        </p:txBody>
+      </p:sp>
+      <p:pic>
+        <p:nvPicPr>
+          <p:cNvPr id="13" name="Picture 12">
+            <a:extLst>
+              <a:ext uri="{FF2B5EF4-FFF2-40B4-BE49-F238E27FC236}">
+                <a16:creationId xmlns:a16="http://schemas.microsoft.com/office/drawing/2014/main" id="{2433208A-2EAA-AACD-8457-DF991B5A4C2A}"/>
+              </a:ext>
+            </a:extLst>
+          </p:cNvPr>
+          <p:cNvPicPr>
+            <a:picLocks noChangeAspect="1"/>
+          </p:cNvPicPr>
+          <p:nvPr/>
+        </p:nvPicPr>
+        <p:blipFill>
+          <a:blip r:embed="rId4"/>
+          <a:stretch>
+            <a:fillRect/>
+          </a:stretch>
+        </p:blipFill>
+        <p:spPr>
+          <a:xfrm>
+            <a:off x="2116667" y="1296049"/>
+            <a:ext cx="3869885" cy="4729243"/>
+          </a:xfrm>
+          <a:prstGeom prst="rect">
+            <a:avLst/>
+          </a:prstGeom>
+        </p:spPr>
+      </p:pic>
+      <p:pic>
+        <p:nvPicPr>
+          <p:cNvPr id="15" name="Content Placeholder 4">
+            <a:extLst>
+              <a:ext uri="{FF2B5EF4-FFF2-40B4-BE49-F238E27FC236}">
+                <a16:creationId xmlns:a16="http://schemas.microsoft.com/office/drawing/2014/main" id="{AC87158D-01BD-FAB5-3B5E-662487ECC55B}"/>
+              </a:ext>
+            </a:extLst>
+          </p:cNvPr>
+          <p:cNvPicPr>
+            <a:picLocks noChangeAspect="1"/>
+          </p:cNvPicPr>
+          <p:nvPr/>
+        </p:nvPicPr>
+        <p:blipFill>
+          <a:blip r:embed="rId5"/>
+          <a:srcRect r="30643"/>
+          <a:stretch>
+            <a:fillRect/>
+          </a:stretch>
+        </p:blipFill>
+        <p:spPr>
+          <a:xfrm>
+            <a:off x="74174" y="1400040"/>
+            <a:ext cx="2042493" cy="1298824"/>
+          </a:xfrm>
+          <a:prstGeom prst="rect">
+            <a:avLst/>
+          </a:prstGeom>
+        </p:spPr>
+      </p:pic>
+    </p:spTree>
+    <p:extLst>
+      <p:ext uri="{BB962C8B-B14F-4D97-AF65-F5344CB8AC3E}">
+        <p14:creationId xmlns:p14="http://schemas.microsoft.com/office/powerpoint/2010/main" val="2811429562"/>
+      </p:ext>
+    </p:extLst>
   </p:cSld>
   <p:clrMapOvr>
     <a:masterClrMapping/>
@@ -36504,6 +37062,22 @@
             <a:r>
               <a:rPr lang="en-GB" dirty="0"/>
               <a:t>: </a:t>
+            </a:r>
+            <a:r>
+              <a:rPr lang="en-GB" dirty="0" err="1"/>
+              <a:t>lae</a:t>
+            </a:r>
+            <a:r>
+              <a:rPr lang="en-GB" dirty="0"/>
+              <a:t> </a:t>
+            </a:r>
+            <a:r>
+              <a:rPr lang="en-GB" dirty="0" err="1"/>
+              <a:t>githubist</a:t>
+            </a:r>
+            <a:r>
+              <a:rPr lang="en-GB"/>
+              <a:t> alla, </a:t>
             </a:r>
             <a:r>
               <a:rPr lang="en-GB" dirty="0" err="1"/>
@@ -53022,6 +53596,12 @@
 </file>
 
 <file path=customXml/item1.xml><?xml version="1.0" encoding="utf-8"?>
+<p:properties xmlns:p="http://schemas.microsoft.com/office/2006/metadata/properties" xmlns:xsi="http://www.w3.org/2001/XMLSchema-instance" xmlns:pc="http://schemas.microsoft.com/office/infopath/2007/PartnerControls">
+  <documentManagement/>
+</p:properties>
+</file>
+
+<file path=customXml/item2.xml><?xml version="1.0" encoding="utf-8"?>
 <ct:contentTypeSchema xmlns:ct="http://schemas.microsoft.com/office/2006/metadata/contentType" xmlns:ma="http://schemas.microsoft.com/office/2006/metadata/properties/metaAttributes" ct:_="" ma:_="" ma:contentTypeName="Document" ma:contentTypeID="0x010100C4D27B8FA8976546BCD79313C588588D" ma:contentTypeVersion="8" ma:contentTypeDescription="Create a new document." ma:contentTypeScope="" ma:versionID="a112c56f6fe148a79025c76584832af0">
   <xsd:schema xmlns:xsd="http://www.w3.org/2001/XMLSchema" xmlns:xs="http://www.w3.org/2001/XMLSchema" xmlns:p="http://schemas.microsoft.com/office/2006/metadata/properties" xmlns:ns2="a1a2d923-8fea-42f1-bd41-9cdfff65694e" targetNamespace="http://schemas.microsoft.com/office/2006/metadata/properties" ma:root="true" ma:fieldsID="97c8655d467eaa9470a714421e7268c0" ns2:_="">
     <xsd:import namespace="a1a2d923-8fea-42f1-bd41-9cdfff65694e"/>
@@ -53189,7 +53769,7 @@
 </ct:contentTypeSchema>
 </file>
 
-<file path=customXml/item2.xml><?xml version="1.0" encoding="utf-8"?>
+<file path=customXml/item3.xml><?xml version="1.0" encoding="utf-8"?>
 <?mso-contentType ?>
 <FormTemplates xmlns="http://schemas.microsoft.com/sharepoint/v3/contenttype/forms">
   <Display>DocumentLibraryForm</Display>
@@ -53198,13 +53778,16 @@
 </FormTemplates>
 </file>
 
-<file path=customXml/item3.xml><?xml version="1.0" encoding="utf-8"?>
-<p:properties xmlns:p="http://schemas.microsoft.com/office/2006/metadata/properties" xmlns:xsi="http://www.w3.org/2001/XMLSchema-instance" xmlns:pc="http://schemas.microsoft.com/office/infopath/2007/PartnerControls">
-  <documentManagement/>
-</p:properties>
+<file path=customXml/itemProps1.xml><?xml version="1.0" encoding="utf-8"?>
+<ds:datastoreItem xmlns:ds="http://schemas.openxmlformats.org/officeDocument/2006/customXml" ds:itemID="{5BDF4908-A52A-47DD-A794-6E02D71942FC}">
+  <ds:schemaRefs>
+    <ds:schemaRef ds:uri="http://schemas.microsoft.com/office/2006/metadata/properties"/>
+    <ds:schemaRef ds:uri="http://schemas.microsoft.com/office/infopath/2007/PartnerControls"/>
+  </ds:schemaRefs>
+</ds:datastoreItem>
 </file>
 
-<file path=customXml/itemProps1.xml><?xml version="1.0" encoding="utf-8"?>
+<file path=customXml/itemProps2.xml><?xml version="1.0" encoding="utf-8"?>
 <ds:datastoreItem xmlns:ds="http://schemas.openxmlformats.org/officeDocument/2006/customXml" ds:itemID="{9CF4F972-2392-44D0-AA45-41AC4FDC4A59}">
   <ds:schemaRefs>
     <ds:schemaRef ds:uri="a1a2d923-8fea-42f1-bd41-9cdfff65694e"/>
@@ -53222,19 +53805,10 @@
 </ds:datastoreItem>
 </file>
 
-<file path=customXml/itemProps2.xml><?xml version="1.0" encoding="utf-8"?>
+<file path=customXml/itemProps3.xml><?xml version="1.0" encoding="utf-8"?>
 <ds:datastoreItem xmlns:ds="http://schemas.openxmlformats.org/officeDocument/2006/customXml" ds:itemID="{9DC439CA-6F1C-4005-ACA6-A52E04DEE0A7}">
   <ds:schemaRefs>
     <ds:schemaRef ds:uri="http://schemas.microsoft.com/sharepoint/v3/contenttype/forms"/>
-  </ds:schemaRefs>
-</ds:datastoreItem>
-</file>
-
-<file path=customXml/itemProps3.xml><?xml version="1.0" encoding="utf-8"?>
-<ds:datastoreItem xmlns:ds="http://schemas.openxmlformats.org/officeDocument/2006/customXml" ds:itemID="{5BDF4908-A52A-47DD-A794-6E02D71942FC}">
-  <ds:schemaRefs>
-    <ds:schemaRef ds:uri="http://schemas.microsoft.com/office/2006/metadata/properties"/>
-    <ds:schemaRef ds:uri="http://schemas.microsoft.com/office/infopath/2007/PartnerControls"/>
   </ds:schemaRefs>
 </ds:datastoreItem>
 </file>
